--- a/ChineseChess_Java/src/main/resources/dev/演示文稿1.pptx
+++ b/ChineseChess_Java/src/main/resources/dev/演示文稿1.pptx
@@ -7,6 +7,7 @@
   <p:sldIdLst>
     <p:sldId id="256" r:id="rId2"/>
     <p:sldId id="257" r:id="rId3"/>
+    <p:sldId id="258" r:id="rId4"/>
   </p:sldIdLst>
   <p:sldSz cx="12192000" cy="6858000"/>
   <p:notesSz cx="6858000" cy="9144000"/>
@@ -105,6 +106,11 @@
       </a:defRPr>
     </a:lvl9pPr>
   </p:defaultTextStyle>
+  <p:extLst>
+    <p:ext uri="{EFAFB233-063F-42B5-8137-9DF3F51BA10A}">
+      <p15:sldGuideLst xmlns:p15="http://schemas.microsoft.com/office/powerpoint/2012/main"/>
+    </p:ext>
+  </p:extLst>
 </p:presentation>
 </file>
 
@@ -255,7 +261,7 @@
           <a:p>
             <a:fld id="{5D76D05C-9A24-4130-9267-AE09E49CB46B}" type="datetimeFigureOut">
               <a:rPr lang="zh-CN" altLang="en-US" smtClean="0"/>
-              <a:t>2025/11/10</a:t>
+              <a:t>2025/11/12</a:t>
             </a:fld>
             <a:endParaRPr lang="zh-CN" altLang="en-US"/>
           </a:p>
@@ -453,7 +459,7 @@
           <a:p>
             <a:fld id="{5D76D05C-9A24-4130-9267-AE09E49CB46B}" type="datetimeFigureOut">
               <a:rPr lang="zh-CN" altLang="en-US" smtClean="0"/>
-              <a:t>2025/11/10</a:t>
+              <a:t>2025/11/12</a:t>
             </a:fld>
             <a:endParaRPr lang="zh-CN" altLang="en-US"/>
           </a:p>
@@ -661,7 +667,7 @@
           <a:p>
             <a:fld id="{5D76D05C-9A24-4130-9267-AE09E49CB46B}" type="datetimeFigureOut">
               <a:rPr lang="zh-CN" altLang="en-US" smtClean="0"/>
-              <a:t>2025/11/10</a:t>
+              <a:t>2025/11/12</a:t>
             </a:fld>
             <a:endParaRPr lang="zh-CN" altLang="en-US"/>
           </a:p>
@@ -859,7 +865,7 @@
           <a:p>
             <a:fld id="{5D76D05C-9A24-4130-9267-AE09E49CB46B}" type="datetimeFigureOut">
               <a:rPr lang="zh-CN" altLang="en-US" smtClean="0"/>
-              <a:t>2025/11/10</a:t>
+              <a:t>2025/11/12</a:t>
             </a:fld>
             <a:endParaRPr lang="zh-CN" altLang="en-US"/>
           </a:p>
@@ -1134,7 +1140,7 @@
           <a:p>
             <a:fld id="{5D76D05C-9A24-4130-9267-AE09E49CB46B}" type="datetimeFigureOut">
               <a:rPr lang="zh-CN" altLang="en-US" smtClean="0"/>
-              <a:t>2025/11/10</a:t>
+              <a:t>2025/11/12</a:t>
             </a:fld>
             <a:endParaRPr lang="zh-CN" altLang="en-US"/>
           </a:p>
@@ -1399,7 +1405,7 @@
           <a:p>
             <a:fld id="{5D76D05C-9A24-4130-9267-AE09E49CB46B}" type="datetimeFigureOut">
               <a:rPr lang="zh-CN" altLang="en-US" smtClean="0"/>
-              <a:t>2025/11/10</a:t>
+              <a:t>2025/11/12</a:t>
             </a:fld>
             <a:endParaRPr lang="zh-CN" altLang="en-US"/>
           </a:p>
@@ -1811,7 +1817,7 @@
           <a:p>
             <a:fld id="{5D76D05C-9A24-4130-9267-AE09E49CB46B}" type="datetimeFigureOut">
               <a:rPr lang="zh-CN" altLang="en-US" smtClean="0"/>
-              <a:t>2025/11/10</a:t>
+              <a:t>2025/11/12</a:t>
             </a:fld>
             <a:endParaRPr lang="zh-CN" altLang="en-US"/>
           </a:p>
@@ -1952,7 +1958,7 @@
           <a:p>
             <a:fld id="{5D76D05C-9A24-4130-9267-AE09E49CB46B}" type="datetimeFigureOut">
               <a:rPr lang="zh-CN" altLang="en-US" smtClean="0"/>
-              <a:t>2025/11/10</a:t>
+              <a:t>2025/11/12</a:t>
             </a:fld>
             <a:endParaRPr lang="zh-CN" altLang="en-US"/>
           </a:p>
@@ -2065,7 +2071,7 @@
           <a:p>
             <a:fld id="{5D76D05C-9A24-4130-9267-AE09E49CB46B}" type="datetimeFigureOut">
               <a:rPr lang="zh-CN" altLang="en-US" smtClean="0"/>
-              <a:t>2025/11/10</a:t>
+              <a:t>2025/11/12</a:t>
             </a:fld>
             <a:endParaRPr lang="zh-CN" altLang="en-US"/>
           </a:p>
@@ -2376,7 +2382,7 @@
           <a:p>
             <a:fld id="{5D76D05C-9A24-4130-9267-AE09E49CB46B}" type="datetimeFigureOut">
               <a:rPr lang="zh-CN" altLang="en-US" smtClean="0"/>
-              <a:t>2025/11/10</a:t>
+              <a:t>2025/11/12</a:t>
             </a:fld>
             <a:endParaRPr lang="zh-CN" altLang="en-US"/>
           </a:p>
@@ -2664,7 +2670,7 @@
           <a:p>
             <a:fld id="{5D76D05C-9A24-4130-9267-AE09E49CB46B}" type="datetimeFigureOut">
               <a:rPr lang="zh-CN" altLang="en-US" smtClean="0"/>
-              <a:t>2025/11/10</a:t>
+              <a:t>2025/11/12</a:t>
             </a:fld>
             <a:endParaRPr lang="zh-CN" altLang="en-US"/>
           </a:p>
@@ -2905,7 +2911,7 @@
           <a:p>
             <a:fld id="{5D76D05C-9A24-4130-9267-AE09E49CB46B}" type="datetimeFigureOut">
               <a:rPr lang="zh-CN" altLang="en-US" smtClean="0"/>
-              <a:t>2025/11/10</a:t>
+              <a:t>2025/11/12</a:t>
             </a:fld>
             <a:endParaRPr lang="zh-CN" altLang="en-US"/>
           </a:p>
@@ -3322,94 +3328,12 @@
           <a:chExt cx="0" cy="0"/>
         </a:xfrm>
       </p:grpSpPr>
-      <p:pic>
-        <p:nvPicPr>
-          <p:cNvPr id="7" name="图片 6" descr="在沙滩上&#10;&#10;AI 生成的内容可能不正确。">
-            <a:extLst>
-              <a:ext uri="{FF2B5EF4-FFF2-40B4-BE49-F238E27FC236}">
-                <a16:creationId xmlns:a16="http://schemas.microsoft.com/office/drawing/2014/main" id="{131A7130-CF90-089F-C7A4-C0FBC817A71E}"/>
-              </a:ext>
-            </a:extLst>
-          </p:cNvPr>
-          <p:cNvPicPr>
-            <a:picLocks noChangeAspect="1"/>
-          </p:cNvPicPr>
-          <p:nvPr/>
-        </p:nvPicPr>
-        <p:blipFill>
-          <a:blip r:embed="rId2">
-            <a:extLst>
-              <a:ext uri="{BEBA8EAE-BF5A-486C-A8C5-ECC9F3942E4B}">
-                <a14:imgProps xmlns:a14="http://schemas.microsoft.com/office/drawing/2010/main">
-                  <a14:imgLayer r:embed="rId3">
-                    <a14:imgEffect>
-                      <a14:backgroundRemoval t="39147" b="51919" l="10000" r="90000">
-                        <a14:foregroundMark x1="23403" y1="41172" x2="23403" y2="41172"/>
-                        <a14:foregroundMark x1="24049" y1="41818" x2="24049" y2="41818"/>
-                        <a14:foregroundMark x1="20962" y1="45455" x2="20962" y2="45455"/>
-                        <a14:foregroundMark x1="20962" y1="45455" x2="20962" y2="45455"/>
-                        <a14:foregroundMark x1="25628" y1="46343" x2="25628" y2="46343"/>
-                        <a14:foregroundMark x1="25844" y1="46424" x2="25844" y2="46424"/>
-                        <a14:foregroundMark x1="38263" y1="44727" x2="38263" y2="44970"/>
-                        <a14:foregroundMark x1="36971" y1="43636" x2="36971" y2="43636"/>
-                        <a14:foregroundMark x1="36971" y1="43636" x2="36971" y2="43636"/>
-                        <a14:foregroundMark x1="43862" y1="44525" x2="43862" y2="44525"/>
-                        <a14:foregroundMark x1="43862" y1="44525" x2="43862" y2="44525"/>
-                        <a14:foregroundMark x1="47452" y1="46990" x2="47452" y2="46990"/>
-                        <a14:foregroundMark x1="47452" y1="46990" x2="47452" y2="46990"/>
-                        <a14:foregroundMark x1="51902" y1="47798" x2="51902" y2="47798"/>
-                        <a14:foregroundMark x1="51902" y1="47798" x2="51902" y2="47798"/>
-                        <a14:foregroundMark x1="51759" y1="44606" x2="51759" y2="44606"/>
-                        <a14:foregroundMark x1="51759" y1="44606" x2="51759" y2="44606"/>
-                        <a14:foregroundMark x1="54056" y1="41899" x2="54056" y2="41899"/>
-                        <a14:foregroundMark x1="54056" y1="41899" x2="54056" y2="41899"/>
-                        <a14:foregroundMark x1="57430" y1="43717" x2="57430" y2="43717"/>
-                        <a14:foregroundMark x1="57430" y1="43717" x2="57430" y2="43717"/>
-                        <a14:foregroundMark x1="58076" y1="42263" x2="58076" y2="42263"/>
-                        <a14:foregroundMark x1="58076" y1="42263" x2="58076" y2="42263"/>
-                        <a14:foregroundMark x1="26633" y1="43434" x2="26633" y2="43434"/>
-                        <a14:foregroundMark x1="26633" y1="43434" x2="26633" y2="43434"/>
-                        <a14:foregroundMark x1="25628" y1="41535" x2="25628" y2="41535"/>
-                        <a14:foregroundMark x1="25628" y1="41535" x2="25628" y2="41535"/>
-                        <a14:foregroundMark x1="21464" y1="44444" x2="21464" y2="44444"/>
-                        <a14:foregroundMark x1="21464" y1="44444" x2="21464" y2="44444"/>
-                        <a14:foregroundMark x1="19885" y1="43798" x2="19885" y2="43798"/>
-                        <a14:foregroundMark x1="19885" y1="43798" x2="19885" y2="43798"/>
-                        <a14:foregroundMark x1="81479" y1="41576" x2="81479" y2="41576"/>
-                        <a14:foregroundMark x1="81479" y1="41576" x2="81479" y2="41576"/>
-                        <a14:foregroundMark x1="81479" y1="41576" x2="81479" y2="41576"/>
-                        <a14:backgroundMark x1="37401" y1="45535" x2="37401" y2="45535"/>
-                      </a14:backgroundRemoval>
-                    </a14:imgEffect>
-                  </a14:imgLayer>
-                </a14:imgProps>
-              </a:ext>
-              <a:ext uri="{28A0092B-C50C-407E-A947-70E740481C1C}">
-                <a14:useLocalDpi xmlns:a14="http://schemas.microsoft.com/office/drawing/2010/main" val="0"/>
-              </a:ext>
-            </a:extLst>
-          </a:blip>
-          <a:srcRect t="37551" b="46485"/>
-          <a:stretch>
-            <a:fillRect/>
-          </a:stretch>
-        </p:blipFill>
-        <p:spPr>
-          <a:xfrm>
-            <a:off x="3289241" y="1365413"/>
-            <a:ext cx="4748217" cy="1347214"/>
-          </a:xfrm>
-          <a:prstGeom prst="rect">
-            <a:avLst/>
-          </a:prstGeom>
-        </p:spPr>
-      </p:pic>
       <p:grpSp>
         <p:nvGrpSpPr>
-          <p:cNvPr id="25" name="组合 24">
+          <p:cNvPr id="30" name="组合 29">
             <a:extLst>
               <a:ext uri="{FF2B5EF4-FFF2-40B4-BE49-F238E27FC236}">
-                <a16:creationId xmlns:a16="http://schemas.microsoft.com/office/drawing/2014/main" id="{C5F6DC5D-F1B6-1B3C-D999-B0BC939C554C}"/>
+                <a16:creationId xmlns:a16="http://schemas.microsoft.com/office/drawing/2014/main" id="{55B4F47C-B686-11C4-CFB8-653CF7043420}"/>
               </a:ext>
             </a:extLst>
           </p:cNvPr>
@@ -3459,11 +3383,11 @@
               <p:nvPr/>
             </p:nvPicPr>
             <p:blipFill>
-              <a:blip r:embed="rId4">
+              <a:blip r:embed="rId2">
                 <a:extLst>
                   <a:ext uri="{BEBA8EAE-BF5A-486C-A8C5-ECC9F3942E4B}">
                     <a14:imgProps xmlns:a14="http://schemas.microsoft.com/office/drawing/2010/main">
-                      <a14:imgLayer r:embed="rId5">
+                      <a14:imgLayer r:embed="rId3">
                         <a14:imgEffect>
                           <a14:backgroundRemoval t="10000" b="90000" l="10000" r="90000">
                             <a14:foregroundMark x1="71250" y1="22917" x2="71250" y2="22917"/>
@@ -3565,11 +3489,11 @@
               <p:nvPr/>
             </p:nvPicPr>
             <p:blipFill>
-              <a:blip r:embed="rId4">
+              <a:blip r:embed="rId2">
                 <a:extLst>
                   <a:ext uri="{BEBA8EAE-BF5A-486C-A8C5-ECC9F3942E4B}">
                     <a14:imgProps xmlns:a14="http://schemas.microsoft.com/office/drawing/2010/main">
-                      <a14:imgLayer r:embed="rId5">
+                      <a14:imgLayer r:embed="rId3">
                         <a14:imgEffect>
                           <a14:backgroundRemoval t="10000" b="90000" l="10000" r="90000">
                             <a14:foregroundMark x1="71250" y1="22917" x2="71250" y2="22917"/>
@@ -3671,11 +3595,11 @@
               <p:nvPr/>
             </p:nvPicPr>
             <p:blipFill>
-              <a:blip r:embed="rId4">
+              <a:blip r:embed="rId2">
                 <a:extLst>
                   <a:ext uri="{BEBA8EAE-BF5A-486C-A8C5-ECC9F3942E4B}">
                     <a14:imgProps xmlns:a14="http://schemas.microsoft.com/office/drawing/2010/main">
-                      <a14:imgLayer r:embed="rId5">
+                      <a14:imgLayer r:embed="rId3">
                         <a14:imgEffect>
                           <a14:backgroundRemoval t="10000" b="90000" l="10000" r="90000">
                             <a14:foregroundMark x1="71250" y1="22917" x2="71250" y2="22917"/>
@@ -3777,11 +3701,11 @@
               <p:nvPr/>
             </p:nvPicPr>
             <p:blipFill>
-              <a:blip r:embed="rId4">
+              <a:blip r:embed="rId2">
                 <a:extLst>
                   <a:ext uri="{BEBA8EAE-BF5A-486C-A8C5-ECC9F3942E4B}">
                     <a14:imgProps xmlns:a14="http://schemas.microsoft.com/office/drawing/2010/main">
-                      <a14:imgLayer r:embed="rId5">
+                      <a14:imgLayer r:embed="rId3">
                         <a14:imgEffect>
                           <a14:backgroundRemoval t="10000" b="90000" l="10000" r="90000">
                             <a14:foregroundMark x1="71250" y1="22917" x2="71250" y2="22917"/>
@@ -3883,11 +3807,11 @@
               <p:nvPr/>
             </p:nvPicPr>
             <p:blipFill>
-              <a:blip r:embed="rId4">
+              <a:blip r:embed="rId2">
                 <a:extLst>
                   <a:ext uri="{BEBA8EAE-BF5A-486C-A8C5-ECC9F3942E4B}">
                     <a14:imgProps xmlns:a14="http://schemas.microsoft.com/office/drawing/2010/main">
-                      <a14:imgLayer r:embed="rId5">
+                      <a14:imgLayer r:embed="rId3">
                         <a14:imgEffect>
                           <a14:backgroundRemoval t="10000" b="90000" l="10000" r="90000">
                             <a14:foregroundMark x1="71250" y1="22917" x2="71250" y2="22917"/>
@@ -3989,11 +3913,11 @@
               <p:nvPr/>
             </p:nvPicPr>
             <p:blipFill>
-              <a:blip r:embed="rId4">
+              <a:blip r:embed="rId2">
                 <a:extLst>
                   <a:ext uri="{BEBA8EAE-BF5A-486C-A8C5-ECC9F3942E4B}">
                     <a14:imgProps xmlns:a14="http://schemas.microsoft.com/office/drawing/2010/main">
-                      <a14:imgLayer r:embed="rId5">
+                      <a14:imgLayer r:embed="rId3">
                         <a14:imgEffect>
                           <a14:backgroundRemoval t="10000" b="90000" l="10000" r="90000">
                             <a14:foregroundMark x1="71250" y1="22917" x2="71250" y2="22917"/>
@@ -4095,11 +4019,11 @@
               <p:nvPr/>
             </p:nvPicPr>
             <p:blipFill>
-              <a:blip r:embed="rId4">
+              <a:blip r:embed="rId2">
                 <a:extLst>
                   <a:ext uri="{BEBA8EAE-BF5A-486C-A8C5-ECC9F3942E4B}">
                     <a14:imgProps xmlns:a14="http://schemas.microsoft.com/office/drawing/2010/main">
-                      <a14:imgLayer r:embed="rId5">
+                      <a14:imgLayer r:embed="rId3">
                         <a14:imgEffect>
                           <a14:backgroundRemoval t="10000" b="90000" l="10000" r="90000">
                             <a14:foregroundMark x1="71250" y1="22917" x2="71250" y2="22917"/>
@@ -4189,10 +4113,10 @@
         </p:grpSp>
         <p:pic>
           <p:nvPicPr>
-            <p:cNvPr id="21" name="图片 20" descr="在沙滩上&#10;&#10;AI 生成的内容可能不正确。">
+            <p:cNvPr id="5" name="图片 4" descr="在沙滩上&#10;&#10;AI 生成的内容可能不正确。">
               <a:extLst>
                 <a:ext uri="{FF2B5EF4-FFF2-40B4-BE49-F238E27FC236}">
-                  <a16:creationId xmlns:a16="http://schemas.microsoft.com/office/drawing/2014/main" id="{9847AB38-9BBD-6314-6CC3-CC6A451E57A3}"/>
+                  <a16:creationId xmlns:a16="http://schemas.microsoft.com/office/drawing/2014/main" id="{E7B988EB-FA3F-DD85-6D70-D631FFDD7205}"/>
                 </a:ext>
               </a:extLst>
             </p:cNvPr>
@@ -4202,48 +4126,38 @@
             <p:nvPr/>
           </p:nvPicPr>
           <p:blipFill>
-            <a:blip r:embed="rId6">
+            <a:blip r:embed="rId4">
               <a:extLst>
                 <a:ext uri="{BEBA8EAE-BF5A-486C-A8C5-ECC9F3942E4B}">
                   <a14:imgProps xmlns:a14="http://schemas.microsoft.com/office/drawing/2010/main">
-                    <a14:imgLayer r:embed="rId7">
+                    <a14:imgLayer r:embed="rId5">
                       <a14:imgEffect>
-                        <a14:backgroundRemoval t="39147" b="51919" l="10000" r="90000">
-                          <a14:foregroundMark x1="23403" y1="41172" x2="23403" y2="41172"/>
-                          <a14:foregroundMark x1="24049" y1="41818" x2="24049" y2="41818"/>
-                          <a14:foregroundMark x1="20962" y1="45455" x2="20962" y2="45455"/>
-                          <a14:foregroundMark x1="20962" y1="45455" x2="20962" y2="45455"/>
-                          <a14:foregroundMark x1="25628" y1="46343" x2="25628" y2="46343"/>
-                          <a14:foregroundMark x1="25844" y1="46424" x2="25844" y2="46424"/>
-                          <a14:foregroundMark x1="38263" y1="44727" x2="38263" y2="44970"/>
-                          <a14:foregroundMark x1="36971" y1="43636" x2="36971" y2="43636"/>
-                          <a14:foregroundMark x1="36971" y1="43636" x2="36971" y2="43636"/>
-                          <a14:foregroundMark x1="43862" y1="44525" x2="43862" y2="44525"/>
-                          <a14:foregroundMark x1="43862" y1="44525" x2="43862" y2="44525"/>
-                          <a14:foregroundMark x1="47452" y1="46990" x2="47452" y2="46990"/>
-                          <a14:foregroundMark x1="47452" y1="46990" x2="47452" y2="46990"/>
-                          <a14:foregroundMark x1="51902" y1="47798" x2="51902" y2="47798"/>
-                          <a14:foregroundMark x1="51902" y1="47798" x2="51902" y2="47798"/>
-                          <a14:foregroundMark x1="51759" y1="44606" x2="51759" y2="44606"/>
-                          <a14:foregroundMark x1="51759" y1="44606" x2="51759" y2="44606"/>
-                          <a14:foregroundMark x1="54056" y1="41899" x2="54056" y2="41899"/>
-                          <a14:foregroundMark x1="54056" y1="41899" x2="54056" y2="41899"/>
-                          <a14:foregroundMark x1="57430" y1="43717" x2="57430" y2="43717"/>
-                          <a14:foregroundMark x1="57430" y1="43717" x2="57430" y2="43717"/>
-                          <a14:foregroundMark x1="58076" y1="42263" x2="58076" y2="42263"/>
-                          <a14:foregroundMark x1="58076" y1="42263" x2="58076" y2="42263"/>
-                          <a14:foregroundMark x1="26633" y1="43434" x2="26633" y2="43434"/>
-                          <a14:foregroundMark x1="26633" y1="43434" x2="26633" y2="43434"/>
-                          <a14:foregroundMark x1="25628" y1="41535" x2="25628" y2="41535"/>
-                          <a14:foregroundMark x1="25628" y1="41535" x2="25628" y2="41535"/>
-                          <a14:foregroundMark x1="21464" y1="44444" x2="21464" y2="44444"/>
-                          <a14:foregroundMark x1="21464" y1="44444" x2="21464" y2="44444"/>
-                          <a14:foregroundMark x1="19885" y1="43798" x2="19885" y2="43798"/>
-                          <a14:foregroundMark x1="19885" y1="43798" x2="19885" y2="43798"/>
-                          <a14:foregroundMark x1="81479" y1="41576" x2="81479" y2="41576"/>
-                          <a14:foregroundMark x1="81479" y1="41576" x2="81479" y2="41576"/>
-                          <a14:foregroundMark x1="81479" y1="41576" x2="81479" y2="41576"/>
-                          <a14:backgroundMark x1="37401" y1="45535" x2="37401" y2="45535"/>
+                        <a14:backgroundRemoval t="40440" b="49524" l="16862" r="82747">
+                          <a14:foregroundMark x1="19596" y1="44945" x2="19596" y2="44945"/>
+                          <a14:foregroundMark x1="16992" y1="44872" x2="16992" y2="44872"/>
+                          <a14:foregroundMark x1="21029" y1="41868" x2="21029" y2="41868"/>
+                          <a14:foregroundMark x1="26172" y1="40476" x2="26172" y2="40476"/>
+                          <a14:foregroundMark x1="27148" y1="45201" x2="27148" y2="45201"/>
+                          <a14:foregroundMark x1="26172" y1="47326" x2="26172" y2="47326"/>
+                          <a14:foregroundMark x1="25065" y1="48278" x2="25065" y2="48278"/>
+                          <a14:foregroundMark x1="31185" y1="48278" x2="31185" y2="48278"/>
+                          <a14:foregroundMark x1="36654" y1="47436" x2="36654" y2="47436"/>
+                          <a14:foregroundMark x1="46224" y1="45128" x2="46224" y2="45128"/>
+                          <a14:foregroundMark x1="48893" y1="47582" x2="48893" y2="47582"/>
+                          <a14:foregroundMark x1="46875" y1="43114" x2="46875" y2="43114"/>
+                          <a14:foregroundMark x1="41536" y1="41245" x2="41536" y2="41245"/>
+                          <a14:foregroundMark x1="54362" y1="41685" x2="54362" y2="41685"/>
+                          <a14:foregroundMark x1="52539" y1="44432" x2="52539" y2="44432"/>
+                          <a14:foregroundMark x1="53125" y1="47326" x2="53125" y2="47582"/>
+                          <a14:foregroundMark x1="56706" y1="43700" x2="56706" y2="43700"/>
+                          <a14:foregroundMark x1="71615" y1="46557" x2="71615" y2="46557"/>
+                          <a14:foregroundMark x1="78516" y1="44066" x2="78516" y2="44066"/>
+                          <a14:foregroundMark x1="79753" y1="47070" x2="79753" y2="47070"/>
+                          <a14:foregroundMark x1="82747" y1="48571" x2="82747" y2="48571"/>
+                          <a14:foregroundMark x1="81771" y1="41429" x2="81771" y2="41429"/>
+                          <a14:foregroundMark x1="58138" y1="41502" x2="58138" y2="41502"/>
+                          <a14:backgroundMark x1="39193" y1="44505" x2="39193" y2="44505"/>
+                          <a14:backgroundMark x1="42448" y1="45201" x2="42448" y2="45201"/>
                         </a14:backgroundRemoval>
                       </a14:imgEffect>
                     </a14:imgLayer>
@@ -4254,15 +4168,15 @@
                 </a:ext>
               </a:extLst>
             </a:blip>
-            <a:srcRect l="11770" t="37551" r="68010" b="46485"/>
+            <a:srcRect l="12922" t="39546" r="66066" b="49297"/>
             <a:stretch>
               <a:fillRect/>
             </a:stretch>
           </p:blipFill>
           <p:spPr>
             <a:xfrm>
-              <a:off x="2228850" y="4763933"/>
-              <a:ext cx="960120" cy="1347214"/>
+              <a:off x="2595768" y="4884155"/>
+              <a:ext cx="1172801" cy="1106769"/>
             </a:xfrm>
             <a:prstGeom prst="rect">
               <a:avLst/>
@@ -4271,10 +4185,10 @@
         </p:pic>
         <p:pic>
           <p:nvPicPr>
-            <p:cNvPr id="22" name="图片 21" descr="在沙滩上&#10;&#10;AI 生成的内容可能不正确。">
+            <p:cNvPr id="6" name="图片 5" descr="在沙滩上&#10;&#10;AI 生成的内容可能不正确。">
               <a:extLst>
                 <a:ext uri="{FF2B5EF4-FFF2-40B4-BE49-F238E27FC236}">
-                  <a16:creationId xmlns:a16="http://schemas.microsoft.com/office/drawing/2014/main" id="{71E257E4-388D-6EDC-3AB2-13AFB2B137D9}"/>
+                  <a16:creationId xmlns:a16="http://schemas.microsoft.com/office/drawing/2014/main" id="{A7212D86-2A5F-3415-A887-D737535FD534}"/>
                 </a:ext>
               </a:extLst>
             </p:cNvPr>
@@ -4284,48 +4198,38 @@
             <p:nvPr/>
           </p:nvPicPr>
           <p:blipFill>
-            <a:blip r:embed="rId6">
+            <a:blip r:embed="rId4">
               <a:extLst>
                 <a:ext uri="{BEBA8EAE-BF5A-486C-A8C5-ECC9F3942E4B}">
                   <a14:imgProps xmlns:a14="http://schemas.microsoft.com/office/drawing/2010/main">
-                    <a14:imgLayer r:embed="rId7">
+                    <a14:imgLayer r:embed="rId5">
                       <a14:imgEffect>
-                        <a14:backgroundRemoval t="39147" b="51919" l="10000" r="90000">
-                          <a14:foregroundMark x1="23403" y1="41172" x2="23403" y2="41172"/>
-                          <a14:foregroundMark x1="24049" y1="41818" x2="24049" y2="41818"/>
-                          <a14:foregroundMark x1="20962" y1="45455" x2="20962" y2="45455"/>
-                          <a14:foregroundMark x1="20962" y1="45455" x2="20962" y2="45455"/>
-                          <a14:foregroundMark x1="25628" y1="46343" x2="25628" y2="46343"/>
-                          <a14:foregroundMark x1="25844" y1="46424" x2="25844" y2="46424"/>
-                          <a14:foregroundMark x1="38263" y1="44727" x2="38263" y2="44970"/>
-                          <a14:foregroundMark x1="36971" y1="43636" x2="36971" y2="43636"/>
-                          <a14:foregroundMark x1="36971" y1="43636" x2="36971" y2="43636"/>
-                          <a14:foregroundMark x1="43862" y1="44525" x2="43862" y2="44525"/>
-                          <a14:foregroundMark x1="43862" y1="44525" x2="43862" y2="44525"/>
-                          <a14:foregroundMark x1="47452" y1="46990" x2="47452" y2="46990"/>
-                          <a14:foregroundMark x1="47452" y1="46990" x2="47452" y2="46990"/>
-                          <a14:foregroundMark x1="51902" y1="47798" x2="51902" y2="47798"/>
-                          <a14:foregroundMark x1="51902" y1="47798" x2="51902" y2="47798"/>
-                          <a14:foregroundMark x1="51759" y1="44606" x2="51759" y2="44606"/>
-                          <a14:foregroundMark x1="51759" y1="44606" x2="51759" y2="44606"/>
-                          <a14:foregroundMark x1="54056" y1="41899" x2="54056" y2="41899"/>
-                          <a14:foregroundMark x1="54056" y1="41899" x2="54056" y2="41899"/>
-                          <a14:foregroundMark x1="57430" y1="43717" x2="57430" y2="43717"/>
-                          <a14:foregroundMark x1="57430" y1="43717" x2="57430" y2="43717"/>
-                          <a14:foregroundMark x1="58076" y1="42263" x2="58076" y2="42263"/>
-                          <a14:foregroundMark x1="58076" y1="42263" x2="58076" y2="42263"/>
-                          <a14:foregroundMark x1="26633" y1="43434" x2="26633" y2="43434"/>
-                          <a14:foregroundMark x1="26633" y1="43434" x2="26633" y2="43434"/>
-                          <a14:foregroundMark x1="25628" y1="41535" x2="25628" y2="41535"/>
-                          <a14:foregroundMark x1="25628" y1="41535" x2="25628" y2="41535"/>
-                          <a14:foregroundMark x1="21464" y1="44444" x2="21464" y2="44444"/>
-                          <a14:foregroundMark x1="21464" y1="44444" x2="21464" y2="44444"/>
-                          <a14:foregroundMark x1="19885" y1="43798" x2="19885" y2="43798"/>
-                          <a14:foregroundMark x1="19885" y1="43798" x2="19885" y2="43798"/>
-                          <a14:foregroundMark x1="81479" y1="41576" x2="81479" y2="41576"/>
-                          <a14:foregroundMark x1="81479" y1="41576" x2="81479" y2="41576"/>
-                          <a14:foregroundMark x1="81479" y1="41576" x2="81479" y2="41576"/>
-                          <a14:backgroundMark x1="37401" y1="45535" x2="37401" y2="45535"/>
+                        <a14:backgroundRemoval t="40440" b="49524" l="16862" r="82747">
+                          <a14:foregroundMark x1="19596" y1="44945" x2="19596" y2="44945"/>
+                          <a14:foregroundMark x1="16992" y1="44872" x2="16992" y2="44872"/>
+                          <a14:foregroundMark x1="21029" y1="41868" x2="21029" y2="41868"/>
+                          <a14:foregroundMark x1="26172" y1="40476" x2="26172" y2="40476"/>
+                          <a14:foregroundMark x1="27148" y1="45201" x2="27148" y2="45201"/>
+                          <a14:foregroundMark x1="26172" y1="47326" x2="26172" y2="47326"/>
+                          <a14:foregroundMark x1="25065" y1="48278" x2="25065" y2="48278"/>
+                          <a14:foregroundMark x1="31185" y1="48278" x2="31185" y2="48278"/>
+                          <a14:foregroundMark x1="36654" y1="47436" x2="36654" y2="47436"/>
+                          <a14:foregroundMark x1="46224" y1="45128" x2="46224" y2="45128"/>
+                          <a14:foregroundMark x1="48893" y1="47582" x2="48893" y2="47582"/>
+                          <a14:foregroundMark x1="46875" y1="43114" x2="46875" y2="43114"/>
+                          <a14:foregroundMark x1="41536" y1="41245" x2="41536" y2="41245"/>
+                          <a14:foregroundMark x1="54362" y1="41685" x2="54362" y2="41685"/>
+                          <a14:foregroundMark x1="52539" y1="44432" x2="52539" y2="44432"/>
+                          <a14:foregroundMark x1="53125" y1="47326" x2="53125" y2="47582"/>
+                          <a14:foregroundMark x1="56706" y1="43700" x2="56706" y2="43700"/>
+                          <a14:foregroundMark x1="71615" y1="46557" x2="71615" y2="46557"/>
+                          <a14:foregroundMark x1="78516" y1="44066" x2="78516" y2="44066"/>
+                          <a14:foregroundMark x1="79753" y1="47070" x2="79753" y2="47070"/>
+                          <a14:foregroundMark x1="82747" y1="48571" x2="82747" y2="48571"/>
+                          <a14:foregroundMark x1="81771" y1="41429" x2="81771" y2="41429"/>
+                          <a14:foregroundMark x1="58138" y1="41502" x2="58138" y2="41502"/>
+                          <a14:backgroundMark x1="39193" y1="44505" x2="39193" y2="44505"/>
+                          <a14:backgroundMark x1="42448" y1="45201" x2="42448" y2="45201"/>
                         </a14:backgroundRemoval>
                       </a14:imgEffect>
                     </a14:imgLayer>
@@ -4336,15 +4240,15 @@
                 </a:ext>
               </a:extLst>
             </a:blip>
-            <a:srcRect l="31223" t="37551" r="50000" b="46485"/>
+            <a:srcRect l="34301" t="39546" r="49274" b="49297"/>
             <a:stretch>
               <a:fillRect/>
             </a:stretch>
           </p:blipFill>
           <p:spPr>
             <a:xfrm>
-              <a:off x="4541317" y="4757492"/>
-              <a:ext cx="891540" cy="1347214"/>
+              <a:off x="4694859" y="4884155"/>
+              <a:ext cx="916769" cy="1106769"/>
             </a:xfrm>
             <a:prstGeom prst="rect">
               <a:avLst/>
@@ -4353,10 +4257,10 @@
         </p:pic>
         <p:pic>
           <p:nvPicPr>
-            <p:cNvPr id="23" name="图片 22" descr="在沙滩上&#10;&#10;AI 生成的内容可能不正确。">
+            <p:cNvPr id="7" name="图片 6" descr="在沙滩上&#10;&#10;AI 生成的内容可能不正确。">
               <a:extLst>
                 <a:ext uri="{FF2B5EF4-FFF2-40B4-BE49-F238E27FC236}">
-                  <a16:creationId xmlns:a16="http://schemas.microsoft.com/office/drawing/2014/main" id="{FE6E02EA-453B-52C4-9A88-875890F2A55C}"/>
+                  <a16:creationId xmlns:a16="http://schemas.microsoft.com/office/drawing/2014/main" id="{FA649F1F-7B31-3CF2-71BE-240DCD91EB8F}"/>
                 </a:ext>
               </a:extLst>
             </p:cNvPr>
@@ -4366,48 +4270,38 @@
             <p:nvPr/>
           </p:nvPicPr>
           <p:blipFill>
-            <a:blip r:embed="rId2">
+            <a:blip r:embed="rId4">
               <a:extLst>
                 <a:ext uri="{BEBA8EAE-BF5A-486C-A8C5-ECC9F3942E4B}">
                   <a14:imgProps xmlns:a14="http://schemas.microsoft.com/office/drawing/2010/main">
-                    <a14:imgLayer r:embed="rId3">
+                    <a14:imgLayer r:embed="rId5">
                       <a14:imgEffect>
-                        <a14:backgroundRemoval t="39147" b="51919" l="10000" r="90000">
-                          <a14:foregroundMark x1="23403" y1="41172" x2="23403" y2="41172"/>
-                          <a14:foregroundMark x1="24049" y1="41818" x2="24049" y2="41818"/>
-                          <a14:foregroundMark x1="20962" y1="45455" x2="20962" y2="45455"/>
-                          <a14:foregroundMark x1="20962" y1="45455" x2="20962" y2="45455"/>
-                          <a14:foregroundMark x1="25628" y1="46343" x2="25628" y2="46343"/>
-                          <a14:foregroundMark x1="25844" y1="46424" x2="25844" y2="46424"/>
-                          <a14:foregroundMark x1="38263" y1="44727" x2="38263" y2="44970"/>
-                          <a14:foregroundMark x1="36971" y1="43636" x2="36971" y2="43636"/>
-                          <a14:foregroundMark x1="36971" y1="43636" x2="36971" y2="43636"/>
-                          <a14:foregroundMark x1="43862" y1="44525" x2="43862" y2="44525"/>
-                          <a14:foregroundMark x1="43862" y1="44525" x2="43862" y2="44525"/>
-                          <a14:foregroundMark x1="47452" y1="46990" x2="47452" y2="46990"/>
-                          <a14:foregroundMark x1="47452" y1="46990" x2="47452" y2="46990"/>
-                          <a14:foregroundMark x1="51902" y1="47798" x2="51902" y2="47798"/>
-                          <a14:foregroundMark x1="51902" y1="47798" x2="51902" y2="47798"/>
-                          <a14:foregroundMark x1="51759" y1="44606" x2="51759" y2="44606"/>
-                          <a14:foregroundMark x1="51759" y1="44606" x2="51759" y2="44606"/>
-                          <a14:foregroundMark x1="54056" y1="41899" x2="54056" y2="41899"/>
-                          <a14:foregroundMark x1="54056" y1="41899" x2="54056" y2="41899"/>
-                          <a14:foregroundMark x1="57430" y1="43717" x2="57430" y2="43717"/>
-                          <a14:foregroundMark x1="57430" y1="43717" x2="57430" y2="43717"/>
-                          <a14:foregroundMark x1="58076" y1="42263" x2="58076" y2="42263"/>
-                          <a14:foregroundMark x1="58076" y1="42263" x2="58076" y2="42263"/>
-                          <a14:foregroundMark x1="26633" y1="43434" x2="26633" y2="43434"/>
-                          <a14:foregroundMark x1="26633" y1="43434" x2="26633" y2="43434"/>
-                          <a14:foregroundMark x1="25628" y1="41535" x2="25628" y2="41535"/>
-                          <a14:foregroundMark x1="25628" y1="41535" x2="25628" y2="41535"/>
-                          <a14:foregroundMark x1="21464" y1="44444" x2="21464" y2="44444"/>
-                          <a14:foregroundMark x1="21464" y1="44444" x2="21464" y2="44444"/>
-                          <a14:foregroundMark x1="19885" y1="43798" x2="19885" y2="43798"/>
-                          <a14:foregroundMark x1="19885" y1="43798" x2="19885" y2="43798"/>
-                          <a14:foregroundMark x1="81479" y1="41576" x2="81479" y2="41576"/>
-                          <a14:foregroundMark x1="81479" y1="41576" x2="81479" y2="41576"/>
-                          <a14:foregroundMark x1="81479" y1="41576" x2="81479" y2="41576"/>
-                          <a14:backgroundMark x1="37401" y1="45535" x2="37401" y2="45535"/>
+                        <a14:backgroundRemoval t="40440" b="49524" l="16862" r="82747">
+                          <a14:foregroundMark x1="19596" y1="44945" x2="19596" y2="44945"/>
+                          <a14:foregroundMark x1="16992" y1="44872" x2="16992" y2="44872"/>
+                          <a14:foregroundMark x1="21029" y1="41868" x2="21029" y2="41868"/>
+                          <a14:foregroundMark x1="26172" y1="40476" x2="26172" y2="40476"/>
+                          <a14:foregroundMark x1="27148" y1="45201" x2="27148" y2="45201"/>
+                          <a14:foregroundMark x1="26172" y1="47326" x2="26172" y2="47326"/>
+                          <a14:foregroundMark x1="25065" y1="48278" x2="25065" y2="48278"/>
+                          <a14:foregroundMark x1="31185" y1="48278" x2="31185" y2="48278"/>
+                          <a14:foregroundMark x1="36654" y1="47436" x2="36654" y2="47436"/>
+                          <a14:foregroundMark x1="46224" y1="45128" x2="46224" y2="45128"/>
+                          <a14:foregroundMark x1="48893" y1="47582" x2="48893" y2="47582"/>
+                          <a14:foregroundMark x1="46875" y1="43114" x2="46875" y2="43114"/>
+                          <a14:foregroundMark x1="41536" y1="41245" x2="41536" y2="41245"/>
+                          <a14:foregroundMark x1="54362" y1="41685" x2="54362" y2="41685"/>
+                          <a14:foregroundMark x1="52539" y1="44432" x2="52539" y2="44432"/>
+                          <a14:foregroundMark x1="53125" y1="47326" x2="53125" y2="47582"/>
+                          <a14:foregroundMark x1="56706" y1="43700" x2="56706" y2="43700"/>
+                          <a14:foregroundMark x1="71615" y1="46557" x2="71615" y2="46557"/>
+                          <a14:foregroundMark x1="78516" y1="44066" x2="78516" y2="44066"/>
+                          <a14:foregroundMark x1="79753" y1="47070" x2="79753" y2="47070"/>
+                          <a14:foregroundMark x1="82747" y1="48571" x2="82747" y2="48571"/>
+                          <a14:foregroundMark x1="81771" y1="41429" x2="81771" y2="41429"/>
+                          <a14:foregroundMark x1="58138" y1="41502" x2="58138" y2="41502"/>
+                          <a14:backgroundMark x1="39193" y1="44505" x2="39193" y2="44505"/>
+                          <a14:backgroundMark x1="42448" y1="45201" x2="42448" y2="45201"/>
                         </a14:backgroundRemoval>
                       </a14:imgEffect>
                     </a14:imgLayer>
@@ -4418,15 +4312,15 @@
                 </a:ext>
               </a:extLst>
             </a:blip>
-            <a:srcRect l="50000" t="37551" r="31510" b="46485"/>
+            <a:srcRect l="50726" t="39546" r="32849" b="49297"/>
             <a:stretch>
               <a:fillRect/>
             </a:stretch>
           </p:blipFill>
           <p:spPr>
             <a:xfrm>
-              <a:off x="6682945" y="4763933"/>
-              <a:ext cx="877942" cy="1347214"/>
+              <a:off x="6550358" y="4877714"/>
+              <a:ext cx="916769" cy="1106769"/>
             </a:xfrm>
             <a:prstGeom prst="rect">
               <a:avLst/>
@@ -4435,10 +4329,10 @@
         </p:pic>
         <p:pic>
           <p:nvPicPr>
-            <p:cNvPr id="24" name="图片 23" descr="在沙滩上&#10;&#10;AI 生成的内容可能不正确。">
+            <p:cNvPr id="8" name="图片 7" descr="在沙滩上&#10;&#10;AI 生成的内容可能不正确。">
               <a:extLst>
                 <a:ext uri="{FF2B5EF4-FFF2-40B4-BE49-F238E27FC236}">
-                  <a16:creationId xmlns:a16="http://schemas.microsoft.com/office/drawing/2014/main" id="{8597B9A1-6B2C-0EEC-D080-F7F93EFA478A}"/>
+                  <a16:creationId xmlns:a16="http://schemas.microsoft.com/office/drawing/2014/main" id="{E12B74AF-F590-E056-A183-42F6D2FE40C6}"/>
                 </a:ext>
               </a:extLst>
             </p:cNvPr>
@@ -4448,48 +4342,38 @@
             <p:nvPr/>
           </p:nvPicPr>
           <p:blipFill>
-            <a:blip r:embed="rId2">
+            <a:blip r:embed="rId4">
               <a:extLst>
                 <a:ext uri="{BEBA8EAE-BF5A-486C-A8C5-ECC9F3942E4B}">
                   <a14:imgProps xmlns:a14="http://schemas.microsoft.com/office/drawing/2010/main">
-                    <a14:imgLayer r:embed="rId3">
+                    <a14:imgLayer r:embed="rId5">
                       <a14:imgEffect>
-                        <a14:backgroundRemoval t="39147" b="51919" l="10000" r="90000">
-                          <a14:foregroundMark x1="23403" y1="41172" x2="23403" y2="41172"/>
-                          <a14:foregroundMark x1="24049" y1="41818" x2="24049" y2="41818"/>
-                          <a14:foregroundMark x1="20962" y1="45455" x2="20962" y2="45455"/>
-                          <a14:foregroundMark x1="20962" y1="45455" x2="20962" y2="45455"/>
-                          <a14:foregroundMark x1="25628" y1="46343" x2="25628" y2="46343"/>
-                          <a14:foregroundMark x1="25844" y1="46424" x2="25844" y2="46424"/>
-                          <a14:foregroundMark x1="38263" y1="44727" x2="38263" y2="44970"/>
-                          <a14:foregroundMark x1="36971" y1="43636" x2="36971" y2="43636"/>
-                          <a14:foregroundMark x1="36971" y1="43636" x2="36971" y2="43636"/>
-                          <a14:foregroundMark x1="43862" y1="44525" x2="43862" y2="44525"/>
-                          <a14:foregroundMark x1="43862" y1="44525" x2="43862" y2="44525"/>
-                          <a14:foregroundMark x1="47452" y1="46990" x2="47452" y2="46990"/>
-                          <a14:foregroundMark x1="47452" y1="46990" x2="47452" y2="46990"/>
-                          <a14:foregroundMark x1="51902" y1="47798" x2="51902" y2="47798"/>
-                          <a14:foregroundMark x1="51902" y1="47798" x2="51902" y2="47798"/>
-                          <a14:foregroundMark x1="51759" y1="44606" x2="51759" y2="44606"/>
-                          <a14:foregroundMark x1="51759" y1="44606" x2="51759" y2="44606"/>
-                          <a14:foregroundMark x1="54056" y1="41899" x2="54056" y2="41899"/>
-                          <a14:foregroundMark x1="54056" y1="41899" x2="54056" y2="41899"/>
-                          <a14:foregroundMark x1="57430" y1="43717" x2="57430" y2="43717"/>
-                          <a14:foregroundMark x1="57430" y1="43717" x2="57430" y2="43717"/>
-                          <a14:foregroundMark x1="58076" y1="42263" x2="58076" y2="42263"/>
-                          <a14:foregroundMark x1="58076" y1="42263" x2="58076" y2="42263"/>
-                          <a14:foregroundMark x1="26633" y1="43434" x2="26633" y2="43434"/>
-                          <a14:foregroundMark x1="26633" y1="43434" x2="26633" y2="43434"/>
-                          <a14:foregroundMark x1="25628" y1="41535" x2="25628" y2="41535"/>
-                          <a14:foregroundMark x1="25628" y1="41535" x2="25628" y2="41535"/>
-                          <a14:foregroundMark x1="21464" y1="44444" x2="21464" y2="44444"/>
-                          <a14:foregroundMark x1="21464" y1="44444" x2="21464" y2="44444"/>
-                          <a14:foregroundMark x1="19885" y1="43798" x2="19885" y2="43798"/>
-                          <a14:foregroundMark x1="19885" y1="43798" x2="19885" y2="43798"/>
-                          <a14:foregroundMark x1="81479" y1="41576" x2="81479" y2="41576"/>
-                          <a14:foregroundMark x1="81479" y1="41576" x2="81479" y2="41576"/>
-                          <a14:foregroundMark x1="81479" y1="41576" x2="81479" y2="41576"/>
-                          <a14:backgroundMark x1="37401" y1="45535" x2="37401" y2="45535"/>
+                        <a14:backgroundRemoval t="40440" b="49524" l="16862" r="82747">
+                          <a14:foregroundMark x1="19596" y1="44945" x2="19596" y2="44945"/>
+                          <a14:foregroundMark x1="16992" y1="44872" x2="16992" y2="44872"/>
+                          <a14:foregroundMark x1="21029" y1="41868" x2="21029" y2="41868"/>
+                          <a14:foregroundMark x1="26172" y1="40476" x2="26172" y2="40476"/>
+                          <a14:foregroundMark x1="27148" y1="45201" x2="27148" y2="45201"/>
+                          <a14:foregroundMark x1="26172" y1="47326" x2="26172" y2="47326"/>
+                          <a14:foregroundMark x1="25065" y1="48278" x2="25065" y2="48278"/>
+                          <a14:foregroundMark x1="31185" y1="48278" x2="31185" y2="48278"/>
+                          <a14:foregroundMark x1="36654" y1="47436" x2="36654" y2="47436"/>
+                          <a14:foregroundMark x1="46224" y1="45128" x2="46224" y2="45128"/>
+                          <a14:foregroundMark x1="48893" y1="47582" x2="48893" y2="47582"/>
+                          <a14:foregroundMark x1="46875" y1="43114" x2="46875" y2="43114"/>
+                          <a14:foregroundMark x1="41536" y1="41245" x2="41536" y2="41245"/>
+                          <a14:foregroundMark x1="54362" y1="41685" x2="54362" y2="41685"/>
+                          <a14:foregroundMark x1="52539" y1="44432" x2="52539" y2="44432"/>
+                          <a14:foregroundMark x1="53125" y1="47326" x2="53125" y2="47582"/>
+                          <a14:foregroundMark x1="56706" y1="43700" x2="56706" y2="43700"/>
+                          <a14:foregroundMark x1="71615" y1="46557" x2="71615" y2="46557"/>
+                          <a14:foregroundMark x1="78516" y1="44066" x2="78516" y2="44066"/>
+                          <a14:foregroundMark x1="79753" y1="47070" x2="79753" y2="47070"/>
+                          <a14:foregroundMark x1="82747" y1="48571" x2="82747" y2="48571"/>
+                          <a14:foregroundMark x1="81771" y1="41429" x2="81771" y2="41429"/>
+                          <a14:foregroundMark x1="58138" y1="41502" x2="58138" y2="41502"/>
+                          <a14:backgroundMark x1="39193" y1="44505" x2="39193" y2="44505"/>
+                          <a14:backgroundMark x1="42448" y1="45201" x2="42448" y2="45201"/>
                         </a14:backgroundRemoval>
                       </a14:imgEffect>
                     </a14:imgLayer>
@@ -4500,15 +4384,15 @@
                 </a:ext>
               </a:extLst>
             </a:blip>
-            <a:srcRect l="68044" t="37551" r="13340" b="46485"/>
+            <a:srcRect l="67518" t="39546" r="11470" b="49297"/>
             <a:stretch>
               <a:fillRect/>
             </a:stretch>
           </p:blipFill>
           <p:spPr>
             <a:xfrm>
-              <a:off x="8727155" y="4763933"/>
-              <a:ext cx="883920" cy="1347214"/>
+              <a:off x="8412077" y="4884838"/>
+              <a:ext cx="1172801" cy="1106769"/>
             </a:xfrm>
             <a:prstGeom prst="rect">
               <a:avLst/>
@@ -4652,10 +4536,2484 @@
           </a:prstGeom>
         </p:spPr>
       </p:pic>
+      <p:pic>
+        <p:nvPicPr>
+          <p:cNvPr id="7" name="图片 6" descr="在沙滩上&#10;&#10;AI 生成的内容可能不正确。">
+            <a:extLst>
+              <a:ext uri="{FF2B5EF4-FFF2-40B4-BE49-F238E27FC236}">
+                <a16:creationId xmlns:a16="http://schemas.microsoft.com/office/drawing/2014/main" id="{131A7130-CF90-089F-C7A4-C0FBC817A71E}"/>
+              </a:ext>
+            </a:extLst>
+          </p:cNvPr>
+          <p:cNvPicPr>
+            <a:picLocks noChangeAspect="1"/>
+          </p:cNvPicPr>
+          <p:nvPr/>
+        </p:nvPicPr>
+        <p:blipFill>
+          <a:blip r:embed="rId4">
+            <a:extLst>
+              <a:ext uri="{BEBA8EAE-BF5A-486C-A8C5-ECC9F3942E4B}">
+                <a14:imgProps xmlns:a14="http://schemas.microsoft.com/office/drawing/2010/main">
+                  <a14:imgLayer r:embed="rId5">
+                    <a14:imgEffect>
+                      <a14:backgroundRemoval t="39147" b="51919" l="10000" r="90000">
+                        <a14:foregroundMark x1="23403" y1="41172" x2="23403" y2="41172"/>
+                        <a14:foregroundMark x1="24049" y1="41818" x2="24049" y2="41818"/>
+                        <a14:foregroundMark x1="20962" y1="45455" x2="20962" y2="45455"/>
+                        <a14:foregroundMark x1="20962" y1="45455" x2="20962" y2="45455"/>
+                        <a14:foregroundMark x1="25628" y1="46343" x2="25628" y2="46343"/>
+                        <a14:foregroundMark x1="25844" y1="46424" x2="25844" y2="46424"/>
+                        <a14:foregroundMark x1="38263" y1="44727" x2="38263" y2="44970"/>
+                        <a14:foregroundMark x1="36971" y1="43636" x2="36971" y2="43636"/>
+                        <a14:foregroundMark x1="36971" y1="43636" x2="36971" y2="43636"/>
+                        <a14:foregroundMark x1="43862" y1="44525" x2="43862" y2="44525"/>
+                        <a14:foregroundMark x1="43862" y1="44525" x2="43862" y2="44525"/>
+                        <a14:foregroundMark x1="47452" y1="46990" x2="47452" y2="46990"/>
+                        <a14:foregroundMark x1="47452" y1="46990" x2="47452" y2="46990"/>
+                        <a14:foregroundMark x1="51902" y1="47798" x2="51902" y2="47798"/>
+                        <a14:foregroundMark x1="51902" y1="47798" x2="51902" y2="47798"/>
+                        <a14:foregroundMark x1="51759" y1="44606" x2="51759" y2="44606"/>
+                        <a14:foregroundMark x1="51759" y1="44606" x2="51759" y2="44606"/>
+                        <a14:foregroundMark x1="54056" y1="41899" x2="54056" y2="41899"/>
+                        <a14:foregroundMark x1="54056" y1="41899" x2="54056" y2="41899"/>
+                        <a14:foregroundMark x1="57430" y1="43717" x2="57430" y2="43717"/>
+                        <a14:foregroundMark x1="57430" y1="43717" x2="57430" y2="43717"/>
+                        <a14:foregroundMark x1="58076" y1="42263" x2="58076" y2="42263"/>
+                        <a14:foregroundMark x1="58076" y1="42263" x2="58076" y2="42263"/>
+                        <a14:foregroundMark x1="26633" y1="43434" x2="26633" y2="43434"/>
+                        <a14:foregroundMark x1="26633" y1="43434" x2="26633" y2="43434"/>
+                        <a14:foregroundMark x1="25628" y1="41535" x2="25628" y2="41535"/>
+                        <a14:foregroundMark x1="25628" y1="41535" x2="25628" y2="41535"/>
+                        <a14:foregroundMark x1="21464" y1="44444" x2="21464" y2="44444"/>
+                        <a14:foregroundMark x1="21464" y1="44444" x2="21464" y2="44444"/>
+                        <a14:foregroundMark x1="19885" y1="43798" x2="19885" y2="43798"/>
+                        <a14:foregroundMark x1="19885" y1="43798" x2="19885" y2="43798"/>
+                        <a14:foregroundMark x1="81479" y1="41576" x2="81479" y2="41576"/>
+                        <a14:foregroundMark x1="81479" y1="41576" x2="81479" y2="41576"/>
+                        <a14:foregroundMark x1="81479" y1="41576" x2="81479" y2="41576"/>
+                        <a14:backgroundMark x1="37401" y1="45535" x2="37401" y2="45535"/>
+                      </a14:backgroundRemoval>
+                    </a14:imgEffect>
+                  </a14:imgLayer>
+                </a14:imgProps>
+              </a:ext>
+              <a:ext uri="{28A0092B-C50C-407E-A947-70E740481C1C}">
+                <a14:useLocalDpi xmlns:a14="http://schemas.microsoft.com/office/drawing/2010/main" val="0"/>
+              </a:ext>
+            </a:extLst>
+          </a:blip>
+          <a:srcRect t="37551" b="46485"/>
+          <a:stretch>
+            <a:fillRect/>
+          </a:stretch>
+        </p:blipFill>
+        <p:spPr>
+          <a:xfrm>
+            <a:off x="2542793" y="1352972"/>
+            <a:ext cx="4748217" cy="1347214"/>
+          </a:xfrm>
+          <a:prstGeom prst="rect">
+            <a:avLst/>
+          </a:prstGeom>
+        </p:spPr>
+      </p:pic>
+      <p:pic>
+        <p:nvPicPr>
+          <p:cNvPr id="3" name="图片 2" descr="巧克力蛋糕&#10;&#10;AI 生成的内容可能不正确。">
+            <a:extLst>
+              <a:ext uri="{FF2B5EF4-FFF2-40B4-BE49-F238E27FC236}">
+                <a16:creationId xmlns:a16="http://schemas.microsoft.com/office/drawing/2014/main" id="{3050A3B3-A165-DC69-0FE9-AC4745412940}"/>
+              </a:ext>
+            </a:extLst>
+          </p:cNvPr>
+          <p:cNvPicPr>
+            <a:picLocks noChangeAspect="1"/>
+          </p:cNvPicPr>
+          <p:nvPr/>
+        </p:nvPicPr>
+        <p:blipFill>
+          <a:blip r:embed="rId6">
+            <a:extLst>
+              <a:ext uri="{BEBA8EAE-BF5A-486C-A8C5-ECC9F3942E4B}">
+                <a14:imgProps xmlns:a14="http://schemas.microsoft.com/office/drawing/2010/main">
+                  <a14:imgLayer r:embed="rId7">
+                    <a14:imgEffect>
+                      <a14:backgroundRemoval t="40440" b="49927" l="18099" r="82227">
+                        <a14:foregroundMark x1="21940" y1="42821" x2="21940" y2="42821"/>
+                        <a14:foregroundMark x1="39714" y1="44176" x2="39714" y2="44176"/>
+                        <a14:foregroundMark x1="56641" y1="43443" x2="56641" y2="43443"/>
+                        <a14:foregroundMark x1="57227" y1="43553" x2="57227" y2="43553"/>
+                        <a14:foregroundMark x1="59375" y1="45165" x2="59375" y2="45165"/>
+                        <a14:foregroundMark x1="62435" y1="42454" x2="62435" y2="42454"/>
+                        <a14:foregroundMark x1="63672" y1="44542" x2="63672" y2="44542"/>
+                        <a14:foregroundMark x1="63411" y1="48242" x2="63411" y2="48242"/>
+                        <a14:foregroundMark x1="72591" y1="45275" x2="72591" y2="45275"/>
+                        <a14:foregroundMark x1="77734" y1="43883" x2="77734" y2="43883"/>
+                        <a14:foregroundMark x1="81445" y1="41465" x2="81445" y2="41465"/>
+                        <a14:foregroundMark x1="82227" y1="48425" x2="82227" y2="48425"/>
+                        <a14:foregroundMark x1="20182" y1="46886" x2="20182" y2="46886"/>
+                        <a14:foregroundMark x1="54362" y1="41648" x2="54362" y2="41648"/>
+                        <a14:foregroundMark x1="58529" y1="41538" x2="58529" y2="41538"/>
+                        <a14:foregroundMark x1="62435" y1="41648" x2="62435" y2="41648"/>
+                        <a14:foregroundMark x1="52409" y1="44725" x2="52409" y2="44725"/>
+                        <a14:foregroundMark x1="53060" y1="47363" x2="53060" y2="47363"/>
+                        <a14:foregroundMark x1="18099" y1="43077" x2="18099" y2="43077"/>
+                        <a14:foregroundMark x1="18424" y1="44542" x2="18424" y2="44542"/>
+                        <a14:foregroundMark x1="18424" y1="47363" x2="18424" y2="47363"/>
+                      </a14:backgroundRemoval>
+                    </a14:imgEffect>
+                  </a14:imgLayer>
+                </a14:imgProps>
+              </a:ext>
+              <a:ext uri="{28A0092B-C50C-407E-A947-70E740481C1C}">
+                <a14:useLocalDpi xmlns:a14="http://schemas.microsoft.com/office/drawing/2010/main" val="0"/>
+              </a:ext>
+            </a:extLst>
+          </a:blip>
+          <a:srcRect l="13244" t="39275" r="12116" b="48843"/>
+          <a:stretch>
+            <a:fillRect/>
+          </a:stretch>
+        </p:blipFill>
+        <p:spPr>
+          <a:xfrm>
+            <a:off x="5937805" y="2334352"/>
+            <a:ext cx="2880050" cy="814874"/>
+          </a:xfrm>
+          <a:prstGeom prst="rect">
+            <a:avLst/>
+          </a:prstGeom>
+        </p:spPr>
+      </p:pic>
+      <p:pic>
+        <p:nvPicPr>
+          <p:cNvPr id="17" name="图片 16" descr="文本, 信件&#10;&#10;AI 生成的内容可能不正确。">
+            <a:extLst>
+              <a:ext uri="{FF2B5EF4-FFF2-40B4-BE49-F238E27FC236}">
+                <a16:creationId xmlns:a16="http://schemas.microsoft.com/office/drawing/2014/main" id="{218E6F0A-4AAE-5160-5748-2F9ED6D6DD8F}"/>
+              </a:ext>
+            </a:extLst>
+          </p:cNvPr>
+          <p:cNvPicPr>
+            <a:picLocks noChangeAspect="1"/>
+          </p:cNvPicPr>
+          <p:nvPr/>
+        </p:nvPicPr>
+        <p:blipFill>
+          <a:blip r:embed="rId8">
+            <a:extLst>
+              <a:ext uri="{BEBA8EAE-BF5A-486C-A8C5-ECC9F3942E4B}">
+                <a14:imgProps xmlns:a14="http://schemas.microsoft.com/office/drawing/2010/main">
+                  <a14:imgLayer r:embed="rId9">
+                    <a14:imgEffect>
+                      <a14:backgroundRemoval t="40549" b="50440" l="19401" r="83464">
+                        <a14:foregroundMark x1="19466" y1="46923" x2="19466" y2="46923"/>
+                        <a14:foregroundMark x1="24870" y1="42454" x2="24870" y2="42454"/>
+                        <a14:foregroundMark x1="32552" y1="47326" x2="32552" y2="47326"/>
+                        <a14:foregroundMark x1="33268" y1="47253" x2="33268" y2="47253"/>
+                        <a14:foregroundMark x1="38542" y1="43553" x2="38542" y2="43553"/>
+                        <a14:foregroundMark x1="41797" y1="46044" x2="41797" y2="46044"/>
+                        <a14:foregroundMark x1="45964" y1="42821" x2="45964" y2="42821"/>
+                        <a14:foregroundMark x1="49479" y1="46264" x2="49479" y2="46264"/>
+                        <a14:foregroundMark x1="55339" y1="46264" x2="55339" y2="46264"/>
+                        <a14:foregroundMark x1="53451" y1="47326" x2="53451" y2="47326"/>
+                        <a14:foregroundMark x1="55599" y1="43297" x2="55599" y2="43297"/>
+                        <a14:foregroundMark x1="60286" y1="44176" x2="60286" y2="44176"/>
+                        <a14:foregroundMark x1="61133" y1="45971" x2="61133" y2="45971"/>
+                        <a14:foregroundMark x1="64128" y1="45971" x2="64128" y2="45971"/>
+                        <a14:foregroundMark x1="64128" y1="49560" x2="64128" y2="49560"/>
+                        <a14:foregroundMark x1="72070" y1="44212" x2="72070" y2="44212"/>
+                        <a14:foregroundMark x1="79362" y1="43773" x2="79362" y2="43773"/>
+                        <a14:foregroundMark x1="83464" y1="48608" x2="83464" y2="48608"/>
+                        <a14:foregroundMark x1="82487" y1="41648" x2="82487" y2="41648"/>
+                      </a14:backgroundRemoval>
+                    </a14:imgEffect>
+                  </a14:imgLayer>
+                </a14:imgProps>
+              </a:ext>
+              <a:ext uri="{28A0092B-C50C-407E-A947-70E740481C1C}">
+                <a14:useLocalDpi xmlns:a14="http://schemas.microsoft.com/office/drawing/2010/main" val="0"/>
+              </a:ext>
+            </a:extLst>
+          </a:blip>
+          <a:srcRect l="13600" t="39365" r="12116" b="48299"/>
+          <a:stretch>
+            <a:fillRect/>
+          </a:stretch>
+        </p:blipFill>
+        <p:spPr>
+          <a:xfrm>
+            <a:off x="2088969" y="2994642"/>
+            <a:ext cx="3848836" cy="1135964"/>
+          </a:xfrm>
+          <a:prstGeom prst="rect">
+            <a:avLst/>
+          </a:prstGeom>
+        </p:spPr>
+      </p:pic>
+      <p:pic>
+        <p:nvPicPr>
+          <p:cNvPr id="2" name="图片 1" descr="在沙滩上&#10;&#10;AI 生成的内容可能不正确。">
+            <a:extLst>
+              <a:ext uri="{FF2B5EF4-FFF2-40B4-BE49-F238E27FC236}">
+                <a16:creationId xmlns:a16="http://schemas.microsoft.com/office/drawing/2014/main" id="{E57590E4-DB04-1A70-2923-D151D83DDBB1}"/>
+              </a:ext>
+            </a:extLst>
+          </p:cNvPr>
+          <p:cNvPicPr>
+            <a:picLocks noChangeAspect="1"/>
+          </p:cNvPicPr>
+          <p:nvPr/>
+        </p:nvPicPr>
+        <p:blipFill>
+          <a:blip r:embed="rId10">
+            <a:extLst>
+              <a:ext uri="{BEBA8EAE-BF5A-486C-A8C5-ECC9F3942E4B}">
+                <a14:imgProps xmlns:a14="http://schemas.microsoft.com/office/drawing/2010/main">
+                  <a14:imgLayer r:embed="rId11">
+                    <a14:imgEffect>
+                      <a14:backgroundRemoval t="40440" b="49524" l="16862" r="82747">
+                        <a14:foregroundMark x1="19596" y1="44945" x2="19596" y2="44945"/>
+                        <a14:foregroundMark x1="16992" y1="44872" x2="16992" y2="44872"/>
+                        <a14:foregroundMark x1="21029" y1="41868" x2="21029" y2="41868"/>
+                        <a14:foregroundMark x1="26172" y1="40476" x2="26172" y2="40476"/>
+                        <a14:foregroundMark x1="27148" y1="45201" x2="27148" y2="45201"/>
+                        <a14:foregroundMark x1="26172" y1="47326" x2="26172" y2="47326"/>
+                        <a14:foregroundMark x1="25065" y1="48278" x2="25065" y2="48278"/>
+                        <a14:foregroundMark x1="31185" y1="48278" x2="31185" y2="48278"/>
+                        <a14:foregroundMark x1="36654" y1="47436" x2="36654" y2="47436"/>
+                        <a14:foregroundMark x1="46224" y1="45128" x2="46224" y2="45128"/>
+                        <a14:foregroundMark x1="48893" y1="47582" x2="48893" y2="47582"/>
+                        <a14:foregroundMark x1="46875" y1="43114" x2="46875" y2="43114"/>
+                        <a14:foregroundMark x1="41536" y1="41245" x2="41536" y2="41245"/>
+                        <a14:foregroundMark x1="54362" y1="41685" x2="54362" y2="41685"/>
+                        <a14:foregroundMark x1="52539" y1="44432" x2="52539" y2="44432"/>
+                        <a14:foregroundMark x1="53125" y1="47326" x2="53125" y2="47582"/>
+                        <a14:foregroundMark x1="56706" y1="43700" x2="56706" y2="43700"/>
+                        <a14:foregroundMark x1="71615" y1="46557" x2="71615" y2="46557"/>
+                        <a14:foregroundMark x1="78516" y1="44066" x2="78516" y2="44066"/>
+                        <a14:foregroundMark x1="79753" y1="47070" x2="79753" y2="47070"/>
+                        <a14:foregroundMark x1="82747" y1="48571" x2="82747" y2="48571"/>
+                        <a14:foregroundMark x1="81771" y1="41429" x2="81771" y2="41429"/>
+                        <a14:foregroundMark x1="58138" y1="41502" x2="58138" y2="41502"/>
+                        <a14:backgroundMark x1="39193" y1="44505" x2="39193" y2="44505"/>
+                        <a14:backgroundMark x1="42448" y1="45201" x2="42448" y2="45201"/>
+                      </a14:backgroundRemoval>
+                    </a14:imgEffect>
+                  </a14:imgLayer>
+                </a14:imgProps>
+              </a:ext>
+              <a:ext uri="{28A0092B-C50C-407E-A947-70E740481C1C}">
+                <a14:useLocalDpi xmlns:a14="http://schemas.microsoft.com/office/drawing/2010/main" val="0"/>
+              </a:ext>
+            </a:extLst>
+          </a:blip>
+          <a:srcRect l="12922" t="39546" r="11470" b="49297"/>
+          <a:stretch>
+            <a:fillRect/>
+          </a:stretch>
+        </p:blipFill>
+        <p:spPr>
+          <a:xfrm>
+            <a:off x="6029053" y="3681566"/>
+            <a:ext cx="4220122" cy="1106769"/>
+          </a:xfrm>
+          <a:prstGeom prst="rect">
+            <a:avLst/>
+          </a:prstGeom>
+        </p:spPr>
+      </p:pic>
     </p:spTree>
     <p:extLst>
       <p:ext uri="{BB962C8B-B14F-4D97-AF65-F5344CB8AC3E}">
         <p14:creationId xmlns:p14="http://schemas.microsoft.com/office/powerpoint/2010/main" val="3517915175"/>
+      </p:ext>
+    </p:extLst>
+  </p:cSld>
+  <p:clrMapOvr>
+    <a:masterClrMapping/>
+  </p:clrMapOvr>
+</p:sld>
+</file>
+
+<file path=ppt/slides/slide3.xml><?xml version="1.0" encoding="utf-8"?>
+<p:sld xmlns:a="http://schemas.openxmlformats.org/drawingml/2006/main" xmlns:r="http://schemas.openxmlformats.org/officeDocument/2006/relationships" xmlns:p="http://schemas.openxmlformats.org/presentationml/2006/main">
+  <p:cSld>
+    <p:spTree>
+      <p:nvGrpSpPr>
+        <p:cNvPr id="1" name=""/>
+        <p:cNvGrpSpPr/>
+        <p:nvPr/>
+      </p:nvGrpSpPr>
+      <p:grpSpPr>
+        <a:xfrm>
+          <a:off x="0" y="0"/>
+          <a:ext cx="0" cy="0"/>
+          <a:chOff x="0" y="0"/>
+          <a:chExt cx="0" cy="0"/>
+        </a:xfrm>
+      </p:grpSpPr>
+      <p:pic>
+        <p:nvPicPr>
+          <p:cNvPr id="30" name="图片 29" descr="卡通人物&#10;&#10;AI 生成的内容可能不正确。">
+            <a:extLst>
+              <a:ext uri="{FF2B5EF4-FFF2-40B4-BE49-F238E27FC236}">
+                <a16:creationId xmlns:a16="http://schemas.microsoft.com/office/drawing/2014/main" id="{A2F8D066-B692-F469-4395-D94320A05722}"/>
+              </a:ext>
+            </a:extLst>
+          </p:cNvPr>
+          <p:cNvPicPr>
+            <a:picLocks noChangeAspect="1"/>
+          </p:cNvPicPr>
+          <p:nvPr/>
+        </p:nvPicPr>
+        <p:blipFill>
+          <a:blip r:embed="rId2">
+            <a:extLst>
+              <a:ext uri="{28A0092B-C50C-407E-A947-70E740481C1C}">
+                <a14:useLocalDpi xmlns:a14="http://schemas.microsoft.com/office/drawing/2010/main" val="0"/>
+              </a:ext>
+            </a:extLst>
+          </a:blip>
+          <a:stretch>
+            <a:fillRect/>
+          </a:stretch>
+        </p:blipFill>
+        <p:spPr>
+          <a:xfrm>
+            <a:off x="623149" y="347146"/>
+            <a:ext cx="10560037" cy="1809421"/>
+          </a:xfrm>
+          <a:prstGeom prst="rect">
+            <a:avLst/>
+          </a:prstGeom>
+        </p:spPr>
+      </p:pic>
+      <p:grpSp>
+        <p:nvGrpSpPr>
+          <p:cNvPr id="4" name="组合 3">
+            <a:extLst>
+              <a:ext uri="{FF2B5EF4-FFF2-40B4-BE49-F238E27FC236}">
+                <a16:creationId xmlns:a16="http://schemas.microsoft.com/office/drawing/2014/main" id="{6AC59770-83F4-AC9B-71AA-C182D472984D}"/>
+              </a:ext>
+            </a:extLst>
+          </p:cNvPr>
+          <p:cNvGrpSpPr/>
+          <p:nvPr/>
+        </p:nvGrpSpPr>
+        <p:grpSpPr>
+          <a:xfrm>
+            <a:off x="623149" y="2525190"/>
+            <a:ext cx="10558790" cy="1807620"/>
+            <a:chOff x="724103" y="4531099"/>
+            <a:chExt cx="10558790" cy="1807620"/>
+          </a:xfrm>
+        </p:grpSpPr>
+        <p:grpSp>
+          <p:nvGrpSpPr>
+            <p:cNvPr id="5" name="组合 4">
+              <a:extLst>
+                <a:ext uri="{FF2B5EF4-FFF2-40B4-BE49-F238E27FC236}">
+                  <a16:creationId xmlns:a16="http://schemas.microsoft.com/office/drawing/2014/main" id="{35181B19-C5B5-5CCE-4CCE-7F8E69C2239B}"/>
+                </a:ext>
+              </a:extLst>
+            </p:cNvPr>
+            <p:cNvGrpSpPr/>
+            <p:nvPr/>
+          </p:nvGrpSpPr>
+          <p:grpSpPr>
+            <a:xfrm>
+              <a:off x="724103" y="4531099"/>
+              <a:ext cx="10558790" cy="1807620"/>
+              <a:chOff x="724103" y="4531099"/>
+              <a:chExt cx="10558790" cy="1807620"/>
+            </a:xfrm>
+          </p:grpSpPr>
+          <p:pic>
+            <p:nvPicPr>
+              <p:cNvPr id="10" name="图片 9" descr="文本, 白板&#10;&#10;AI 生成的内容可能不正确。">
+                <a:extLst>
+                  <a:ext uri="{FF2B5EF4-FFF2-40B4-BE49-F238E27FC236}">
+                    <a16:creationId xmlns:a16="http://schemas.microsoft.com/office/drawing/2014/main" id="{CF6BAF3F-C98A-C5C2-AC2E-C2D5C7ED05F2}"/>
+                  </a:ext>
+                </a:extLst>
+              </p:cNvPr>
+              <p:cNvPicPr>
+                <a:picLocks noChangeAspect="1"/>
+              </p:cNvPicPr>
+              <p:nvPr/>
+            </p:nvPicPr>
+            <p:blipFill>
+              <a:blip r:embed="rId3">
+                <a:extLst>
+                  <a:ext uri="{BEBA8EAE-BF5A-486C-A8C5-ECC9F3942E4B}">
+                    <a14:imgProps xmlns:a14="http://schemas.microsoft.com/office/drawing/2010/main">
+                      <a14:imgLayer r:embed="rId4">
+                        <a14:imgEffect>
+                          <a14:backgroundRemoval t="10000" b="90000" l="10000" r="90000">
+                            <a14:foregroundMark x1="71250" y1="22917" x2="71250" y2="22917"/>
+                            <a14:foregroundMark x1="85469" y1="77222" x2="85469" y2="77222"/>
+                            <a14:foregroundMark x1="83828" y1="77222" x2="83828" y2="77222"/>
+                            <a14:foregroundMark x1="84453" y1="77083" x2="84453" y2="77083"/>
+                            <a14:foregroundMark x1="86719" y1="77083" x2="86719" y2="77083"/>
+                            <a14:foregroundMark x1="82813" y1="76250" x2="82813" y2="76250"/>
+                            <a14:foregroundMark x1="81172" y1="79583" x2="81172" y2="79583"/>
+                            <a14:foregroundMark x1="77891" y1="80694" x2="77891" y2="80694"/>
+                            <a14:foregroundMark x1="80234" y1="80694" x2="80234" y2="80694"/>
+                            <a14:foregroundMark x1="78906" y1="80694" x2="78906" y2="80694"/>
+                            <a14:foregroundMark x1="76406" y1="80694" x2="76406" y2="80694"/>
+                            <a14:foregroundMark x1="74609" y1="80694" x2="74609" y2="80694"/>
+                            <a14:foregroundMark x1="72813" y1="79583" x2="72813" y2="79583"/>
+                            <a14:foregroundMark x1="72813" y1="79583" x2="72813" y2="79583"/>
+                            <a14:foregroundMark x1="73438" y1="80833" x2="73438" y2="80833"/>
+                            <a14:foregroundMark x1="72734" y1="77778" x2="72734" y2="77778"/>
+                            <a14:foregroundMark x1="72891" y1="76528" x2="72891" y2="76528"/>
+                            <a14:foregroundMark x1="28906" y1="75694" x2="28906" y2="75694"/>
+                            <a14:foregroundMark x1="37813" y1="75694" x2="37813" y2="75694"/>
+                            <a14:foregroundMark x1="38438" y1="75694" x2="38438" y2="75694"/>
+                            <a14:foregroundMark x1="42734" y1="75972" x2="42734" y2="75972"/>
+                            <a14:foregroundMark x1="45781" y1="75833" x2="45781" y2="75833"/>
+                            <a14:foregroundMark x1="62813" y1="76111" x2="62813" y2="76111"/>
+                            <a14:foregroundMark x1="66250" y1="75694" x2="66250" y2="75694"/>
+                            <a14:foregroundMark x1="68359" y1="75694" x2="68359" y2="75694"/>
+                            <a14:foregroundMark x1="70391" y1="75833" x2="70391" y2="75833"/>
+                            <a14:foregroundMark x1="64375" y1="75417" x2="64375" y2="75417"/>
+                            <a14:foregroundMark x1="60547" y1="75833" x2="60547" y2="75833"/>
+                            <a14:foregroundMark x1="57734" y1="75833" x2="57734" y2="75833"/>
+                            <a14:foregroundMark x1="55156" y1="75417" x2="55156" y2="75417"/>
+                            <a14:foregroundMark x1="52578" y1="75417" x2="52578" y2="75417"/>
+                            <a14:foregroundMark x1="50938" y1="75694" x2="50938" y2="75694"/>
+                            <a14:foregroundMark x1="48750" y1="75833" x2="48750" y2="75833"/>
+                            <a14:foregroundMark x1="40703" y1="75833" x2="40703" y2="75833"/>
+                            <a14:foregroundMark x1="35625" y1="75417" x2="35625" y2="75417"/>
+                            <a14:foregroundMark x1="32969" y1="75417" x2="32969" y2="75417"/>
+                            <a14:foregroundMark x1="69844" y1="23333" x2="69844" y2="23333"/>
+                            <a14:foregroundMark x1="27109" y1="80972" x2="27109" y2="80972"/>
+                            <a14:foregroundMark x1="25625" y1="80972" x2="25625" y2="80972"/>
+                            <a14:foregroundMark x1="23594" y1="80833" x2="23594" y2="80833"/>
+                            <a14:foregroundMark x1="21563" y1="80556" x2="21563" y2="80556"/>
+                            <a14:foregroundMark x1="22578" y1="80833" x2="22578" y2="80833"/>
+                            <a14:foregroundMark x1="20938" y1="80694" x2="20938" y2="80694"/>
+                            <a14:foregroundMark x1="19766" y1="79722" x2="19766" y2="79722"/>
+                            <a14:foregroundMark x1="19063" y1="77361" x2="19063" y2="77361"/>
+                            <a14:foregroundMark x1="17109" y1="76944" x2="17109" y2="76944"/>
+                            <a14:foregroundMark x1="15234" y1="77500" x2="15234" y2="77500"/>
+                            <a14:foregroundMark x1="12422" y1="67917" x2="12422" y2="67917"/>
+                            <a14:foregroundMark x1="12266" y1="70139" x2="12266" y2="70139"/>
+                            <a14:foregroundMark x1="12188" y1="58889" x2="12188" y2="58889"/>
+                            <a14:foregroundMark x1="12266" y1="61250" x2="12266" y2="61250"/>
+                            <a14:foregroundMark x1="12500" y1="44306" x2="12500" y2="44306"/>
+                            <a14:foregroundMark x1="12656" y1="36667" x2="12656" y2="36667"/>
+                            <a14:foregroundMark x1="12422" y1="28750" x2="12422" y2="28750"/>
+                            <a14:foregroundMark x1="13203" y1="22361" x2="13203" y2="22361"/>
+                            <a14:foregroundMark x1="13438" y1="73611" x2="13438" y2="73611"/>
+                            <a14:foregroundMark x1="88125" y1="72778" x2="88125" y2="72778"/>
+                            <a14:foregroundMark x1="88125" y1="72083" x2="88125" y2="72083"/>
+                            <a14:foregroundMark x1="88047" y1="73056" x2="88047" y2="73056"/>
+                          </a14:backgroundRemoval>
+                        </a14:imgEffect>
+                      </a14:imgLayer>
+                    </a14:imgProps>
+                  </a:ext>
+                  <a:ext uri="{28A0092B-C50C-407E-A947-70E740481C1C}">
+                    <a14:useLocalDpi xmlns:a14="http://schemas.microsoft.com/office/drawing/2010/main" val="0"/>
+                  </a:ext>
+                </a:extLst>
+              </a:blip>
+              <a:srcRect l="11815" t="18054" r="67005" b="18730"/>
+              <a:stretch>
+                <a:fillRect/>
+              </a:stretch>
+            </p:blipFill>
+            <p:spPr>
+              <a:xfrm>
+                <a:off x="724103" y="4531099"/>
+                <a:ext cx="1072093" cy="1800000"/>
+              </a:xfrm>
+              <a:prstGeom prst="rect">
+                <a:avLst/>
+              </a:prstGeom>
+            </p:spPr>
+          </p:pic>
+          <p:pic>
+            <p:nvPicPr>
+              <p:cNvPr id="11" name="图片 10" descr="文本, 白板&#10;&#10;AI 生成的内容可能不正确。">
+                <a:extLst>
+                  <a:ext uri="{FF2B5EF4-FFF2-40B4-BE49-F238E27FC236}">
+                    <a16:creationId xmlns:a16="http://schemas.microsoft.com/office/drawing/2014/main" id="{8CE4BD4E-FF51-2810-4951-1886B31A79DB}"/>
+                  </a:ext>
+                </a:extLst>
+              </p:cNvPr>
+              <p:cNvPicPr>
+                <a:picLocks noChangeAspect="1"/>
+              </p:cNvPicPr>
+              <p:nvPr/>
+            </p:nvPicPr>
+            <p:blipFill>
+              <a:blip r:embed="rId3">
+                <a:extLst>
+                  <a:ext uri="{BEBA8EAE-BF5A-486C-A8C5-ECC9F3942E4B}">
+                    <a14:imgProps xmlns:a14="http://schemas.microsoft.com/office/drawing/2010/main">
+                      <a14:imgLayer r:embed="rId4">
+                        <a14:imgEffect>
+                          <a14:backgroundRemoval t="10000" b="90000" l="10000" r="90000">
+                            <a14:foregroundMark x1="71250" y1="22917" x2="71250" y2="22917"/>
+                            <a14:foregroundMark x1="85469" y1="77222" x2="85469" y2="77222"/>
+                            <a14:foregroundMark x1="83828" y1="77222" x2="83828" y2="77222"/>
+                            <a14:foregroundMark x1="84453" y1="77083" x2="84453" y2="77083"/>
+                            <a14:foregroundMark x1="86719" y1="77083" x2="86719" y2="77083"/>
+                            <a14:foregroundMark x1="82813" y1="76250" x2="82813" y2="76250"/>
+                            <a14:foregroundMark x1="81172" y1="79583" x2="81172" y2="79583"/>
+                            <a14:foregroundMark x1="77891" y1="80694" x2="77891" y2="80694"/>
+                            <a14:foregroundMark x1="80234" y1="80694" x2="80234" y2="80694"/>
+                            <a14:foregroundMark x1="78906" y1="80694" x2="78906" y2="80694"/>
+                            <a14:foregroundMark x1="76406" y1="80694" x2="76406" y2="80694"/>
+                            <a14:foregroundMark x1="74609" y1="80694" x2="74609" y2="80694"/>
+                            <a14:foregroundMark x1="72813" y1="79583" x2="72813" y2="79583"/>
+                            <a14:foregroundMark x1="72813" y1="79583" x2="72813" y2="79583"/>
+                            <a14:foregroundMark x1="73438" y1="80833" x2="73438" y2="80833"/>
+                            <a14:foregroundMark x1="72734" y1="77778" x2="72734" y2="77778"/>
+                            <a14:foregroundMark x1="72891" y1="76528" x2="72891" y2="76528"/>
+                            <a14:foregroundMark x1="28906" y1="75694" x2="28906" y2="75694"/>
+                            <a14:foregroundMark x1="37813" y1="75694" x2="37813" y2="75694"/>
+                            <a14:foregroundMark x1="38438" y1="75694" x2="38438" y2="75694"/>
+                            <a14:foregroundMark x1="42734" y1="75972" x2="42734" y2="75972"/>
+                            <a14:foregroundMark x1="45781" y1="75833" x2="45781" y2="75833"/>
+                            <a14:foregroundMark x1="62813" y1="76111" x2="62813" y2="76111"/>
+                            <a14:foregroundMark x1="66250" y1="75694" x2="66250" y2="75694"/>
+                            <a14:foregroundMark x1="68359" y1="75694" x2="68359" y2="75694"/>
+                            <a14:foregroundMark x1="70391" y1="75833" x2="70391" y2="75833"/>
+                            <a14:foregroundMark x1="64375" y1="75417" x2="64375" y2="75417"/>
+                            <a14:foregroundMark x1="60547" y1="75833" x2="60547" y2="75833"/>
+                            <a14:foregroundMark x1="57734" y1="75833" x2="57734" y2="75833"/>
+                            <a14:foregroundMark x1="55156" y1="75417" x2="55156" y2="75417"/>
+                            <a14:foregroundMark x1="52578" y1="75417" x2="52578" y2="75417"/>
+                            <a14:foregroundMark x1="50938" y1="75694" x2="50938" y2="75694"/>
+                            <a14:foregroundMark x1="48750" y1="75833" x2="48750" y2="75833"/>
+                            <a14:foregroundMark x1="40703" y1="75833" x2="40703" y2="75833"/>
+                            <a14:foregroundMark x1="35625" y1="75417" x2="35625" y2="75417"/>
+                            <a14:foregroundMark x1="32969" y1="75417" x2="32969" y2="75417"/>
+                            <a14:foregroundMark x1="69844" y1="23333" x2="69844" y2="23333"/>
+                            <a14:foregroundMark x1="27109" y1="80972" x2="27109" y2="80972"/>
+                            <a14:foregroundMark x1="25625" y1="80972" x2="25625" y2="80972"/>
+                            <a14:foregroundMark x1="23594" y1="80833" x2="23594" y2="80833"/>
+                            <a14:foregroundMark x1="21563" y1="80556" x2="21563" y2="80556"/>
+                            <a14:foregroundMark x1="22578" y1="80833" x2="22578" y2="80833"/>
+                            <a14:foregroundMark x1="20938" y1="80694" x2="20938" y2="80694"/>
+                            <a14:foregroundMark x1="19766" y1="79722" x2="19766" y2="79722"/>
+                            <a14:foregroundMark x1="19063" y1="77361" x2="19063" y2="77361"/>
+                            <a14:foregroundMark x1="17109" y1="76944" x2="17109" y2="76944"/>
+                            <a14:foregroundMark x1="15234" y1="77500" x2="15234" y2="77500"/>
+                            <a14:foregroundMark x1="12422" y1="67917" x2="12422" y2="67917"/>
+                            <a14:foregroundMark x1="12266" y1="70139" x2="12266" y2="70139"/>
+                            <a14:foregroundMark x1="12188" y1="58889" x2="12188" y2="58889"/>
+                            <a14:foregroundMark x1="12266" y1="61250" x2="12266" y2="61250"/>
+                            <a14:foregroundMark x1="12500" y1="44306" x2="12500" y2="44306"/>
+                            <a14:foregroundMark x1="12656" y1="36667" x2="12656" y2="36667"/>
+                            <a14:foregroundMark x1="12422" y1="28750" x2="12422" y2="28750"/>
+                            <a14:foregroundMark x1="13203" y1="22361" x2="13203" y2="22361"/>
+                            <a14:foregroundMark x1="13438" y1="73611" x2="13438" y2="73611"/>
+                            <a14:foregroundMark x1="88125" y1="72778" x2="88125" y2="72778"/>
+                            <a14:foregroundMark x1="88125" y1="72083" x2="88125" y2="72083"/>
+                            <a14:foregroundMark x1="88047" y1="73056" x2="88047" y2="73056"/>
+                          </a14:backgroundRemoval>
+                        </a14:imgEffect>
+                      </a14:imgLayer>
+                    </a14:imgProps>
+                  </a:ext>
+                  <a:ext uri="{28A0092B-C50C-407E-A947-70E740481C1C}">
+                    <a14:useLocalDpi xmlns:a14="http://schemas.microsoft.com/office/drawing/2010/main" val="0"/>
+                  </a:ext>
+                </a:extLst>
+              </a:blip>
+              <a:srcRect l="67509" t="18054" r="11312" b="18730"/>
+              <a:stretch>
+                <a:fillRect/>
+              </a:stretch>
+            </p:blipFill>
+            <p:spPr>
+              <a:xfrm>
+                <a:off x="10210800" y="4537540"/>
+                <a:ext cx="1072093" cy="1800000"/>
+              </a:xfrm>
+              <a:prstGeom prst="rect">
+                <a:avLst/>
+              </a:prstGeom>
+            </p:spPr>
+          </p:pic>
+          <p:pic>
+            <p:nvPicPr>
+              <p:cNvPr id="12" name="图片 11" descr="文本, 白板&#10;&#10;AI 生成的内容可能不正确。">
+                <a:extLst>
+                  <a:ext uri="{FF2B5EF4-FFF2-40B4-BE49-F238E27FC236}">
+                    <a16:creationId xmlns:a16="http://schemas.microsoft.com/office/drawing/2014/main" id="{54C86C25-838B-897B-871A-8DD547F62DC0}"/>
+                  </a:ext>
+                </a:extLst>
+              </p:cNvPr>
+              <p:cNvPicPr>
+                <a:picLocks noChangeAspect="1"/>
+              </p:cNvPicPr>
+              <p:nvPr/>
+            </p:nvPicPr>
+            <p:blipFill>
+              <a:blip r:embed="rId3">
+                <a:extLst>
+                  <a:ext uri="{BEBA8EAE-BF5A-486C-A8C5-ECC9F3942E4B}">
+                    <a14:imgProps xmlns:a14="http://schemas.microsoft.com/office/drawing/2010/main">
+                      <a14:imgLayer r:embed="rId4">
+                        <a14:imgEffect>
+                          <a14:backgroundRemoval t="10000" b="90000" l="10000" r="90000">
+                            <a14:foregroundMark x1="71250" y1="22917" x2="71250" y2="22917"/>
+                            <a14:foregroundMark x1="85469" y1="77222" x2="85469" y2="77222"/>
+                            <a14:foregroundMark x1="83828" y1="77222" x2="83828" y2="77222"/>
+                            <a14:foregroundMark x1="84453" y1="77083" x2="84453" y2="77083"/>
+                            <a14:foregroundMark x1="86719" y1="77083" x2="86719" y2="77083"/>
+                            <a14:foregroundMark x1="82813" y1="76250" x2="82813" y2="76250"/>
+                            <a14:foregroundMark x1="81172" y1="79583" x2="81172" y2="79583"/>
+                            <a14:foregroundMark x1="77891" y1="80694" x2="77891" y2="80694"/>
+                            <a14:foregroundMark x1="80234" y1="80694" x2="80234" y2="80694"/>
+                            <a14:foregroundMark x1="78906" y1="80694" x2="78906" y2="80694"/>
+                            <a14:foregroundMark x1="76406" y1="80694" x2="76406" y2="80694"/>
+                            <a14:foregroundMark x1="74609" y1="80694" x2="74609" y2="80694"/>
+                            <a14:foregroundMark x1="72813" y1="79583" x2="72813" y2="79583"/>
+                            <a14:foregroundMark x1="72813" y1="79583" x2="72813" y2="79583"/>
+                            <a14:foregroundMark x1="73438" y1="80833" x2="73438" y2="80833"/>
+                            <a14:foregroundMark x1="72734" y1="77778" x2="72734" y2="77778"/>
+                            <a14:foregroundMark x1="72891" y1="76528" x2="72891" y2="76528"/>
+                            <a14:foregroundMark x1="28906" y1="75694" x2="28906" y2="75694"/>
+                            <a14:foregroundMark x1="37813" y1="75694" x2="37813" y2="75694"/>
+                            <a14:foregroundMark x1="38438" y1="75694" x2="38438" y2="75694"/>
+                            <a14:foregroundMark x1="42734" y1="75972" x2="42734" y2="75972"/>
+                            <a14:foregroundMark x1="45781" y1="75833" x2="45781" y2="75833"/>
+                            <a14:foregroundMark x1="62813" y1="76111" x2="62813" y2="76111"/>
+                            <a14:foregroundMark x1="66250" y1="75694" x2="66250" y2="75694"/>
+                            <a14:foregroundMark x1="68359" y1="75694" x2="68359" y2="75694"/>
+                            <a14:foregroundMark x1="70391" y1="75833" x2="70391" y2="75833"/>
+                            <a14:foregroundMark x1="64375" y1="75417" x2="64375" y2="75417"/>
+                            <a14:foregroundMark x1="60547" y1="75833" x2="60547" y2="75833"/>
+                            <a14:foregroundMark x1="57734" y1="75833" x2="57734" y2="75833"/>
+                            <a14:foregroundMark x1="55156" y1="75417" x2="55156" y2="75417"/>
+                            <a14:foregroundMark x1="52578" y1="75417" x2="52578" y2="75417"/>
+                            <a14:foregroundMark x1="50938" y1="75694" x2="50938" y2="75694"/>
+                            <a14:foregroundMark x1="48750" y1="75833" x2="48750" y2="75833"/>
+                            <a14:foregroundMark x1="40703" y1="75833" x2="40703" y2="75833"/>
+                            <a14:foregroundMark x1="35625" y1="75417" x2="35625" y2="75417"/>
+                            <a14:foregroundMark x1="32969" y1="75417" x2="32969" y2="75417"/>
+                            <a14:foregroundMark x1="69844" y1="23333" x2="69844" y2="23333"/>
+                            <a14:foregroundMark x1="27109" y1="80972" x2="27109" y2="80972"/>
+                            <a14:foregroundMark x1="25625" y1="80972" x2="25625" y2="80972"/>
+                            <a14:foregroundMark x1="23594" y1="80833" x2="23594" y2="80833"/>
+                            <a14:foregroundMark x1="21563" y1="80556" x2="21563" y2="80556"/>
+                            <a14:foregroundMark x1="22578" y1="80833" x2="22578" y2="80833"/>
+                            <a14:foregroundMark x1="20938" y1="80694" x2="20938" y2="80694"/>
+                            <a14:foregroundMark x1="19766" y1="79722" x2="19766" y2="79722"/>
+                            <a14:foregroundMark x1="19063" y1="77361" x2="19063" y2="77361"/>
+                            <a14:foregroundMark x1="17109" y1="76944" x2="17109" y2="76944"/>
+                            <a14:foregroundMark x1="15234" y1="77500" x2="15234" y2="77500"/>
+                            <a14:foregroundMark x1="12422" y1="67917" x2="12422" y2="67917"/>
+                            <a14:foregroundMark x1="12266" y1="70139" x2="12266" y2="70139"/>
+                            <a14:foregroundMark x1="12188" y1="58889" x2="12188" y2="58889"/>
+                            <a14:foregroundMark x1="12266" y1="61250" x2="12266" y2="61250"/>
+                            <a14:foregroundMark x1="12500" y1="44306" x2="12500" y2="44306"/>
+                            <a14:foregroundMark x1="12656" y1="36667" x2="12656" y2="36667"/>
+                            <a14:foregroundMark x1="12422" y1="28750" x2="12422" y2="28750"/>
+                            <a14:foregroundMark x1="13203" y1="22361" x2="13203" y2="22361"/>
+                            <a14:foregroundMark x1="13438" y1="73611" x2="13438" y2="73611"/>
+                            <a14:foregroundMark x1="88125" y1="72778" x2="88125" y2="72778"/>
+                            <a14:foregroundMark x1="88125" y1="72083" x2="88125" y2="72083"/>
+                            <a14:foregroundMark x1="88047" y1="73056" x2="88047" y2="73056"/>
+                          </a14:backgroundRemoval>
+                        </a14:imgEffect>
+                      </a14:imgLayer>
+                    </a14:imgProps>
+                  </a:ext>
+                  <a:ext uri="{28A0092B-C50C-407E-A947-70E740481C1C}">
+                    <a14:useLocalDpi xmlns:a14="http://schemas.microsoft.com/office/drawing/2010/main" val="0"/>
+                  </a:ext>
+                </a:extLst>
+              </a:blip>
+              <a:srcRect l="34993" t="18054" r="31739" b="18730"/>
+              <a:stretch>
+                <a:fillRect/>
+              </a:stretch>
+            </p:blipFill>
+            <p:spPr>
+              <a:xfrm>
+                <a:off x="1790700" y="4537540"/>
+                <a:ext cx="1684020" cy="1800000"/>
+              </a:xfrm>
+              <a:prstGeom prst="rect">
+                <a:avLst/>
+              </a:prstGeom>
+            </p:spPr>
+          </p:pic>
+          <p:pic>
+            <p:nvPicPr>
+              <p:cNvPr id="13" name="图片 12" descr="文本, 白板&#10;&#10;AI 生成的内容可能不正确。">
+                <a:extLst>
+                  <a:ext uri="{FF2B5EF4-FFF2-40B4-BE49-F238E27FC236}">
+                    <a16:creationId xmlns:a16="http://schemas.microsoft.com/office/drawing/2014/main" id="{7A8ADF30-9CF2-5ECC-F248-54FC05F0B2E8}"/>
+                  </a:ext>
+                </a:extLst>
+              </p:cNvPr>
+              <p:cNvPicPr>
+                <a:picLocks noChangeAspect="1"/>
+              </p:cNvPicPr>
+              <p:nvPr/>
+            </p:nvPicPr>
+            <p:blipFill>
+              <a:blip r:embed="rId3">
+                <a:extLst>
+                  <a:ext uri="{BEBA8EAE-BF5A-486C-A8C5-ECC9F3942E4B}">
+                    <a14:imgProps xmlns:a14="http://schemas.microsoft.com/office/drawing/2010/main">
+                      <a14:imgLayer r:embed="rId4">
+                        <a14:imgEffect>
+                          <a14:backgroundRemoval t="10000" b="90000" l="10000" r="90000">
+                            <a14:foregroundMark x1="71250" y1="22917" x2="71250" y2="22917"/>
+                            <a14:foregroundMark x1="85469" y1="77222" x2="85469" y2="77222"/>
+                            <a14:foregroundMark x1="83828" y1="77222" x2="83828" y2="77222"/>
+                            <a14:foregroundMark x1="84453" y1="77083" x2="84453" y2="77083"/>
+                            <a14:foregroundMark x1="86719" y1="77083" x2="86719" y2="77083"/>
+                            <a14:foregroundMark x1="82813" y1="76250" x2="82813" y2="76250"/>
+                            <a14:foregroundMark x1="81172" y1="79583" x2="81172" y2="79583"/>
+                            <a14:foregroundMark x1="77891" y1="80694" x2="77891" y2="80694"/>
+                            <a14:foregroundMark x1="80234" y1="80694" x2="80234" y2="80694"/>
+                            <a14:foregroundMark x1="78906" y1="80694" x2="78906" y2="80694"/>
+                            <a14:foregroundMark x1="76406" y1="80694" x2="76406" y2="80694"/>
+                            <a14:foregroundMark x1="74609" y1="80694" x2="74609" y2="80694"/>
+                            <a14:foregroundMark x1="72813" y1="79583" x2="72813" y2="79583"/>
+                            <a14:foregroundMark x1="72813" y1="79583" x2="72813" y2="79583"/>
+                            <a14:foregroundMark x1="73438" y1="80833" x2="73438" y2="80833"/>
+                            <a14:foregroundMark x1="72734" y1="77778" x2="72734" y2="77778"/>
+                            <a14:foregroundMark x1="72891" y1="76528" x2="72891" y2="76528"/>
+                            <a14:foregroundMark x1="28906" y1="75694" x2="28906" y2="75694"/>
+                            <a14:foregroundMark x1="37813" y1="75694" x2="37813" y2="75694"/>
+                            <a14:foregroundMark x1="38438" y1="75694" x2="38438" y2="75694"/>
+                            <a14:foregroundMark x1="42734" y1="75972" x2="42734" y2="75972"/>
+                            <a14:foregroundMark x1="45781" y1="75833" x2="45781" y2="75833"/>
+                            <a14:foregroundMark x1="62813" y1="76111" x2="62813" y2="76111"/>
+                            <a14:foregroundMark x1="66250" y1="75694" x2="66250" y2="75694"/>
+                            <a14:foregroundMark x1="68359" y1="75694" x2="68359" y2="75694"/>
+                            <a14:foregroundMark x1="70391" y1="75833" x2="70391" y2="75833"/>
+                            <a14:foregroundMark x1="64375" y1="75417" x2="64375" y2="75417"/>
+                            <a14:foregroundMark x1="60547" y1="75833" x2="60547" y2="75833"/>
+                            <a14:foregroundMark x1="57734" y1="75833" x2="57734" y2="75833"/>
+                            <a14:foregroundMark x1="55156" y1="75417" x2="55156" y2="75417"/>
+                            <a14:foregroundMark x1="52578" y1="75417" x2="52578" y2="75417"/>
+                            <a14:foregroundMark x1="50938" y1="75694" x2="50938" y2="75694"/>
+                            <a14:foregroundMark x1="48750" y1="75833" x2="48750" y2="75833"/>
+                            <a14:foregroundMark x1="40703" y1="75833" x2="40703" y2="75833"/>
+                            <a14:foregroundMark x1="35625" y1="75417" x2="35625" y2="75417"/>
+                            <a14:foregroundMark x1="32969" y1="75417" x2="32969" y2="75417"/>
+                            <a14:foregroundMark x1="69844" y1="23333" x2="69844" y2="23333"/>
+                            <a14:foregroundMark x1="27109" y1="80972" x2="27109" y2="80972"/>
+                            <a14:foregroundMark x1="25625" y1="80972" x2="25625" y2="80972"/>
+                            <a14:foregroundMark x1="23594" y1="80833" x2="23594" y2="80833"/>
+                            <a14:foregroundMark x1="21563" y1="80556" x2="21563" y2="80556"/>
+                            <a14:foregroundMark x1="22578" y1="80833" x2="22578" y2="80833"/>
+                            <a14:foregroundMark x1="20938" y1="80694" x2="20938" y2="80694"/>
+                            <a14:foregroundMark x1="19766" y1="79722" x2="19766" y2="79722"/>
+                            <a14:foregroundMark x1="19063" y1="77361" x2="19063" y2="77361"/>
+                            <a14:foregroundMark x1="17109" y1="76944" x2="17109" y2="76944"/>
+                            <a14:foregroundMark x1="15234" y1="77500" x2="15234" y2="77500"/>
+                            <a14:foregroundMark x1="12422" y1="67917" x2="12422" y2="67917"/>
+                            <a14:foregroundMark x1="12266" y1="70139" x2="12266" y2="70139"/>
+                            <a14:foregroundMark x1="12188" y1="58889" x2="12188" y2="58889"/>
+                            <a14:foregroundMark x1="12266" y1="61250" x2="12266" y2="61250"/>
+                            <a14:foregroundMark x1="12500" y1="44306" x2="12500" y2="44306"/>
+                            <a14:foregroundMark x1="12656" y1="36667" x2="12656" y2="36667"/>
+                            <a14:foregroundMark x1="12422" y1="28750" x2="12422" y2="28750"/>
+                            <a14:foregroundMark x1="13203" y1="22361" x2="13203" y2="22361"/>
+                            <a14:foregroundMark x1="13438" y1="73611" x2="13438" y2="73611"/>
+                            <a14:foregroundMark x1="88125" y1="72778" x2="88125" y2="72778"/>
+                            <a14:foregroundMark x1="88125" y1="72083" x2="88125" y2="72083"/>
+                            <a14:foregroundMark x1="88047" y1="73056" x2="88047" y2="73056"/>
+                          </a14:backgroundRemoval>
+                        </a14:imgEffect>
+                      </a14:imgLayer>
+                    </a14:imgProps>
+                  </a:ext>
+                  <a:ext uri="{28A0092B-C50C-407E-A947-70E740481C1C}">
+                    <a14:useLocalDpi xmlns:a14="http://schemas.microsoft.com/office/drawing/2010/main" val="0"/>
+                  </a:ext>
+                </a:extLst>
+              </a:blip>
+              <a:srcRect l="34993" t="18054" r="31739" b="18730"/>
+              <a:stretch>
+                <a:fillRect/>
+              </a:stretch>
+            </p:blipFill>
+            <p:spPr>
+              <a:xfrm>
+                <a:off x="3474720" y="4538719"/>
+                <a:ext cx="1684020" cy="1800000"/>
+              </a:xfrm>
+              <a:prstGeom prst="rect">
+                <a:avLst/>
+              </a:prstGeom>
+            </p:spPr>
+          </p:pic>
+          <p:pic>
+            <p:nvPicPr>
+              <p:cNvPr id="14" name="图片 13" descr="文本, 白板&#10;&#10;AI 生成的内容可能不正确。">
+                <a:extLst>
+                  <a:ext uri="{FF2B5EF4-FFF2-40B4-BE49-F238E27FC236}">
+                    <a16:creationId xmlns:a16="http://schemas.microsoft.com/office/drawing/2014/main" id="{1739A676-1FCA-65B9-9848-DA4B17AC72F3}"/>
+                  </a:ext>
+                </a:extLst>
+              </p:cNvPr>
+              <p:cNvPicPr>
+                <a:picLocks noChangeAspect="1"/>
+              </p:cNvPicPr>
+              <p:nvPr/>
+            </p:nvPicPr>
+            <p:blipFill>
+              <a:blip r:embed="rId3">
+                <a:extLst>
+                  <a:ext uri="{BEBA8EAE-BF5A-486C-A8C5-ECC9F3942E4B}">
+                    <a14:imgProps xmlns:a14="http://schemas.microsoft.com/office/drawing/2010/main">
+                      <a14:imgLayer r:embed="rId4">
+                        <a14:imgEffect>
+                          <a14:backgroundRemoval t="10000" b="90000" l="10000" r="90000">
+                            <a14:foregroundMark x1="71250" y1="22917" x2="71250" y2="22917"/>
+                            <a14:foregroundMark x1="85469" y1="77222" x2="85469" y2="77222"/>
+                            <a14:foregroundMark x1="83828" y1="77222" x2="83828" y2="77222"/>
+                            <a14:foregroundMark x1="84453" y1="77083" x2="84453" y2="77083"/>
+                            <a14:foregroundMark x1="86719" y1="77083" x2="86719" y2="77083"/>
+                            <a14:foregroundMark x1="82813" y1="76250" x2="82813" y2="76250"/>
+                            <a14:foregroundMark x1="81172" y1="79583" x2="81172" y2="79583"/>
+                            <a14:foregroundMark x1="77891" y1="80694" x2="77891" y2="80694"/>
+                            <a14:foregroundMark x1="80234" y1="80694" x2="80234" y2="80694"/>
+                            <a14:foregroundMark x1="78906" y1="80694" x2="78906" y2="80694"/>
+                            <a14:foregroundMark x1="76406" y1="80694" x2="76406" y2="80694"/>
+                            <a14:foregroundMark x1="74609" y1="80694" x2="74609" y2="80694"/>
+                            <a14:foregroundMark x1="72813" y1="79583" x2="72813" y2="79583"/>
+                            <a14:foregroundMark x1="72813" y1="79583" x2="72813" y2="79583"/>
+                            <a14:foregroundMark x1="73438" y1="80833" x2="73438" y2="80833"/>
+                            <a14:foregroundMark x1="72734" y1="77778" x2="72734" y2="77778"/>
+                            <a14:foregroundMark x1="72891" y1="76528" x2="72891" y2="76528"/>
+                            <a14:foregroundMark x1="28906" y1="75694" x2="28906" y2="75694"/>
+                            <a14:foregroundMark x1="37813" y1="75694" x2="37813" y2="75694"/>
+                            <a14:foregroundMark x1="38438" y1="75694" x2="38438" y2="75694"/>
+                            <a14:foregroundMark x1="42734" y1="75972" x2="42734" y2="75972"/>
+                            <a14:foregroundMark x1="45781" y1="75833" x2="45781" y2="75833"/>
+                            <a14:foregroundMark x1="62813" y1="76111" x2="62813" y2="76111"/>
+                            <a14:foregroundMark x1="66250" y1="75694" x2="66250" y2="75694"/>
+                            <a14:foregroundMark x1="68359" y1="75694" x2="68359" y2="75694"/>
+                            <a14:foregroundMark x1="70391" y1="75833" x2="70391" y2="75833"/>
+                            <a14:foregroundMark x1="64375" y1="75417" x2="64375" y2="75417"/>
+                            <a14:foregroundMark x1="60547" y1="75833" x2="60547" y2="75833"/>
+                            <a14:foregroundMark x1="57734" y1="75833" x2="57734" y2="75833"/>
+                            <a14:foregroundMark x1="55156" y1="75417" x2="55156" y2="75417"/>
+                            <a14:foregroundMark x1="52578" y1="75417" x2="52578" y2="75417"/>
+                            <a14:foregroundMark x1="50938" y1="75694" x2="50938" y2="75694"/>
+                            <a14:foregroundMark x1="48750" y1="75833" x2="48750" y2="75833"/>
+                            <a14:foregroundMark x1="40703" y1="75833" x2="40703" y2="75833"/>
+                            <a14:foregroundMark x1="35625" y1="75417" x2="35625" y2="75417"/>
+                            <a14:foregroundMark x1="32969" y1="75417" x2="32969" y2="75417"/>
+                            <a14:foregroundMark x1="69844" y1="23333" x2="69844" y2="23333"/>
+                            <a14:foregroundMark x1="27109" y1="80972" x2="27109" y2="80972"/>
+                            <a14:foregroundMark x1="25625" y1="80972" x2="25625" y2="80972"/>
+                            <a14:foregroundMark x1="23594" y1="80833" x2="23594" y2="80833"/>
+                            <a14:foregroundMark x1="21563" y1="80556" x2="21563" y2="80556"/>
+                            <a14:foregroundMark x1="22578" y1="80833" x2="22578" y2="80833"/>
+                            <a14:foregroundMark x1="20938" y1="80694" x2="20938" y2="80694"/>
+                            <a14:foregroundMark x1="19766" y1="79722" x2="19766" y2="79722"/>
+                            <a14:foregroundMark x1="19063" y1="77361" x2="19063" y2="77361"/>
+                            <a14:foregroundMark x1="17109" y1="76944" x2="17109" y2="76944"/>
+                            <a14:foregroundMark x1="15234" y1="77500" x2="15234" y2="77500"/>
+                            <a14:foregroundMark x1="12422" y1="67917" x2="12422" y2="67917"/>
+                            <a14:foregroundMark x1="12266" y1="70139" x2="12266" y2="70139"/>
+                            <a14:foregroundMark x1="12188" y1="58889" x2="12188" y2="58889"/>
+                            <a14:foregroundMark x1="12266" y1="61250" x2="12266" y2="61250"/>
+                            <a14:foregroundMark x1="12500" y1="44306" x2="12500" y2="44306"/>
+                            <a14:foregroundMark x1="12656" y1="36667" x2="12656" y2="36667"/>
+                            <a14:foregroundMark x1="12422" y1="28750" x2="12422" y2="28750"/>
+                            <a14:foregroundMark x1="13203" y1="22361" x2="13203" y2="22361"/>
+                            <a14:foregroundMark x1="13438" y1="73611" x2="13438" y2="73611"/>
+                            <a14:foregroundMark x1="88125" y1="72778" x2="88125" y2="72778"/>
+                            <a14:foregroundMark x1="88125" y1="72083" x2="88125" y2="72083"/>
+                            <a14:foregroundMark x1="88047" y1="73056" x2="88047" y2="73056"/>
+                          </a14:backgroundRemoval>
+                        </a14:imgEffect>
+                      </a14:imgLayer>
+                    </a14:imgProps>
+                  </a:ext>
+                  <a:ext uri="{28A0092B-C50C-407E-A947-70E740481C1C}">
+                    <a14:useLocalDpi xmlns:a14="http://schemas.microsoft.com/office/drawing/2010/main" val="0"/>
+                  </a:ext>
+                </a:extLst>
+              </a:blip>
+              <a:srcRect l="34993" t="18054" r="31739" b="18730"/>
+              <a:stretch>
+                <a:fillRect/>
+              </a:stretch>
+            </p:blipFill>
+            <p:spPr>
+              <a:xfrm>
+                <a:off x="5158740" y="4538719"/>
+                <a:ext cx="1684020" cy="1800000"/>
+              </a:xfrm>
+              <a:prstGeom prst="rect">
+                <a:avLst/>
+              </a:prstGeom>
+            </p:spPr>
+          </p:pic>
+          <p:pic>
+            <p:nvPicPr>
+              <p:cNvPr id="15" name="图片 14" descr="文本, 白板&#10;&#10;AI 生成的内容可能不正确。">
+                <a:extLst>
+                  <a:ext uri="{FF2B5EF4-FFF2-40B4-BE49-F238E27FC236}">
+                    <a16:creationId xmlns:a16="http://schemas.microsoft.com/office/drawing/2014/main" id="{4C6C03C4-3D8B-1EF4-59A3-C6CD0F6F324F}"/>
+                  </a:ext>
+                </a:extLst>
+              </p:cNvPr>
+              <p:cNvPicPr>
+                <a:picLocks noChangeAspect="1"/>
+              </p:cNvPicPr>
+              <p:nvPr/>
+            </p:nvPicPr>
+            <p:blipFill>
+              <a:blip r:embed="rId3">
+                <a:extLst>
+                  <a:ext uri="{BEBA8EAE-BF5A-486C-A8C5-ECC9F3942E4B}">
+                    <a14:imgProps xmlns:a14="http://schemas.microsoft.com/office/drawing/2010/main">
+                      <a14:imgLayer r:embed="rId4">
+                        <a14:imgEffect>
+                          <a14:backgroundRemoval t="10000" b="90000" l="10000" r="90000">
+                            <a14:foregroundMark x1="71250" y1="22917" x2="71250" y2="22917"/>
+                            <a14:foregroundMark x1="85469" y1="77222" x2="85469" y2="77222"/>
+                            <a14:foregroundMark x1="83828" y1="77222" x2="83828" y2="77222"/>
+                            <a14:foregroundMark x1="84453" y1="77083" x2="84453" y2="77083"/>
+                            <a14:foregroundMark x1="86719" y1="77083" x2="86719" y2="77083"/>
+                            <a14:foregroundMark x1="82813" y1="76250" x2="82813" y2="76250"/>
+                            <a14:foregroundMark x1="81172" y1="79583" x2="81172" y2="79583"/>
+                            <a14:foregroundMark x1="77891" y1="80694" x2="77891" y2="80694"/>
+                            <a14:foregroundMark x1="80234" y1="80694" x2="80234" y2="80694"/>
+                            <a14:foregroundMark x1="78906" y1="80694" x2="78906" y2="80694"/>
+                            <a14:foregroundMark x1="76406" y1="80694" x2="76406" y2="80694"/>
+                            <a14:foregroundMark x1="74609" y1="80694" x2="74609" y2="80694"/>
+                            <a14:foregroundMark x1="72813" y1="79583" x2="72813" y2="79583"/>
+                            <a14:foregroundMark x1="72813" y1="79583" x2="72813" y2="79583"/>
+                            <a14:foregroundMark x1="73438" y1="80833" x2="73438" y2="80833"/>
+                            <a14:foregroundMark x1="72734" y1="77778" x2="72734" y2="77778"/>
+                            <a14:foregroundMark x1="72891" y1="76528" x2="72891" y2="76528"/>
+                            <a14:foregroundMark x1="28906" y1="75694" x2="28906" y2="75694"/>
+                            <a14:foregroundMark x1="37813" y1="75694" x2="37813" y2="75694"/>
+                            <a14:foregroundMark x1="38438" y1="75694" x2="38438" y2="75694"/>
+                            <a14:foregroundMark x1="42734" y1="75972" x2="42734" y2="75972"/>
+                            <a14:foregroundMark x1="45781" y1="75833" x2="45781" y2="75833"/>
+                            <a14:foregroundMark x1="62813" y1="76111" x2="62813" y2="76111"/>
+                            <a14:foregroundMark x1="66250" y1="75694" x2="66250" y2="75694"/>
+                            <a14:foregroundMark x1="68359" y1="75694" x2="68359" y2="75694"/>
+                            <a14:foregroundMark x1="70391" y1="75833" x2="70391" y2="75833"/>
+                            <a14:foregroundMark x1="64375" y1="75417" x2="64375" y2="75417"/>
+                            <a14:foregroundMark x1="60547" y1="75833" x2="60547" y2="75833"/>
+                            <a14:foregroundMark x1="57734" y1="75833" x2="57734" y2="75833"/>
+                            <a14:foregroundMark x1="55156" y1="75417" x2="55156" y2="75417"/>
+                            <a14:foregroundMark x1="52578" y1="75417" x2="52578" y2="75417"/>
+                            <a14:foregroundMark x1="50938" y1="75694" x2="50938" y2="75694"/>
+                            <a14:foregroundMark x1="48750" y1="75833" x2="48750" y2="75833"/>
+                            <a14:foregroundMark x1="40703" y1="75833" x2="40703" y2="75833"/>
+                            <a14:foregroundMark x1="35625" y1="75417" x2="35625" y2="75417"/>
+                            <a14:foregroundMark x1="32969" y1="75417" x2="32969" y2="75417"/>
+                            <a14:foregroundMark x1="69844" y1="23333" x2="69844" y2="23333"/>
+                            <a14:foregroundMark x1="27109" y1="80972" x2="27109" y2="80972"/>
+                            <a14:foregroundMark x1="25625" y1="80972" x2="25625" y2="80972"/>
+                            <a14:foregroundMark x1="23594" y1="80833" x2="23594" y2="80833"/>
+                            <a14:foregroundMark x1="21563" y1="80556" x2="21563" y2="80556"/>
+                            <a14:foregroundMark x1="22578" y1="80833" x2="22578" y2="80833"/>
+                            <a14:foregroundMark x1="20938" y1="80694" x2="20938" y2="80694"/>
+                            <a14:foregroundMark x1="19766" y1="79722" x2="19766" y2="79722"/>
+                            <a14:foregroundMark x1="19063" y1="77361" x2="19063" y2="77361"/>
+                            <a14:foregroundMark x1="17109" y1="76944" x2="17109" y2="76944"/>
+                            <a14:foregroundMark x1="15234" y1="77500" x2="15234" y2="77500"/>
+                            <a14:foregroundMark x1="12422" y1="67917" x2="12422" y2="67917"/>
+                            <a14:foregroundMark x1="12266" y1="70139" x2="12266" y2="70139"/>
+                            <a14:foregroundMark x1="12188" y1="58889" x2="12188" y2="58889"/>
+                            <a14:foregroundMark x1="12266" y1="61250" x2="12266" y2="61250"/>
+                            <a14:foregroundMark x1="12500" y1="44306" x2="12500" y2="44306"/>
+                            <a14:foregroundMark x1="12656" y1="36667" x2="12656" y2="36667"/>
+                            <a14:foregroundMark x1="12422" y1="28750" x2="12422" y2="28750"/>
+                            <a14:foregroundMark x1="13203" y1="22361" x2="13203" y2="22361"/>
+                            <a14:foregroundMark x1="13438" y1="73611" x2="13438" y2="73611"/>
+                            <a14:foregroundMark x1="88125" y1="72778" x2="88125" y2="72778"/>
+                            <a14:foregroundMark x1="88125" y1="72083" x2="88125" y2="72083"/>
+                            <a14:foregroundMark x1="88047" y1="73056" x2="88047" y2="73056"/>
+                          </a14:backgroundRemoval>
+                        </a14:imgEffect>
+                      </a14:imgLayer>
+                    </a14:imgProps>
+                  </a:ext>
+                  <a:ext uri="{28A0092B-C50C-407E-A947-70E740481C1C}">
+                    <a14:useLocalDpi xmlns:a14="http://schemas.microsoft.com/office/drawing/2010/main" val="0"/>
+                  </a:ext>
+                </a:extLst>
+              </a:blip>
+              <a:srcRect l="34993" t="18054" r="31739" b="18730"/>
+              <a:stretch>
+                <a:fillRect/>
+              </a:stretch>
+            </p:blipFill>
+            <p:spPr>
+              <a:xfrm>
+                <a:off x="6842760" y="4538719"/>
+                <a:ext cx="1684020" cy="1800000"/>
+              </a:xfrm>
+              <a:prstGeom prst="rect">
+                <a:avLst/>
+              </a:prstGeom>
+            </p:spPr>
+          </p:pic>
+          <p:pic>
+            <p:nvPicPr>
+              <p:cNvPr id="16" name="图片 15" descr="文本, 白板&#10;&#10;AI 生成的内容可能不正确。">
+                <a:extLst>
+                  <a:ext uri="{FF2B5EF4-FFF2-40B4-BE49-F238E27FC236}">
+                    <a16:creationId xmlns:a16="http://schemas.microsoft.com/office/drawing/2014/main" id="{F136372A-0E86-54E6-E88D-FEAC94E8C2AC}"/>
+                  </a:ext>
+                </a:extLst>
+              </p:cNvPr>
+              <p:cNvPicPr>
+                <a:picLocks noChangeAspect="1"/>
+              </p:cNvPicPr>
+              <p:nvPr/>
+            </p:nvPicPr>
+            <p:blipFill>
+              <a:blip r:embed="rId3">
+                <a:extLst>
+                  <a:ext uri="{BEBA8EAE-BF5A-486C-A8C5-ECC9F3942E4B}">
+                    <a14:imgProps xmlns:a14="http://schemas.microsoft.com/office/drawing/2010/main">
+                      <a14:imgLayer r:embed="rId4">
+                        <a14:imgEffect>
+                          <a14:backgroundRemoval t="10000" b="90000" l="10000" r="90000">
+                            <a14:foregroundMark x1="71250" y1="22917" x2="71250" y2="22917"/>
+                            <a14:foregroundMark x1="85469" y1="77222" x2="85469" y2="77222"/>
+                            <a14:foregroundMark x1="83828" y1="77222" x2="83828" y2="77222"/>
+                            <a14:foregroundMark x1="84453" y1="77083" x2="84453" y2="77083"/>
+                            <a14:foregroundMark x1="86719" y1="77083" x2="86719" y2="77083"/>
+                            <a14:foregroundMark x1="82813" y1="76250" x2="82813" y2="76250"/>
+                            <a14:foregroundMark x1="81172" y1="79583" x2="81172" y2="79583"/>
+                            <a14:foregroundMark x1="77891" y1="80694" x2="77891" y2="80694"/>
+                            <a14:foregroundMark x1="80234" y1="80694" x2="80234" y2="80694"/>
+                            <a14:foregroundMark x1="78906" y1="80694" x2="78906" y2="80694"/>
+                            <a14:foregroundMark x1="76406" y1="80694" x2="76406" y2="80694"/>
+                            <a14:foregroundMark x1="74609" y1="80694" x2="74609" y2="80694"/>
+                            <a14:foregroundMark x1="72813" y1="79583" x2="72813" y2="79583"/>
+                            <a14:foregroundMark x1="72813" y1="79583" x2="72813" y2="79583"/>
+                            <a14:foregroundMark x1="73438" y1="80833" x2="73438" y2="80833"/>
+                            <a14:foregroundMark x1="72734" y1="77778" x2="72734" y2="77778"/>
+                            <a14:foregroundMark x1="72891" y1="76528" x2="72891" y2="76528"/>
+                            <a14:foregroundMark x1="28906" y1="75694" x2="28906" y2="75694"/>
+                            <a14:foregroundMark x1="37813" y1="75694" x2="37813" y2="75694"/>
+                            <a14:foregroundMark x1="38438" y1="75694" x2="38438" y2="75694"/>
+                            <a14:foregroundMark x1="42734" y1="75972" x2="42734" y2="75972"/>
+                            <a14:foregroundMark x1="45781" y1="75833" x2="45781" y2="75833"/>
+                            <a14:foregroundMark x1="62813" y1="76111" x2="62813" y2="76111"/>
+                            <a14:foregroundMark x1="66250" y1="75694" x2="66250" y2="75694"/>
+                            <a14:foregroundMark x1="68359" y1="75694" x2="68359" y2="75694"/>
+                            <a14:foregroundMark x1="70391" y1="75833" x2="70391" y2="75833"/>
+                            <a14:foregroundMark x1="64375" y1="75417" x2="64375" y2="75417"/>
+                            <a14:foregroundMark x1="60547" y1="75833" x2="60547" y2="75833"/>
+                            <a14:foregroundMark x1="57734" y1="75833" x2="57734" y2="75833"/>
+                            <a14:foregroundMark x1="55156" y1="75417" x2="55156" y2="75417"/>
+                            <a14:foregroundMark x1="52578" y1="75417" x2="52578" y2="75417"/>
+                            <a14:foregroundMark x1="50938" y1="75694" x2="50938" y2="75694"/>
+                            <a14:foregroundMark x1="48750" y1="75833" x2="48750" y2="75833"/>
+                            <a14:foregroundMark x1="40703" y1="75833" x2="40703" y2="75833"/>
+                            <a14:foregroundMark x1="35625" y1="75417" x2="35625" y2="75417"/>
+                            <a14:foregroundMark x1="32969" y1="75417" x2="32969" y2="75417"/>
+                            <a14:foregroundMark x1="69844" y1="23333" x2="69844" y2="23333"/>
+                            <a14:foregroundMark x1="27109" y1="80972" x2="27109" y2="80972"/>
+                            <a14:foregroundMark x1="25625" y1="80972" x2="25625" y2="80972"/>
+                            <a14:foregroundMark x1="23594" y1="80833" x2="23594" y2="80833"/>
+                            <a14:foregroundMark x1="21563" y1="80556" x2="21563" y2="80556"/>
+                            <a14:foregroundMark x1="22578" y1="80833" x2="22578" y2="80833"/>
+                            <a14:foregroundMark x1="20938" y1="80694" x2="20938" y2="80694"/>
+                            <a14:foregroundMark x1="19766" y1="79722" x2="19766" y2="79722"/>
+                            <a14:foregroundMark x1="19063" y1="77361" x2="19063" y2="77361"/>
+                            <a14:foregroundMark x1="17109" y1="76944" x2="17109" y2="76944"/>
+                            <a14:foregroundMark x1="15234" y1="77500" x2="15234" y2="77500"/>
+                            <a14:foregroundMark x1="12422" y1="67917" x2="12422" y2="67917"/>
+                            <a14:foregroundMark x1="12266" y1="70139" x2="12266" y2="70139"/>
+                            <a14:foregroundMark x1="12188" y1="58889" x2="12188" y2="58889"/>
+                            <a14:foregroundMark x1="12266" y1="61250" x2="12266" y2="61250"/>
+                            <a14:foregroundMark x1="12500" y1="44306" x2="12500" y2="44306"/>
+                            <a14:foregroundMark x1="12656" y1="36667" x2="12656" y2="36667"/>
+                            <a14:foregroundMark x1="12422" y1="28750" x2="12422" y2="28750"/>
+                            <a14:foregroundMark x1="13203" y1="22361" x2="13203" y2="22361"/>
+                            <a14:foregroundMark x1="13438" y1="73611" x2="13438" y2="73611"/>
+                            <a14:foregroundMark x1="88125" y1="72778" x2="88125" y2="72778"/>
+                            <a14:foregroundMark x1="88125" y1="72083" x2="88125" y2="72083"/>
+                            <a14:foregroundMark x1="88047" y1="73056" x2="88047" y2="73056"/>
+                          </a14:backgroundRemoval>
+                        </a14:imgEffect>
+                      </a14:imgLayer>
+                    </a14:imgProps>
+                  </a:ext>
+                  <a:ext uri="{28A0092B-C50C-407E-A947-70E740481C1C}">
+                    <a14:useLocalDpi xmlns:a14="http://schemas.microsoft.com/office/drawing/2010/main" val="0"/>
+                  </a:ext>
+                </a:extLst>
+              </a:blip>
+              <a:srcRect l="34993" t="18054" r="31739" b="18730"/>
+              <a:stretch>
+                <a:fillRect/>
+              </a:stretch>
+            </p:blipFill>
+            <p:spPr>
+              <a:xfrm>
+                <a:off x="8526780" y="4537540"/>
+                <a:ext cx="1684020" cy="1800000"/>
+              </a:xfrm>
+              <a:prstGeom prst="rect">
+                <a:avLst/>
+              </a:prstGeom>
+            </p:spPr>
+          </p:pic>
+        </p:grpSp>
+        <p:pic>
+          <p:nvPicPr>
+            <p:cNvPr id="6" name="图片 5" descr="文本, 信件&#10;&#10;AI 生成的内容可能不正确。">
+              <a:extLst>
+                <a:ext uri="{FF2B5EF4-FFF2-40B4-BE49-F238E27FC236}">
+                  <a16:creationId xmlns:a16="http://schemas.microsoft.com/office/drawing/2014/main" id="{8528ACF6-8848-F463-4405-D482C383EBBE}"/>
+                </a:ext>
+              </a:extLst>
+            </p:cNvPr>
+            <p:cNvPicPr>
+              <a:picLocks noChangeAspect="1"/>
+            </p:cNvPicPr>
+            <p:nvPr/>
+          </p:nvPicPr>
+          <p:blipFill>
+            <a:blip r:embed="rId5">
+              <a:extLst>
+                <a:ext uri="{BEBA8EAE-BF5A-486C-A8C5-ECC9F3942E4B}">
+                  <a14:imgProps xmlns:a14="http://schemas.microsoft.com/office/drawing/2010/main">
+                    <a14:imgLayer r:embed="rId6">
+                      <a14:imgEffect>
+                        <a14:backgroundRemoval t="40549" b="50440" l="19401" r="83464">
+                          <a14:foregroundMark x1="19466" y1="46923" x2="19466" y2="46923"/>
+                          <a14:foregroundMark x1="24870" y1="42454" x2="24870" y2="42454"/>
+                          <a14:foregroundMark x1="32552" y1="47326" x2="32552" y2="47326"/>
+                          <a14:foregroundMark x1="33268" y1="47253" x2="33268" y2="47253"/>
+                          <a14:foregroundMark x1="38542" y1="43553" x2="38542" y2="43553"/>
+                          <a14:foregroundMark x1="41797" y1="46044" x2="41797" y2="46044"/>
+                          <a14:foregroundMark x1="45964" y1="42821" x2="45964" y2="42821"/>
+                          <a14:foregroundMark x1="49479" y1="46264" x2="49479" y2="46264"/>
+                          <a14:foregroundMark x1="55339" y1="46264" x2="55339" y2="46264"/>
+                          <a14:foregroundMark x1="53451" y1="47326" x2="53451" y2="47326"/>
+                          <a14:foregroundMark x1="55599" y1="43297" x2="55599" y2="43297"/>
+                          <a14:foregroundMark x1="60286" y1="44176" x2="60286" y2="44176"/>
+                          <a14:foregroundMark x1="61133" y1="45971" x2="61133" y2="45971"/>
+                          <a14:foregroundMark x1="64128" y1="45971" x2="64128" y2="45971"/>
+                          <a14:foregroundMark x1="64128" y1="49560" x2="64128" y2="49560"/>
+                          <a14:foregroundMark x1="72070" y1="44212" x2="72070" y2="44212"/>
+                          <a14:foregroundMark x1="79362" y1="43773" x2="79362" y2="43773"/>
+                          <a14:foregroundMark x1="83464" y1="48608" x2="83464" y2="48608"/>
+                          <a14:foregroundMark x1="82487" y1="41648" x2="82487" y2="41648"/>
+                        </a14:backgroundRemoval>
+                      </a14:imgEffect>
+                    </a14:imgLayer>
+                  </a14:imgProps>
+                </a:ext>
+                <a:ext uri="{28A0092B-C50C-407E-A947-70E740481C1C}">
+                  <a14:useLocalDpi xmlns:a14="http://schemas.microsoft.com/office/drawing/2010/main" val="0"/>
+                </a:ext>
+              </a:extLst>
+            </a:blip>
+            <a:srcRect l="13600" t="39365" r="65715" b="48299"/>
+            <a:stretch>
+              <a:fillRect/>
+            </a:stretch>
+          </p:blipFill>
+          <p:spPr>
+            <a:xfrm>
+              <a:off x="2692350" y="4863117"/>
+              <a:ext cx="1071723" cy="1135964"/>
+            </a:xfrm>
+            <a:prstGeom prst="rect">
+              <a:avLst/>
+            </a:prstGeom>
+          </p:spPr>
+        </p:pic>
+        <p:pic>
+          <p:nvPicPr>
+            <p:cNvPr id="7" name="图片 6" descr="文本, 信件&#10;&#10;AI 生成的内容可能不正确。">
+              <a:extLst>
+                <a:ext uri="{FF2B5EF4-FFF2-40B4-BE49-F238E27FC236}">
+                  <a16:creationId xmlns:a16="http://schemas.microsoft.com/office/drawing/2014/main" id="{BFA80EC1-0B15-275F-340D-064339A3F693}"/>
+                </a:ext>
+              </a:extLst>
+            </p:cNvPr>
+            <p:cNvPicPr>
+              <a:picLocks noChangeAspect="1"/>
+            </p:cNvPicPr>
+            <p:nvPr/>
+          </p:nvPicPr>
+          <p:blipFill>
+            <a:blip r:embed="rId5">
+              <a:extLst>
+                <a:ext uri="{BEBA8EAE-BF5A-486C-A8C5-ECC9F3942E4B}">
+                  <a14:imgProps xmlns:a14="http://schemas.microsoft.com/office/drawing/2010/main">
+                    <a14:imgLayer r:embed="rId6">
+                      <a14:imgEffect>
+                        <a14:backgroundRemoval t="40549" b="50440" l="19401" r="83464">
+                          <a14:foregroundMark x1="19466" y1="46923" x2="19466" y2="46923"/>
+                          <a14:foregroundMark x1="24870" y1="42454" x2="24870" y2="42454"/>
+                          <a14:foregroundMark x1="32552" y1="47326" x2="32552" y2="47326"/>
+                          <a14:foregroundMark x1="33268" y1="47253" x2="33268" y2="47253"/>
+                          <a14:foregroundMark x1="38542" y1="43553" x2="38542" y2="43553"/>
+                          <a14:foregroundMark x1="41797" y1="46044" x2="41797" y2="46044"/>
+                          <a14:foregroundMark x1="45964" y1="42821" x2="45964" y2="42821"/>
+                          <a14:foregroundMark x1="49479" y1="46264" x2="49479" y2="46264"/>
+                          <a14:foregroundMark x1="55339" y1="46264" x2="55339" y2="46264"/>
+                          <a14:foregroundMark x1="53451" y1="47326" x2="53451" y2="47326"/>
+                          <a14:foregroundMark x1="55599" y1="43297" x2="55599" y2="43297"/>
+                          <a14:foregroundMark x1="60286" y1="44176" x2="60286" y2="44176"/>
+                          <a14:foregroundMark x1="61133" y1="45971" x2="61133" y2="45971"/>
+                          <a14:foregroundMark x1="64128" y1="45971" x2="64128" y2="45971"/>
+                          <a14:foregroundMark x1="64128" y1="49560" x2="64128" y2="49560"/>
+                          <a14:foregroundMark x1="72070" y1="44212" x2="72070" y2="44212"/>
+                          <a14:foregroundMark x1="79362" y1="43773" x2="79362" y2="43773"/>
+                          <a14:foregroundMark x1="83464" y1="48608" x2="83464" y2="48608"/>
+                          <a14:foregroundMark x1="82487" y1="41648" x2="82487" y2="41648"/>
+                        </a14:backgroundRemoval>
+                      </a14:imgEffect>
+                    </a14:imgLayer>
+                  </a14:imgProps>
+                </a:ext>
+                <a:ext uri="{28A0092B-C50C-407E-A947-70E740481C1C}">
+                  <a14:useLocalDpi xmlns:a14="http://schemas.microsoft.com/office/drawing/2010/main" val="0"/>
+                </a:ext>
+              </a:extLst>
+            </a:blip>
+            <a:srcRect l="33924" t="39365" r="48547" b="48299"/>
+            <a:stretch>
+              <a:fillRect/>
+            </a:stretch>
+          </p:blipFill>
+          <p:spPr>
+            <a:xfrm>
+              <a:off x="4747466" y="4869558"/>
+              <a:ext cx="908180" cy="1135964"/>
+            </a:xfrm>
+            <a:prstGeom prst="rect">
+              <a:avLst/>
+            </a:prstGeom>
+          </p:spPr>
+        </p:pic>
+        <p:pic>
+          <p:nvPicPr>
+            <p:cNvPr id="8" name="图片 7" descr="文本, 信件&#10;&#10;AI 生成的内容可能不正确。">
+              <a:extLst>
+                <a:ext uri="{FF2B5EF4-FFF2-40B4-BE49-F238E27FC236}">
+                  <a16:creationId xmlns:a16="http://schemas.microsoft.com/office/drawing/2014/main" id="{17AC6382-831C-E169-0AAF-36D517F4A25B}"/>
+                </a:ext>
+              </a:extLst>
+            </p:cNvPr>
+            <p:cNvPicPr>
+              <a:picLocks noChangeAspect="1"/>
+            </p:cNvPicPr>
+            <p:nvPr/>
+          </p:nvPicPr>
+          <p:blipFill>
+            <a:blip r:embed="rId5">
+              <a:extLst>
+                <a:ext uri="{BEBA8EAE-BF5A-486C-A8C5-ECC9F3942E4B}">
+                  <a14:imgProps xmlns:a14="http://schemas.microsoft.com/office/drawing/2010/main">
+                    <a14:imgLayer r:embed="rId6">
+                      <a14:imgEffect>
+                        <a14:backgroundRemoval t="40549" b="50440" l="19401" r="83464">
+                          <a14:foregroundMark x1="19466" y1="46923" x2="19466" y2="46923"/>
+                          <a14:foregroundMark x1="24870" y1="42454" x2="24870" y2="42454"/>
+                          <a14:foregroundMark x1="32552" y1="47326" x2="32552" y2="47326"/>
+                          <a14:foregroundMark x1="33268" y1="47253" x2="33268" y2="47253"/>
+                          <a14:foregroundMark x1="38542" y1="43553" x2="38542" y2="43553"/>
+                          <a14:foregroundMark x1="41797" y1="46044" x2="41797" y2="46044"/>
+                          <a14:foregroundMark x1="45964" y1="42821" x2="45964" y2="42821"/>
+                          <a14:foregroundMark x1="49479" y1="46264" x2="49479" y2="46264"/>
+                          <a14:foregroundMark x1="55339" y1="46264" x2="55339" y2="46264"/>
+                          <a14:foregroundMark x1="53451" y1="47326" x2="53451" y2="47326"/>
+                          <a14:foregroundMark x1="55599" y1="43297" x2="55599" y2="43297"/>
+                          <a14:foregroundMark x1="60286" y1="44176" x2="60286" y2="44176"/>
+                          <a14:foregroundMark x1="61133" y1="45971" x2="61133" y2="45971"/>
+                          <a14:foregroundMark x1="64128" y1="45971" x2="64128" y2="45971"/>
+                          <a14:foregroundMark x1="64128" y1="49560" x2="64128" y2="49560"/>
+                          <a14:foregroundMark x1="72070" y1="44212" x2="72070" y2="44212"/>
+                          <a14:foregroundMark x1="79362" y1="43773" x2="79362" y2="43773"/>
+                          <a14:foregroundMark x1="83464" y1="48608" x2="83464" y2="48608"/>
+                          <a14:foregroundMark x1="82487" y1="41648" x2="82487" y2="41648"/>
+                        </a14:backgroundRemoval>
+                      </a14:imgEffect>
+                    </a14:imgLayer>
+                  </a14:imgProps>
+                </a:ext>
+                <a:ext uri="{28A0092B-C50C-407E-A947-70E740481C1C}">
+                  <a14:useLocalDpi xmlns:a14="http://schemas.microsoft.com/office/drawing/2010/main" val="0"/>
+                </a:ext>
+              </a:extLst>
+            </a:blip>
+            <a:srcRect l="50742" t="39365" r="32456" b="48299"/>
+            <a:stretch>
+              <a:fillRect/>
+            </a:stretch>
+          </p:blipFill>
+          <p:spPr>
+            <a:xfrm>
+              <a:off x="6626445" y="4863117"/>
+              <a:ext cx="870546" cy="1135964"/>
+            </a:xfrm>
+            <a:prstGeom prst="rect">
+              <a:avLst/>
+            </a:prstGeom>
+          </p:spPr>
+        </p:pic>
+        <p:pic>
+          <p:nvPicPr>
+            <p:cNvPr id="9" name="图片 8" descr="文本, 信件&#10;&#10;AI 生成的内容可能不正确。">
+              <a:extLst>
+                <a:ext uri="{FF2B5EF4-FFF2-40B4-BE49-F238E27FC236}">
+                  <a16:creationId xmlns:a16="http://schemas.microsoft.com/office/drawing/2014/main" id="{5202E943-1F73-C13A-1D0F-7B7B19F56044}"/>
+                </a:ext>
+              </a:extLst>
+            </p:cNvPr>
+            <p:cNvPicPr>
+              <a:picLocks noChangeAspect="1"/>
+            </p:cNvPicPr>
+            <p:nvPr/>
+          </p:nvPicPr>
+          <p:blipFill>
+            <a:blip r:embed="rId5">
+              <a:extLst>
+                <a:ext uri="{BEBA8EAE-BF5A-486C-A8C5-ECC9F3942E4B}">
+                  <a14:imgProps xmlns:a14="http://schemas.microsoft.com/office/drawing/2010/main">
+                    <a14:imgLayer r:embed="rId6">
+                      <a14:imgEffect>
+                        <a14:backgroundRemoval t="40549" b="50440" l="19401" r="83464">
+                          <a14:foregroundMark x1="19466" y1="46923" x2="19466" y2="46923"/>
+                          <a14:foregroundMark x1="24870" y1="42454" x2="24870" y2="42454"/>
+                          <a14:foregroundMark x1="32552" y1="47326" x2="32552" y2="47326"/>
+                          <a14:foregroundMark x1="33268" y1="47253" x2="33268" y2="47253"/>
+                          <a14:foregroundMark x1="38542" y1="43553" x2="38542" y2="43553"/>
+                          <a14:foregroundMark x1="41797" y1="46044" x2="41797" y2="46044"/>
+                          <a14:foregroundMark x1="45964" y1="42821" x2="45964" y2="42821"/>
+                          <a14:foregroundMark x1="49479" y1="46264" x2="49479" y2="46264"/>
+                          <a14:foregroundMark x1="55339" y1="46264" x2="55339" y2="46264"/>
+                          <a14:foregroundMark x1="53451" y1="47326" x2="53451" y2="47326"/>
+                          <a14:foregroundMark x1="55599" y1="43297" x2="55599" y2="43297"/>
+                          <a14:foregroundMark x1="60286" y1="44176" x2="60286" y2="44176"/>
+                          <a14:foregroundMark x1="61133" y1="45971" x2="61133" y2="45971"/>
+                          <a14:foregroundMark x1="64128" y1="45971" x2="64128" y2="45971"/>
+                          <a14:foregroundMark x1="64128" y1="49560" x2="64128" y2="49560"/>
+                          <a14:foregroundMark x1="72070" y1="44212" x2="72070" y2="44212"/>
+                          <a14:foregroundMark x1="79362" y1="43773" x2="79362" y2="43773"/>
+                          <a14:foregroundMark x1="83464" y1="48608" x2="83464" y2="48608"/>
+                          <a14:foregroundMark x1="82487" y1="41648" x2="82487" y2="41648"/>
+                        </a14:backgroundRemoval>
+                      </a14:imgEffect>
+                    </a14:imgLayer>
+                  </a14:imgProps>
+                </a:ext>
+                <a:ext uri="{28A0092B-C50C-407E-A947-70E740481C1C}">
+                  <a14:useLocalDpi xmlns:a14="http://schemas.microsoft.com/office/drawing/2010/main" val="0"/>
+                </a:ext>
+              </a:extLst>
+            </a:blip>
+            <a:srcRect l="67192" t="39365" r="12116" b="48299"/>
+            <a:stretch>
+              <a:fillRect/>
+            </a:stretch>
+          </p:blipFill>
+          <p:spPr>
+            <a:xfrm>
+              <a:off x="8386925" y="4863117"/>
+              <a:ext cx="1072094" cy="1135964"/>
+            </a:xfrm>
+            <a:prstGeom prst="rect">
+              <a:avLst/>
+            </a:prstGeom>
+          </p:spPr>
+        </p:pic>
+      </p:grpSp>
+      <p:grpSp>
+        <p:nvGrpSpPr>
+          <p:cNvPr id="2" name="组合 1">
+            <a:extLst>
+              <a:ext uri="{FF2B5EF4-FFF2-40B4-BE49-F238E27FC236}">
+                <a16:creationId xmlns:a16="http://schemas.microsoft.com/office/drawing/2014/main" id="{36EAD26A-A0CB-268B-86ED-6A44F007BD2E}"/>
+              </a:ext>
+            </a:extLst>
+          </p:cNvPr>
+          <p:cNvGrpSpPr/>
+          <p:nvPr/>
+        </p:nvGrpSpPr>
+        <p:grpSpPr>
+          <a:xfrm>
+            <a:off x="623149" y="4574642"/>
+            <a:ext cx="10558790" cy="1807620"/>
+            <a:chOff x="724103" y="4531099"/>
+            <a:chExt cx="10558790" cy="1807620"/>
+          </a:xfrm>
+        </p:grpSpPr>
+        <p:grpSp>
+          <p:nvGrpSpPr>
+            <p:cNvPr id="3" name="组合 2">
+              <a:extLst>
+                <a:ext uri="{FF2B5EF4-FFF2-40B4-BE49-F238E27FC236}">
+                  <a16:creationId xmlns:a16="http://schemas.microsoft.com/office/drawing/2014/main" id="{AD1BC952-6D70-8847-FBAA-A5A87602D498}"/>
+                </a:ext>
+              </a:extLst>
+            </p:cNvPr>
+            <p:cNvGrpSpPr/>
+            <p:nvPr/>
+          </p:nvGrpSpPr>
+          <p:grpSpPr>
+            <a:xfrm>
+              <a:off x="724103" y="4531099"/>
+              <a:ext cx="10558790" cy="1807620"/>
+              <a:chOff x="724103" y="4531099"/>
+              <a:chExt cx="10558790" cy="1807620"/>
+            </a:xfrm>
+          </p:grpSpPr>
+          <p:pic>
+            <p:nvPicPr>
+              <p:cNvPr id="21" name="图片 20" descr="文本, 白板&#10;&#10;AI 生成的内容可能不正确。">
+                <a:extLst>
+                  <a:ext uri="{FF2B5EF4-FFF2-40B4-BE49-F238E27FC236}">
+                    <a16:creationId xmlns:a16="http://schemas.microsoft.com/office/drawing/2014/main" id="{48C89A20-1CC7-84E7-8BAD-3E7D131C6260}"/>
+                  </a:ext>
+                </a:extLst>
+              </p:cNvPr>
+              <p:cNvPicPr>
+                <a:picLocks noChangeAspect="1"/>
+              </p:cNvPicPr>
+              <p:nvPr/>
+            </p:nvPicPr>
+            <p:blipFill>
+              <a:blip r:embed="rId3">
+                <a:extLst>
+                  <a:ext uri="{BEBA8EAE-BF5A-486C-A8C5-ECC9F3942E4B}">
+                    <a14:imgProps xmlns:a14="http://schemas.microsoft.com/office/drawing/2010/main">
+                      <a14:imgLayer r:embed="rId4">
+                        <a14:imgEffect>
+                          <a14:backgroundRemoval t="10000" b="90000" l="10000" r="90000">
+                            <a14:foregroundMark x1="71250" y1="22917" x2="71250" y2="22917"/>
+                            <a14:foregroundMark x1="85469" y1="77222" x2="85469" y2="77222"/>
+                            <a14:foregroundMark x1="83828" y1="77222" x2="83828" y2="77222"/>
+                            <a14:foregroundMark x1="84453" y1="77083" x2="84453" y2="77083"/>
+                            <a14:foregroundMark x1="86719" y1="77083" x2="86719" y2="77083"/>
+                            <a14:foregroundMark x1="82813" y1="76250" x2="82813" y2="76250"/>
+                            <a14:foregroundMark x1="81172" y1="79583" x2="81172" y2="79583"/>
+                            <a14:foregroundMark x1="77891" y1="80694" x2="77891" y2="80694"/>
+                            <a14:foregroundMark x1="80234" y1="80694" x2="80234" y2="80694"/>
+                            <a14:foregroundMark x1="78906" y1="80694" x2="78906" y2="80694"/>
+                            <a14:foregroundMark x1="76406" y1="80694" x2="76406" y2="80694"/>
+                            <a14:foregroundMark x1="74609" y1="80694" x2="74609" y2="80694"/>
+                            <a14:foregroundMark x1="72813" y1="79583" x2="72813" y2="79583"/>
+                            <a14:foregroundMark x1="72813" y1="79583" x2="72813" y2="79583"/>
+                            <a14:foregroundMark x1="73438" y1="80833" x2="73438" y2="80833"/>
+                            <a14:foregroundMark x1="72734" y1="77778" x2="72734" y2="77778"/>
+                            <a14:foregroundMark x1="72891" y1="76528" x2="72891" y2="76528"/>
+                            <a14:foregroundMark x1="28906" y1="75694" x2="28906" y2="75694"/>
+                            <a14:foregroundMark x1="37813" y1="75694" x2="37813" y2="75694"/>
+                            <a14:foregroundMark x1="38438" y1="75694" x2="38438" y2="75694"/>
+                            <a14:foregroundMark x1="42734" y1="75972" x2="42734" y2="75972"/>
+                            <a14:foregroundMark x1="45781" y1="75833" x2="45781" y2="75833"/>
+                            <a14:foregroundMark x1="62813" y1="76111" x2="62813" y2="76111"/>
+                            <a14:foregroundMark x1="66250" y1="75694" x2="66250" y2="75694"/>
+                            <a14:foregroundMark x1="68359" y1="75694" x2="68359" y2="75694"/>
+                            <a14:foregroundMark x1="70391" y1="75833" x2="70391" y2="75833"/>
+                            <a14:foregroundMark x1="64375" y1="75417" x2="64375" y2="75417"/>
+                            <a14:foregroundMark x1="60547" y1="75833" x2="60547" y2="75833"/>
+                            <a14:foregroundMark x1="57734" y1="75833" x2="57734" y2="75833"/>
+                            <a14:foregroundMark x1="55156" y1="75417" x2="55156" y2="75417"/>
+                            <a14:foregroundMark x1="52578" y1="75417" x2="52578" y2="75417"/>
+                            <a14:foregroundMark x1="50938" y1="75694" x2="50938" y2="75694"/>
+                            <a14:foregroundMark x1="48750" y1="75833" x2="48750" y2="75833"/>
+                            <a14:foregroundMark x1="40703" y1="75833" x2="40703" y2="75833"/>
+                            <a14:foregroundMark x1="35625" y1="75417" x2="35625" y2="75417"/>
+                            <a14:foregroundMark x1="32969" y1="75417" x2="32969" y2="75417"/>
+                            <a14:foregroundMark x1="69844" y1="23333" x2="69844" y2="23333"/>
+                            <a14:foregroundMark x1="27109" y1="80972" x2="27109" y2="80972"/>
+                            <a14:foregroundMark x1="25625" y1="80972" x2="25625" y2="80972"/>
+                            <a14:foregroundMark x1="23594" y1="80833" x2="23594" y2="80833"/>
+                            <a14:foregroundMark x1="21563" y1="80556" x2="21563" y2="80556"/>
+                            <a14:foregroundMark x1="22578" y1="80833" x2="22578" y2="80833"/>
+                            <a14:foregroundMark x1="20938" y1="80694" x2="20938" y2="80694"/>
+                            <a14:foregroundMark x1="19766" y1="79722" x2="19766" y2="79722"/>
+                            <a14:foregroundMark x1="19063" y1="77361" x2="19063" y2="77361"/>
+                            <a14:foregroundMark x1="17109" y1="76944" x2="17109" y2="76944"/>
+                            <a14:foregroundMark x1="15234" y1="77500" x2="15234" y2="77500"/>
+                            <a14:foregroundMark x1="12422" y1="67917" x2="12422" y2="67917"/>
+                            <a14:foregroundMark x1="12266" y1="70139" x2="12266" y2="70139"/>
+                            <a14:foregroundMark x1="12188" y1="58889" x2="12188" y2="58889"/>
+                            <a14:foregroundMark x1="12266" y1="61250" x2="12266" y2="61250"/>
+                            <a14:foregroundMark x1="12500" y1="44306" x2="12500" y2="44306"/>
+                            <a14:foregroundMark x1="12656" y1="36667" x2="12656" y2="36667"/>
+                            <a14:foregroundMark x1="12422" y1="28750" x2="12422" y2="28750"/>
+                            <a14:foregroundMark x1="13203" y1="22361" x2="13203" y2="22361"/>
+                            <a14:foregroundMark x1="13438" y1="73611" x2="13438" y2="73611"/>
+                            <a14:foregroundMark x1="88125" y1="72778" x2="88125" y2="72778"/>
+                            <a14:foregroundMark x1="88125" y1="72083" x2="88125" y2="72083"/>
+                            <a14:foregroundMark x1="88047" y1="73056" x2="88047" y2="73056"/>
+                          </a14:backgroundRemoval>
+                        </a14:imgEffect>
+                      </a14:imgLayer>
+                    </a14:imgProps>
+                  </a:ext>
+                  <a:ext uri="{28A0092B-C50C-407E-A947-70E740481C1C}">
+                    <a14:useLocalDpi xmlns:a14="http://schemas.microsoft.com/office/drawing/2010/main" val="0"/>
+                  </a:ext>
+                </a:extLst>
+              </a:blip>
+              <a:srcRect l="11815" t="18054" r="67005" b="18730"/>
+              <a:stretch>
+                <a:fillRect/>
+              </a:stretch>
+            </p:blipFill>
+            <p:spPr>
+              <a:xfrm>
+                <a:off x="724103" y="4531099"/>
+                <a:ext cx="1072093" cy="1800000"/>
+              </a:xfrm>
+              <a:prstGeom prst="rect">
+                <a:avLst/>
+              </a:prstGeom>
+            </p:spPr>
+          </p:pic>
+          <p:pic>
+            <p:nvPicPr>
+              <p:cNvPr id="22" name="图片 21" descr="文本, 白板&#10;&#10;AI 生成的内容可能不正确。">
+                <a:extLst>
+                  <a:ext uri="{FF2B5EF4-FFF2-40B4-BE49-F238E27FC236}">
+                    <a16:creationId xmlns:a16="http://schemas.microsoft.com/office/drawing/2014/main" id="{1A8807D4-E57F-FF77-846B-A9A56CCD7EE9}"/>
+                  </a:ext>
+                </a:extLst>
+              </p:cNvPr>
+              <p:cNvPicPr>
+                <a:picLocks noChangeAspect="1"/>
+              </p:cNvPicPr>
+              <p:nvPr/>
+            </p:nvPicPr>
+            <p:blipFill>
+              <a:blip r:embed="rId3">
+                <a:extLst>
+                  <a:ext uri="{BEBA8EAE-BF5A-486C-A8C5-ECC9F3942E4B}">
+                    <a14:imgProps xmlns:a14="http://schemas.microsoft.com/office/drawing/2010/main">
+                      <a14:imgLayer r:embed="rId4">
+                        <a14:imgEffect>
+                          <a14:backgroundRemoval t="10000" b="90000" l="10000" r="90000">
+                            <a14:foregroundMark x1="71250" y1="22917" x2="71250" y2="22917"/>
+                            <a14:foregroundMark x1="85469" y1="77222" x2="85469" y2="77222"/>
+                            <a14:foregroundMark x1="83828" y1="77222" x2="83828" y2="77222"/>
+                            <a14:foregroundMark x1="84453" y1="77083" x2="84453" y2="77083"/>
+                            <a14:foregroundMark x1="86719" y1="77083" x2="86719" y2="77083"/>
+                            <a14:foregroundMark x1="82813" y1="76250" x2="82813" y2="76250"/>
+                            <a14:foregroundMark x1="81172" y1="79583" x2="81172" y2="79583"/>
+                            <a14:foregroundMark x1="77891" y1="80694" x2="77891" y2="80694"/>
+                            <a14:foregroundMark x1="80234" y1="80694" x2="80234" y2="80694"/>
+                            <a14:foregroundMark x1="78906" y1="80694" x2="78906" y2="80694"/>
+                            <a14:foregroundMark x1="76406" y1="80694" x2="76406" y2="80694"/>
+                            <a14:foregroundMark x1="74609" y1="80694" x2="74609" y2="80694"/>
+                            <a14:foregroundMark x1="72813" y1="79583" x2="72813" y2="79583"/>
+                            <a14:foregroundMark x1="72813" y1="79583" x2="72813" y2="79583"/>
+                            <a14:foregroundMark x1="73438" y1="80833" x2="73438" y2="80833"/>
+                            <a14:foregroundMark x1="72734" y1="77778" x2="72734" y2="77778"/>
+                            <a14:foregroundMark x1="72891" y1="76528" x2="72891" y2="76528"/>
+                            <a14:foregroundMark x1="28906" y1="75694" x2="28906" y2="75694"/>
+                            <a14:foregroundMark x1="37813" y1="75694" x2="37813" y2="75694"/>
+                            <a14:foregroundMark x1="38438" y1="75694" x2="38438" y2="75694"/>
+                            <a14:foregroundMark x1="42734" y1="75972" x2="42734" y2="75972"/>
+                            <a14:foregroundMark x1="45781" y1="75833" x2="45781" y2="75833"/>
+                            <a14:foregroundMark x1="62813" y1="76111" x2="62813" y2="76111"/>
+                            <a14:foregroundMark x1="66250" y1="75694" x2="66250" y2="75694"/>
+                            <a14:foregroundMark x1="68359" y1="75694" x2="68359" y2="75694"/>
+                            <a14:foregroundMark x1="70391" y1="75833" x2="70391" y2="75833"/>
+                            <a14:foregroundMark x1="64375" y1="75417" x2="64375" y2="75417"/>
+                            <a14:foregroundMark x1="60547" y1="75833" x2="60547" y2="75833"/>
+                            <a14:foregroundMark x1="57734" y1="75833" x2="57734" y2="75833"/>
+                            <a14:foregroundMark x1="55156" y1="75417" x2="55156" y2="75417"/>
+                            <a14:foregroundMark x1="52578" y1="75417" x2="52578" y2="75417"/>
+                            <a14:foregroundMark x1="50938" y1="75694" x2="50938" y2="75694"/>
+                            <a14:foregroundMark x1="48750" y1="75833" x2="48750" y2="75833"/>
+                            <a14:foregroundMark x1="40703" y1="75833" x2="40703" y2="75833"/>
+                            <a14:foregroundMark x1="35625" y1="75417" x2="35625" y2="75417"/>
+                            <a14:foregroundMark x1="32969" y1="75417" x2="32969" y2="75417"/>
+                            <a14:foregroundMark x1="69844" y1="23333" x2="69844" y2="23333"/>
+                            <a14:foregroundMark x1="27109" y1="80972" x2="27109" y2="80972"/>
+                            <a14:foregroundMark x1="25625" y1="80972" x2="25625" y2="80972"/>
+                            <a14:foregroundMark x1="23594" y1="80833" x2="23594" y2="80833"/>
+                            <a14:foregroundMark x1="21563" y1="80556" x2="21563" y2="80556"/>
+                            <a14:foregroundMark x1="22578" y1="80833" x2="22578" y2="80833"/>
+                            <a14:foregroundMark x1="20938" y1="80694" x2="20938" y2="80694"/>
+                            <a14:foregroundMark x1="19766" y1="79722" x2="19766" y2="79722"/>
+                            <a14:foregroundMark x1="19063" y1="77361" x2="19063" y2="77361"/>
+                            <a14:foregroundMark x1="17109" y1="76944" x2="17109" y2="76944"/>
+                            <a14:foregroundMark x1="15234" y1="77500" x2="15234" y2="77500"/>
+                            <a14:foregroundMark x1="12422" y1="67917" x2="12422" y2="67917"/>
+                            <a14:foregroundMark x1="12266" y1="70139" x2="12266" y2="70139"/>
+                            <a14:foregroundMark x1="12188" y1="58889" x2="12188" y2="58889"/>
+                            <a14:foregroundMark x1="12266" y1="61250" x2="12266" y2="61250"/>
+                            <a14:foregroundMark x1="12500" y1="44306" x2="12500" y2="44306"/>
+                            <a14:foregroundMark x1="12656" y1="36667" x2="12656" y2="36667"/>
+                            <a14:foregroundMark x1="12422" y1="28750" x2="12422" y2="28750"/>
+                            <a14:foregroundMark x1="13203" y1="22361" x2="13203" y2="22361"/>
+                            <a14:foregroundMark x1="13438" y1="73611" x2="13438" y2="73611"/>
+                            <a14:foregroundMark x1="88125" y1="72778" x2="88125" y2="72778"/>
+                            <a14:foregroundMark x1="88125" y1="72083" x2="88125" y2="72083"/>
+                            <a14:foregroundMark x1="88047" y1="73056" x2="88047" y2="73056"/>
+                          </a14:backgroundRemoval>
+                        </a14:imgEffect>
+                      </a14:imgLayer>
+                    </a14:imgProps>
+                  </a:ext>
+                  <a:ext uri="{28A0092B-C50C-407E-A947-70E740481C1C}">
+                    <a14:useLocalDpi xmlns:a14="http://schemas.microsoft.com/office/drawing/2010/main" val="0"/>
+                  </a:ext>
+                </a:extLst>
+              </a:blip>
+              <a:srcRect l="67509" t="18054" r="11312" b="18730"/>
+              <a:stretch>
+                <a:fillRect/>
+              </a:stretch>
+            </p:blipFill>
+            <p:spPr>
+              <a:xfrm>
+                <a:off x="10210800" y="4537540"/>
+                <a:ext cx="1072093" cy="1800000"/>
+              </a:xfrm>
+              <a:prstGeom prst="rect">
+                <a:avLst/>
+              </a:prstGeom>
+            </p:spPr>
+          </p:pic>
+          <p:pic>
+            <p:nvPicPr>
+              <p:cNvPr id="23" name="图片 22" descr="文本, 白板&#10;&#10;AI 生成的内容可能不正确。">
+                <a:extLst>
+                  <a:ext uri="{FF2B5EF4-FFF2-40B4-BE49-F238E27FC236}">
+                    <a16:creationId xmlns:a16="http://schemas.microsoft.com/office/drawing/2014/main" id="{9AC7C337-A0E6-5CEA-4F5C-530EB5A12810}"/>
+                  </a:ext>
+                </a:extLst>
+              </p:cNvPr>
+              <p:cNvPicPr>
+                <a:picLocks noChangeAspect="1"/>
+              </p:cNvPicPr>
+              <p:nvPr/>
+            </p:nvPicPr>
+            <p:blipFill>
+              <a:blip r:embed="rId3">
+                <a:extLst>
+                  <a:ext uri="{BEBA8EAE-BF5A-486C-A8C5-ECC9F3942E4B}">
+                    <a14:imgProps xmlns:a14="http://schemas.microsoft.com/office/drawing/2010/main">
+                      <a14:imgLayer r:embed="rId4">
+                        <a14:imgEffect>
+                          <a14:backgroundRemoval t="10000" b="90000" l="10000" r="90000">
+                            <a14:foregroundMark x1="71250" y1="22917" x2="71250" y2="22917"/>
+                            <a14:foregroundMark x1="85469" y1="77222" x2="85469" y2="77222"/>
+                            <a14:foregroundMark x1="83828" y1="77222" x2="83828" y2="77222"/>
+                            <a14:foregroundMark x1="84453" y1="77083" x2="84453" y2="77083"/>
+                            <a14:foregroundMark x1="86719" y1="77083" x2="86719" y2="77083"/>
+                            <a14:foregroundMark x1="82813" y1="76250" x2="82813" y2="76250"/>
+                            <a14:foregroundMark x1="81172" y1="79583" x2="81172" y2="79583"/>
+                            <a14:foregroundMark x1="77891" y1="80694" x2="77891" y2="80694"/>
+                            <a14:foregroundMark x1="80234" y1="80694" x2="80234" y2="80694"/>
+                            <a14:foregroundMark x1="78906" y1="80694" x2="78906" y2="80694"/>
+                            <a14:foregroundMark x1="76406" y1="80694" x2="76406" y2="80694"/>
+                            <a14:foregroundMark x1="74609" y1="80694" x2="74609" y2="80694"/>
+                            <a14:foregroundMark x1="72813" y1="79583" x2="72813" y2="79583"/>
+                            <a14:foregroundMark x1="72813" y1="79583" x2="72813" y2="79583"/>
+                            <a14:foregroundMark x1="73438" y1="80833" x2="73438" y2="80833"/>
+                            <a14:foregroundMark x1="72734" y1="77778" x2="72734" y2="77778"/>
+                            <a14:foregroundMark x1="72891" y1="76528" x2="72891" y2="76528"/>
+                            <a14:foregroundMark x1="28906" y1="75694" x2="28906" y2="75694"/>
+                            <a14:foregroundMark x1="37813" y1="75694" x2="37813" y2="75694"/>
+                            <a14:foregroundMark x1="38438" y1="75694" x2="38438" y2="75694"/>
+                            <a14:foregroundMark x1="42734" y1="75972" x2="42734" y2="75972"/>
+                            <a14:foregroundMark x1="45781" y1="75833" x2="45781" y2="75833"/>
+                            <a14:foregroundMark x1="62813" y1="76111" x2="62813" y2="76111"/>
+                            <a14:foregroundMark x1="66250" y1="75694" x2="66250" y2="75694"/>
+                            <a14:foregroundMark x1="68359" y1="75694" x2="68359" y2="75694"/>
+                            <a14:foregroundMark x1="70391" y1="75833" x2="70391" y2="75833"/>
+                            <a14:foregroundMark x1="64375" y1="75417" x2="64375" y2="75417"/>
+                            <a14:foregroundMark x1="60547" y1="75833" x2="60547" y2="75833"/>
+                            <a14:foregroundMark x1="57734" y1="75833" x2="57734" y2="75833"/>
+                            <a14:foregroundMark x1="55156" y1="75417" x2="55156" y2="75417"/>
+                            <a14:foregroundMark x1="52578" y1="75417" x2="52578" y2="75417"/>
+                            <a14:foregroundMark x1="50938" y1="75694" x2="50938" y2="75694"/>
+                            <a14:foregroundMark x1="48750" y1="75833" x2="48750" y2="75833"/>
+                            <a14:foregroundMark x1="40703" y1="75833" x2="40703" y2="75833"/>
+                            <a14:foregroundMark x1="35625" y1="75417" x2="35625" y2="75417"/>
+                            <a14:foregroundMark x1="32969" y1="75417" x2="32969" y2="75417"/>
+                            <a14:foregroundMark x1="69844" y1="23333" x2="69844" y2="23333"/>
+                            <a14:foregroundMark x1="27109" y1="80972" x2="27109" y2="80972"/>
+                            <a14:foregroundMark x1="25625" y1="80972" x2="25625" y2="80972"/>
+                            <a14:foregroundMark x1="23594" y1="80833" x2="23594" y2="80833"/>
+                            <a14:foregroundMark x1="21563" y1="80556" x2="21563" y2="80556"/>
+                            <a14:foregroundMark x1="22578" y1="80833" x2="22578" y2="80833"/>
+                            <a14:foregroundMark x1="20938" y1="80694" x2="20938" y2="80694"/>
+                            <a14:foregroundMark x1="19766" y1="79722" x2="19766" y2="79722"/>
+                            <a14:foregroundMark x1="19063" y1="77361" x2="19063" y2="77361"/>
+                            <a14:foregroundMark x1="17109" y1="76944" x2="17109" y2="76944"/>
+                            <a14:foregroundMark x1="15234" y1="77500" x2="15234" y2="77500"/>
+                            <a14:foregroundMark x1="12422" y1="67917" x2="12422" y2="67917"/>
+                            <a14:foregroundMark x1="12266" y1="70139" x2="12266" y2="70139"/>
+                            <a14:foregroundMark x1="12188" y1="58889" x2="12188" y2="58889"/>
+                            <a14:foregroundMark x1="12266" y1="61250" x2="12266" y2="61250"/>
+                            <a14:foregroundMark x1="12500" y1="44306" x2="12500" y2="44306"/>
+                            <a14:foregroundMark x1="12656" y1="36667" x2="12656" y2="36667"/>
+                            <a14:foregroundMark x1="12422" y1="28750" x2="12422" y2="28750"/>
+                            <a14:foregroundMark x1="13203" y1="22361" x2="13203" y2="22361"/>
+                            <a14:foregroundMark x1="13438" y1="73611" x2="13438" y2="73611"/>
+                            <a14:foregroundMark x1="88125" y1="72778" x2="88125" y2="72778"/>
+                            <a14:foregroundMark x1="88125" y1="72083" x2="88125" y2="72083"/>
+                            <a14:foregroundMark x1="88047" y1="73056" x2="88047" y2="73056"/>
+                          </a14:backgroundRemoval>
+                        </a14:imgEffect>
+                      </a14:imgLayer>
+                    </a14:imgProps>
+                  </a:ext>
+                  <a:ext uri="{28A0092B-C50C-407E-A947-70E740481C1C}">
+                    <a14:useLocalDpi xmlns:a14="http://schemas.microsoft.com/office/drawing/2010/main" val="0"/>
+                  </a:ext>
+                </a:extLst>
+              </a:blip>
+              <a:srcRect l="34993" t="18054" r="31739" b="18730"/>
+              <a:stretch>
+                <a:fillRect/>
+              </a:stretch>
+            </p:blipFill>
+            <p:spPr>
+              <a:xfrm>
+                <a:off x="1790700" y="4537540"/>
+                <a:ext cx="1684020" cy="1800000"/>
+              </a:xfrm>
+              <a:prstGeom prst="rect">
+                <a:avLst/>
+              </a:prstGeom>
+            </p:spPr>
+          </p:pic>
+          <p:pic>
+            <p:nvPicPr>
+              <p:cNvPr id="24" name="图片 23" descr="文本, 白板&#10;&#10;AI 生成的内容可能不正确。">
+                <a:extLst>
+                  <a:ext uri="{FF2B5EF4-FFF2-40B4-BE49-F238E27FC236}">
+                    <a16:creationId xmlns:a16="http://schemas.microsoft.com/office/drawing/2014/main" id="{35F44C77-76A1-5C68-21E4-8A295AAAE7DD}"/>
+                  </a:ext>
+                </a:extLst>
+              </p:cNvPr>
+              <p:cNvPicPr>
+                <a:picLocks noChangeAspect="1"/>
+              </p:cNvPicPr>
+              <p:nvPr/>
+            </p:nvPicPr>
+            <p:blipFill>
+              <a:blip r:embed="rId3">
+                <a:extLst>
+                  <a:ext uri="{BEBA8EAE-BF5A-486C-A8C5-ECC9F3942E4B}">
+                    <a14:imgProps xmlns:a14="http://schemas.microsoft.com/office/drawing/2010/main">
+                      <a14:imgLayer r:embed="rId4">
+                        <a14:imgEffect>
+                          <a14:backgroundRemoval t="10000" b="90000" l="10000" r="90000">
+                            <a14:foregroundMark x1="71250" y1="22917" x2="71250" y2="22917"/>
+                            <a14:foregroundMark x1="85469" y1="77222" x2="85469" y2="77222"/>
+                            <a14:foregroundMark x1="83828" y1="77222" x2="83828" y2="77222"/>
+                            <a14:foregroundMark x1="84453" y1="77083" x2="84453" y2="77083"/>
+                            <a14:foregroundMark x1="86719" y1="77083" x2="86719" y2="77083"/>
+                            <a14:foregroundMark x1="82813" y1="76250" x2="82813" y2="76250"/>
+                            <a14:foregroundMark x1="81172" y1="79583" x2="81172" y2="79583"/>
+                            <a14:foregroundMark x1="77891" y1="80694" x2="77891" y2="80694"/>
+                            <a14:foregroundMark x1="80234" y1="80694" x2="80234" y2="80694"/>
+                            <a14:foregroundMark x1="78906" y1="80694" x2="78906" y2="80694"/>
+                            <a14:foregroundMark x1="76406" y1="80694" x2="76406" y2="80694"/>
+                            <a14:foregroundMark x1="74609" y1="80694" x2="74609" y2="80694"/>
+                            <a14:foregroundMark x1="72813" y1="79583" x2="72813" y2="79583"/>
+                            <a14:foregroundMark x1="72813" y1="79583" x2="72813" y2="79583"/>
+                            <a14:foregroundMark x1="73438" y1="80833" x2="73438" y2="80833"/>
+                            <a14:foregroundMark x1="72734" y1="77778" x2="72734" y2="77778"/>
+                            <a14:foregroundMark x1="72891" y1="76528" x2="72891" y2="76528"/>
+                            <a14:foregroundMark x1="28906" y1="75694" x2="28906" y2="75694"/>
+                            <a14:foregroundMark x1="37813" y1="75694" x2="37813" y2="75694"/>
+                            <a14:foregroundMark x1="38438" y1="75694" x2="38438" y2="75694"/>
+                            <a14:foregroundMark x1="42734" y1="75972" x2="42734" y2="75972"/>
+                            <a14:foregroundMark x1="45781" y1="75833" x2="45781" y2="75833"/>
+                            <a14:foregroundMark x1="62813" y1="76111" x2="62813" y2="76111"/>
+                            <a14:foregroundMark x1="66250" y1="75694" x2="66250" y2="75694"/>
+                            <a14:foregroundMark x1="68359" y1="75694" x2="68359" y2="75694"/>
+                            <a14:foregroundMark x1="70391" y1="75833" x2="70391" y2="75833"/>
+                            <a14:foregroundMark x1="64375" y1="75417" x2="64375" y2="75417"/>
+                            <a14:foregroundMark x1="60547" y1="75833" x2="60547" y2="75833"/>
+                            <a14:foregroundMark x1="57734" y1="75833" x2="57734" y2="75833"/>
+                            <a14:foregroundMark x1="55156" y1="75417" x2="55156" y2="75417"/>
+                            <a14:foregroundMark x1="52578" y1="75417" x2="52578" y2="75417"/>
+                            <a14:foregroundMark x1="50938" y1="75694" x2="50938" y2="75694"/>
+                            <a14:foregroundMark x1="48750" y1="75833" x2="48750" y2="75833"/>
+                            <a14:foregroundMark x1="40703" y1="75833" x2="40703" y2="75833"/>
+                            <a14:foregroundMark x1="35625" y1="75417" x2="35625" y2="75417"/>
+                            <a14:foregroundMark x1="32969" y1="75417" x2="32969" y2="75417"/>
+                            <a14:foregroundMark x1="69844" y1="23333" x2="69844" y2="23333"/>
+                            <a14:foregroundMark x1="27109" y1="80972" x2="27109" y2="80972"/>
+                            <a14:foregroundMark x1="25625" y1="80972" x2="25625" y2="80972"/>
+                            <a14:foregroundMark x1="23594" y1="80833" x2="23594" y2="80833"/>
+                            <a14:foregroundMark x1="21563" y1="80556" x2="21563" y2="80556"/>
+                            <a14:foregroundMark x1="22578" y1="80833" x2="22578" y2="80833"/>
+                            <a14:foregroundMark x1="20938" y1="80694" x2="20938" y2="80694"/>
+                            <a14:foregroundMark x1="19766" y1="79722" x2="19766" y2="79722"/>
+                            <a14:foregroundMark x1="19063" y1="77361" x2="19063" y2="77361"/>
+                            <a14:foregroundMark x1="17109" y1="76944" x2="17109" y2="76944"/>
+                            <a14:foregroundMark x1="15234" y1="77500" x2="15234" y2="77500"/>
+                            <a14:foregroundMark x1="12422" y1="67917" x2="12422" y2="67917"/>
+                            <a14:foregroundMark x1="12266" y1="70139" x2="12266" y2="70139"/>
+                            <a14:foregroundMark x1="12188" y1="58889" x2="12188" y2="58889"/>
+                            <a14:foregroundMark x1="12266" y1="61250" x2="12266" y2="61250"/>
+                            <a14:foregroundMark x1="12500" y1="44306" x2="12500" y2="44306"/>
+                            <a14:foregroundMark x1="12656" y1="36667" x2="12656" y2="36667"/>
+                            <a14:foregroundMark x1="12422" y1="28750" x2="12422" y2="28750"/>
+                            <a14:foregroundMark x1="13203" y1="22361" x2="13203" y2="22361"/>
+                            <a14:foregroundMark x1="13438" y1="73611" x2="13438" y2="73611"/>
+                            <a14:foregroundMark x1="88125" y1="72778" x2="88125" y2="72778"/>
+                            <a14:foregroundMark x1="88125" y1="72083" x2="88125" y2="72083"/>
+                            <a14:foregroundMark x1="88047" y1="73056" x2="88047" y2="73056"/>
+                          </a14:backgroundRemoval>
+                        </a14:imgEffect>
+                      </a14:imgLayer>
+                    </a14:imgProps>
+                  </a:ext>
+                  <a:ext uri="{28A0092B-C50C-407E-A947-70E740481C1C}">
+                    <a14:useLocalDpi xmlns:a14="http://schemas.microsoft.com/office/drawing/2010/main" val="0"/>
+                  </a:ext>
+                </a:extLst>
+              </a:blip>
+              <a:srcRect l="34993" t="18054" r="31739" b="18730"/>
+              <a:stretch>
+                <a:fillRect/>
+              </a:stretch>
+            </p:blipFill>
+            <p:spPr>
+              <a:xfrm>
+                <a:off x="3474720" y="4538719"/>
+                <a:ext cx="1684020" cy="1800000"/>
+              </a:xfrm>
+              <a:prstGeom prst="rect">
+                <a:avLst/>
+              </a:prstGeom>
+            </p:spPr>
+          </p:pic>
+          <p:pic>
+            <p:nvPicPr>
+              <p:cNvPr id="25" name="图片 24" descr="文本, 白板&#10;&#10;AI 生成的内容可能不正确。">
+                <a:extLst>
+                  <a:ext uri="{FF2B5EF4-FFF2-40B4-BE49-F238E27FC236}">
+                    <a16:creationId xmlns:a16="http://schemas.microsoft.com/office/drawing/2014/main" id="{680D1B91-D693-2787-29A3-10ADB36861F2}"/>
+                  </a:ext>
+                </a:extLst>
+              </p:cNvPr>
+              <p:cNvPicPr>
+                <a:picLocks noChangeAspect="1"/>
+              </p:cNvPicPr>
+              <p:nvPr/>
+            </p:nvPicPr>
+            <p:blipFill>
+              <a:blip r:embed="rId3">
+                <a:extLst>
+                  <a:ext uri="{BEBA8EAE-BF5A-486C-A8C5-ECC9F3942E4B}">
+                    <a14:imgProps xmlns:a14="http://schemas.microsoft.com/office/drawing/2010/main">
+                      <a14:imgLayer r:embed="rId4">
+                        <a14:imgEffect>
+                          <a14:backgroundRemoval t="10000" b="90000" l="10000" r="90000">
+                            <a14:foregroundMark x1="71250" y1="22917" x2="71250" y2="22917"/>
+                            <a14:foregroundMark x1="85469" y1="77222" x2="85469" y2="77222"/>
+                            <a14:foregroundMark x1="83828" y1="77222" x2="83828" y2="77222"/>
+                            <a14:foregroundMark x1="84453" y1="77083" x2="84453" y2="77083"/>
+                            <a14:foregroundMark x1="86719" y1="77083" x2="86719" y2="77083"/>
+                            <a14:foregroundMark x1="82813" y1="76250" x2="82813" y2="76250"/>
+                            <a14:foregroundMark x1="81172" y1="79583" x2="81172" y2="79583"/>
+                            <a14:foregroundMark x1="77891" y1="80694" x2="77891" y2="80694"/>
+                            <a14:foregroundMark x1="80234" y1="80694" x2="80234" y2="80694"/>
+                            <a14:foregroundMark x1="78906" y1="80694" x2="78906" y2="80694"/>
+                            <a14:foregroundMark x1="76406" y1="80694" x2="76406" y2="80694"/>
+                            <a14:foregroundMark x1="74609" y1="80694" x2="74609" y2="80694"/>
+                            <a14:foregroundMark x1="72813" y1="79583" x2="72813" y2="79583"/>
+                            <a14:foregroundMark x1="72813" y1="79583" x2="72813" y2="79583"/>
+                            <a14:foregroundMark x1="73438" y1="80833" x2="73438" y2="80833"/>
+                            <a14:foregroundMark x1="72734" y1="77778" x2="72734" y2="77778"/>
+                            <a14:foregroundMark x1="72891" y1="76528" x2="72891" y2="76528"/>
+                            <a14:foregroundMark x1="28906" y1="75694" x2="28906" y2="75694"/>
+                            <a14:foregroundMark x1="37813" y1="75694" x2="37813" y2="75694"/>
+                            <a14:foregroundMark x1="38438" y1="75694" x2="38438" y2="75694"/>
+                            <a14:foregroundMark x1="42734" y1="75972" x2="42734" y2="75972"/>
+                            <a14:foregroundMark x1="45781" y1="75833" x2="45781" y2="75833"/>
+                            <a14:foregroundMark x1="62813" y1="76111" x2="62813" y2="76111"/>
+                            <a14:foregroundMark x1="66250" y1="75694" x2="66250" y2="75694"/>
+                            <a14:foregroundMark x1="68359" y1="75694" x2="68359" y2="75694"/>
+                            <a14:foregroundMark x1="70391" y1="75833" x2="70391" y2="75833"/>
+                            <a14:foregroundMark x1="64375" y1="75417" x2="64375" y2="75417"/>
+                            <a14:foregroundMark x1="60547" y1="75833" x2="60547" y2="75833"/>
+                            <a14:foregroundMark x1="57734" y1="75833" x2="57734" y2="75833"/>
+                            <a14:foregroundMark x1="55156" y1="75417" x2="55156" y2="75417"/>
+                            <a14:foregroundMark x1="52578" y1="75417" x2="52578" y2="75417"/>
+                            <a14:foregroundMark x1="50938" y1="75694" x2="50938" y2="75694"/>
+                            <a14:foregroundMark x1="48750" y1="75833" x2="48750" y2="75833"/>
+                            <a14:foregroundMark x1="40703" y1="75833" x2="40703" y2="75833"/>
+                            <a14:foregroundMark x1="35625" y1="75417" x2="35625" y2="75417"/>
+                            <a14:foregroundMark x1="32969" y1="75417" x2="32969" y2="75417"/>
+                            <a14:foregroundMark x1="69844" y1="23333" x2="69844" y2="23333"/>
+                            <a14:foregroundMark x1="27109" y1="80972" x2="27109" y2="80972"/>
+                            <a14:foregroundMark x1="25625" y1="80972" x2="25625" y2="80972"/>
+                            <a14:foregroundMark x1="23594" y1="80833" x2="23594" y2="80833"/>
+                            <a14:foregroundMark x1="21563" y1="80556" x2="21563" y2="80556"/>
+                            <a14:foregroundMark x1="22578" y1="80833" x2="22578" y2="80833"/>
+                            <a14:foregroundMark x1="20938" y1="80694" x2="20938" y2="80694"/>
+                            <a14:foregroundMark x1="19766" y1="79722" x2="19766" y2="79722"/>
+                            <a14:foregroundMark x1="19063" y1="77361" x2="19063" y2="77361"/>
+                            <a14:foregroundMark x1="17109" y1="76944" x2="17109" y2="76944"/>
+                            <a14:foregroundMark x1="15234" y1="77500" x2="15234" y2="77500"/>
+                            <a14:foregroundMark x1="12422" y1="67917" x2="12422" y2="67917"/>
+                            <a14:foregroundMark x1="12266" y1="70139" x2="12266" y2="70139"/>
+                            <a14:foregroundMark x1="12188" y1="58889" x2="12188" y2="58889"/>
+                            <a14:foregroundMark x1="12266" y1="61250" x2="12266" y2="61250"/>
+                            <a14:foregroundMark x1="12500" y1="44306" x2="12500" y2="44306"/>
+                            <a14:foregroundMark x1="12656" y1="36667" x2="12656" y2="36667"/>
+                            <a14:foregroundMark x1="12422" y1="28750" x2="12422" y2="28750"/>
+                            <a14:foregroundMark x1="13203" y1="22361" x2="13203" y2="22361"/>
+                            <a14:foregroundMark x1="13438" y1="73611" x2="13438" y2="73611"/>
+                            <a14:foregroundMark x1="88125" y1="72778" x2="88125" y2="72778"/>
+                            <a14:foregroundMark x1="88125" y1="72083" x2="88125" y2="72083"/>
+                            <a14:foregroundMark x1="88047" y1="73056" x2="88047" y2="73056"/>
+                          </a14:backgroundRemoval>
+                        </a14:imgEffect>
+                      </a14:imgLayer>
+                    </a14:imgProps>
+                  </a:ext>
+                  <a:ext uri="{28A0092B-C50C-407E-A947-70E740481C1C}">
+                    <a14:useLocalDpi xmlns:a14="http://schemas.microsoft.com/office/drawing/2010/main" val="0"/>
+                  </a:ext>
+                </a:extLst>
+              </a:blip>
+              <a:srcRect l="34993" t="18054" r="31739" b="18730"/>
+              <a:stretch>
+                <a:fillRect/>
+              </a:stretch>
+            </p:blipFill>
+            <p:spPr>
+              <a:xfrm>
+                <a:off x="5158740" y="4538719"/>
+                <a:ext cx="1684020" cy="1800000"/>
+              </a:xfrm>
+              <a:prstGeom prst="rect">
+                <a:avLst/>
+              </a:prstGeom>
+            </p:spPr>
+          </p:pic>
+          <p:pic>
+            <p:nvPicPr>
+              <p:cNvPr id="26" name="图片 25" descr="文本, 白板&#10;&#10;AI 生成的内容可能不正确。">
+                <a:extLst>
+                  <a:ext uri="{FF2B5EF4-FFF2-40B4-BE49-F238E27FC236}">
+                    <a16:creationId xmlns:a16="http://schemas.microsoft.com/office/drawing/2014/main" id="{FEB47205-4CD9-C9C4-2F94-25F4577BB494}"/>
+                  </a:ext>
+                </a:extLst>
+              </p:cNvPr>
+              <p:cNvPicPr>
+                <a:picLocks noChangeAspect="1"/>
+              </p:cNvPicPr>
+              <p:nvPr/>
+            </p:nvPicPr>
+            <p:blipFill>
+              <a:blip r:embed="rId3">
+                <a:extLst>
+                  <a:ext uri="{BEBA8EAE-BF5A-486C-A8C5-ECC9F3942E4B}">
+                    <a14:imgProps xmlns:a14="http://schemas.microsoft.com/office/drawing/2010/main">
+                      <a14:imgLayer r:embed="rId4">
+                        <a14:imgEffect>
+                          <a14:backgroundRemoval t="10000" b="90000" l="10000" r="90000">
+                            <a14:foregroundMark x1="71250" y1="22917" x2="71250" y2="22917"/>
+                            <a14:foregroundMark x1="85469" y1="77222" x2="85469" y2="77222"/>
+                            <a14:foregroundMark x1="83828" y1="77222" x2="83828" y2="77222"/>
+                            <a14:foregroundMark x1="84453" y1="77083" x2="84453" y2="77083"/>
+                            <a14:foregroundMark x1="86719" y1="77083" x2="86719" y2="77083"/>
+                            <a14:foregroundMark x1="82813" y1="76250" x2="82813" y2="76250"/>
+                            <a14:foregroundMark x1="81172" y1="79583" x2="81172" y2="79583"/>
+                            <a14:foregroundMark x1="77891" y1="80694" x2="77891" y2="80694"/>
+                            <a14:foregroundMark x1="80234" y1="80694" x2="80234" y2="80694"/>
+                            <a14:foregroundMark x1="78906" y1="80694" x2="78906" y2="80694"/>
+                            <a14:foregroundMark x1="76406" y1="80694" x2="76406" y2="80694"/>
+                            <a14:foregroundMark x1="74609" y1="80694" x2="74609" y2="80694"/>
+                            <a14:foregroundMark x1="72813" y1="79583" x2="72813" y2="79583"/>
+                            <a14:foregroundMark x1="72813" y1="79583" x2="72813" y2="79583"/>
+                            <a14:foregroundMark x1="73438" y1="80833" x2="73438" y2="80833"/>
+                            <a14:foregroundMark x1="72734" y1="77778" x2="72734" y2="77778"/>
+                            <a14:foregroundMark x1="72891" y1="76528" x2="72891" y2="76528"/>
+                            <a14:foregroundMark x1="28906" y1="75694" x2="28906" y2="75694"/>
+                            <a14:foregroundMark x1="37813" y1="75694" x2="37813" y2="75694"/>
+                            <a14:foregroundMark x1="38438" y1="75694" x2="38438" y2="75694"/>
+                            <a14:foregroundMark x1="42734" y1="75972" x2="42734" y2="75972"/>
+                            <a14:foregroundMark x1="45781" y1="75833" x2="45781" y2="75833"/>
+                            <a14:foregroundMark x1="62813" y1="76111" x2="62813" y2="76111"/>
+                            <a14:foregroundMark x1="66250" y1="75694" x2="66250" y2="75694"/>
+                            <a14:foregroundMark x1="68359" y1="75694" x2="68359" y2="75694"/>
+                            <a14:foregroundMark x1="70391" y1="75833" x2="70391" y2="75833"/>
+                            <a14:foregroundMark x1="64375" y1="75417" x2="64375" y2="75417"/>
+                            <a14:foregroundMark x1="60547" y1="75833" x2="60547" y2="75833"/>
+                            <a14:foregroundMark x1="57734" y1="75833" x2="57734" y2="75833"/>
+                            <a14:foregroundMark x1="55156" y1="75417" x2="55156" y2="75417"/>
+                            <a14:foregroundMark x1="52578" y1="75417" x2="52578" y2="75417"/>
+                            <a14:foregroundMark x1="50938" y1="75694" x2="50938" y2="75694"/>
+                            <a14:foregroundMark x1="48750" y1="75833" x2="48750" y2="75833"/>
+                            <a14:foregroundMark x1="40703" y1="75833" x2="40703" y2="75833"/>
+                            <a14:foregroundMark x1="35625" y1="75417" x2="35625" y2="75417"/>
+                            <a14:foregroundMark x1="32969" y1="75417" x2="32969" y2="75417"/>
+                            <a14:foregroundMark x1="69844" y1="23333" x2="69844" y2="23333"/>
+                            <a14:foregroundMark x1="27109" y1="80972" x2="27109" y2="80972"/>
+                            <a14:foregroundMark x1="25625" y1="80972" x2="25625" y2="80972"/>
+                            <a14:foregroundMark x1="23594" y1="80833" x2="23594" y2="80833"/>
+                            <a14:foregroundMark x1="21563" y1="80556" x2="21563" y2="80556"/>
+                            <a14:foregroundMark x1="22578" y1="80833" x2="22578" y2="80833"/>
+                            <a14:foregroundMark x1="20938" y1="80694" x2="20938" y2="80694"/>
+                            <a14:foregroundMark x1="19766" y1="79722" x2="19766" y2="79722"/>
+                            <a14:foregroundMark x1="19063" y1="77361" x2="19063" y2="77361"/>
+                            <a14:foregroundMark x1="17109" y1="76944" x2="17109" y2="76944"/>
+                            <a14:foregroundMark x1="15234" y1="77500" x2="15234" y2="77500"/>
+                            <a14:foregroundMark x1="12422" y1="67917" x2="12422" y2="67917"/>
+                            <a14:foregroundMark x1="12266" y1="70139" x2="12266" y2="70139"/>
+                            <a14:foregroundMark x1="12188" y1="58889" x2="12188" y2="58889"/>
+                            <a14:foregroundMark x1="12266" y1="61250" x2="12266" y2="61250"/>
+                            <a14:foregroundMark x1="12500" y1="44306" x2="12500" y2="44306"/>
+                            <a14:foregroundMark x1="12656" y1="36667" x2="12656" y2="36667"/>
+                            <a14:foregroundMark x1="12422" y1="28750" x2="12422" y2="28750"/>
+                            <a14:foregroundMark x1="13203" y1="22361" x2="13203" y2="22361"/>
+                            <a14:foregroundMark x1="13438" y1="73611" x2="13438" y2="73611"/>
+                            <a14:foregroundMark x1="88125" y1="72778" x2="88125" y2="72778"/>
+                            <a14:foregroundMark x1="88125" y1="72083" x2="88125" y2="72083"/>
+                            <a14:foregroundMark x1="88047" y1="73056" x2="88047" y2="73056"/>
+                          </a14:backgroundRemoval>
+                        </a14:imgEffect>
+                      </a14:imgLayer>
+                    </a14:imgProps>
+                  </a:ext>
+                  <a:ext uri="{28A0092B-C50C-407E-A947-70E740481C1C}">
+                    <a14:useLocalDpi xmlns:a14="http://schemas.microsoft.com/office/drawing/2010/main" val="0"/>
+                  </a:ext>
+                </a:extLst>
+              </a:blip>
+              <a:srcRect l="34993" t="18054" r="31739" b="18730"/>
+              <a:stretch>
+                <a:fillRect/>
+              </a:stretch>
+            </p:blipFill>
+            <p:spPr>
+              <a:xfrm>
+                <a:off x="6842760" y="4538719"/>
+                <a:ext cx="1684020" cy="1800000"/>
+              </a:xfrm>
+              <a:prstGeom prst="rect">
+                <a:avLst/>
+              </a:prstGeom>
+            </p:spPr>
+          </p:pic>
+          <p:pic>
+            <p:nvPicPr>
+              <p:cNvPr id="27" name="图片 26" descr="文本, 白板&#10;&#10;AI 生成的内容可能不正确。">
+                <a:extLst>
+                  <a:ext uri="{FF2B5EF4-FFF2-40B4-BE49-F238E27FC236}">
+                    <a16:creationId xmlns:a16="http://schemas.microsoft.com/office/drawing/2014/main" id="{BD3A18F3-130A-FFEA-0115-2C0261233829}"/>
+                  </a:ext>
+                </a:extLst>
+              </p:cNvPr>
+              <p:cNvPicPr>
+                <a:picLocks noChangeAspect="1"/>
+              </p:cNvPicPr>
+              <p:nvPr/>
+            </p:nvPicPr>
+            <p:blipFill>
+              <a:blip r:embed="rId3">
+                <a:extLst>
+                  <a:ext uri="{BEBA8EAE-BF5A-486C-A8C5-ECC9F3942E4B}">
+                    <a14:imgProps xmlns:a14="http://schemas.microsoft.com/office/drawing/2010/main">
+                      <a14:imgLayer r:embed="rId4">
+                        <a14:imgEffect>
+                          <a14:backgroundRemoval t="10000" b="90000" l="10000" r="90000">
+                            <a14:foregroundMark x1="71250" y1="22917" x2="71250" y2="22917"/>
+                            <a14:foregroundMark x1="85469" y1="77222" x2="85469" y2="77222"/>
+                            <a14:foregroundMark x1="83828" y1="77222" x2="83828" y2="77222"/>
+                            <a14:foregroundMark x1="84453" y1="77083" x2="84453" y2="77083"/>
+                            <a14:foregroundMark x1="86719" y1="77083" x2="86719" y2="77083"/>
+                            <a14:foregroundMark x1="82813" y1="76250" x2="82813" y2="76250"/>
+                            <a14:foregroundMark x1="81172" y1="79583" x2="81172" y2="79583"/>
+                            <a14:foregroundMark x1="77891" y1="80694" x2="77891" y2="80694"/>
+                            <a14:foregroundMark x1="80234" y1="80694" x2="80234" y2="80694"/>
+                            <a14:foregroundMark x1="78906" y1="80694" x2="78906" y2="80694"/>
+                            <a14:foregroundMark x1="76406" y1="80694" x2="76406" y2="80694"/>
+                            <a14:foregroundMark x1="74609" y1="80694" x2="74609" y2="80694"/>
+                            <a14:foregroundMark x1="72813" y1="79583" x2="72813" y2="79583"/>
+                            <a14:foregroundMark x1="72813" y1="79583" x2="72813" y2="79583"/>
+                            <a14:foregroundMark x1="73438" y1="80833" x2="73438" y2="80833"/>
+                            <a14:foregroundMark x1="72734" y1="77778" x2="72734" y2="77778"/>
+                            <a14:foregroundMark x1="72891" y1="76528" x2="72891" y2="76528"/>
+                            <a14:foregroundMark x1="28906" y1="75694" x2="28906" y2="75694"/>
+                            <a14:foregroundMark x1="37813" y1="75694" x2="37813" y2="75694"/>
+                            <a14:foregroundMark x1="38438" y1="75694" x2="38438" y2="75694"/>
+                            <a14:foregroundMark x1="42734" y1="75972" x2="42734" y2="75972"/>
+                            <a14:foregroundMark x1="45781" y1="75833" x2="45781" y2="75833"/>
+                            <a14:foregroundMark x1="62813" y1="76111" x2="62813" y2="76111"/>
+                            <a14:foregroundMark x1="66250" y1="75694" x2="66250" y2="75694"/>
+                            <a14:foregroundMark x1="68359" y1="75694" x2="68359" y2="75694"/>
+                            <a14:foregroundMark x1="70391" y1="75833" x2="70391" y2="75833"/>
+                            <a14:foregroundMark x1="64375" y1="75417" x2="64375" y2="75417"/>
+                            <a14:foregroundMark x1="60547" y1="75833" x2="60547" y2="75833"/>
+                            <a14:foregroundMark x1="57734" y1="75833" x2="57734" y2="75833"/>
+                            <a14:foregroundMark x1="55156" y1="75417" x2="55156" y2="75417"/>
+                            <a14:foregroundMark x1="52578" y1="75417" x2="52578" y2="75417"/>
+                            <a14:foregroundMark x1="50938" y1="75694" x2="50938" y2="75694"/>
+                            <a14:foregroundMark x1="48750" y1="75833" x2="48750" y2="75833"/>
+                            <a14:foregroundMark x1="40703" y1="75833" x2="40703" y2="75833"/>
+                            <a14:foregroundMark x1="35625" y1="75417" x2="35625" y2="75417"/>
+                            <a14:foregroundMark x1="32969" y1="75417" x2="32969" y2="75417"/>
+                            <a14:foregroundMark x1="69844" y1="23333" x2="69844" y2="23333"/>
+                            <a14:foregroundMark x1="27109" y1="80972" x2="27109" y2="80972"/>
+                            <a14:foregroundMark x1="25625" y1="80972" x2="25625" y2="80972"/>
+                            <a14:foregroundMark x1="23594" y1="80833" x2="23594" y2="80833"/>
+                            <a14:foregroundMark x1="21563" y1="80556" x2="21563" y2="80556"/>
+                            <a14:foregroundMark x1="22578" y1="80833" x2="22578" y2="80833"/>
+                            <a14:foregroundMark x1="20938" y1="80694" x2="20938" y2="80694"/>
+                            <a14:foregroundMark x1="19766" y1="79722" x2="19766" y2="79722"/>
+                            <a14:foregroundMark x1="19063" y1="77361" x2="19063" y2="77361"/>
+                            <a14:foregroundMark x1="17109" y1="76944" x2="17109" y2="76944"/>
+                            <a14:foregroundMark x1="15234" y1="77500" x2="15234" y2="77500"/>
+                            <a14:foregroundMark x1="12422" y1="67917" x2="12422" y2="67917"/>
+                            <a14:foregroundMark x1="12266" y1="70139" x2="12266" y2="70139"/>
+                            <a14:foregroundMark x1="12188" y1="58889" x2="12188" y2="58889"/>
+                            <a14:foregroundMark x1="12266" y1="61250" x2="12266" y2="61250"/>
+                            <a14:foregroundMark x1="12500" y1="44306" x2="12500" y2="44306"/>
+                            <a14:foregroundMark x1="12656" y1="36667" x2="12656" y2="36667"/>
+                            <a14:foregroundMark x1="12422" y1="28750" x2="12422" y2="28750"/>
+                            <a14:foregroundMark x1="13203" y1="22361" x2="13203" y2="22361"/>
+                            <a14:foregroundMark x1="13438" y1="73611" x2="13438" y2="73611"/>
+                            <a14:foregroundMark x1="88125" y1="72778" x2="88125" y2="72778"/>
+                            <a14:foregroundMark x1="88125" y1="72083" x2="88125" y2="72083"/>
+                            <a14:foregroundMark x1="88047" y1="73056" x2="88047" y2="73056"/>
+                          </a14:backgroundRemoval>
+                        </a14:imgEffect>
+                      </a14:imgLayer>
+                    </a14:imgProps>
+                  </a:ext>
+                  <a:ext uri="{28A0092B-C50C-407E-A947-70E740481C1C}">
+                    <a14:useLocalDpi xmlns:a14="http://schemas.microsoft.com/office/drawing/2010/main" val="0"/>
+                  </a:ext>
+                </a:extLst>
+              </a:blip>
+              <a:srcRect l="34993" t="18054" r="31739" b="18730"/>
+              <a:stretch>
+                <a:fillRect/>
+              </a:stretch>
+            </p:blipFill>
+            <p:spPr>
+              <a:xfrm>
+                <a:off x="8526780" y="4537540"/>
+                <a:ext cx="1684020" cy="1800000"/>
+              </a:xfrm>
+              <a:prstGeom prst="rect">
+                <a:avLst/>
+              </a:prstGeom>
+            </p:spPr>
+          </p:pic>
+        </p:grpSp>
+        <p:pic>
+          <p:nvPicPr>
+            <p:cNvPr id="17" name="图片 16" descr="在沙滩上&#10;&#10;AI 生成的内容可能不正确。">
+              <a:extLst>
+                <a:ext uri="{FF2B5EF4-FFF2-40B4-BE49-F238E27FC236}">
+                  <a16:creationId xmlns:a16="http://schemas.microsoft.com/office/drawing/2014/main" id="{2C9152EE-2075-06DA-7E42-7D6E364752D8}"/>
+                </a:ext>
+              </a:extLst>
+            </p:cNvPr>
+            <p:cNvPicPr>
+              <a:picLocks noChangeAspect="1"/>
+            </p:cNvPicPr>
+            <p:nvPr/>
+          </p:nvPicPr>
+          <p:blipFill>
+            <a:blip r:embed="rId7">
+              <a:extLst>
+                <a:ext uri="{BEBA8EAE-BF5A-486C-A8C5-ECC9F3942E4B}">
+                  <a14:imgProps xmlns:a14="http://schemas.microsoft.com/office/drawing/2010/main">
+                    <a14:imgLayer r:embed="rId8">
+                      <a14:imgEffect>
+                        <a14:backgroundRemoval t="40440" b="49524" l="16862" r="82747">
+                          <a14:foregroundMark x1="19596" y1="44945" x2="19596" y2="44945"/>
+                          <a14:foregroundMark x1="16992" y1="44872" x2="16992" y2="44872"/>
+                          <a14:foregroundMark x1="21029" y1="41868" x2="21029" y2="41868"/>
+                          <a14:foregroundMark x1="26172" y1="40476" x2="26172" y2="40476"/>
+                          <a14:foregroundMark x1="27148" y1="45201" x2="27148" y2="45201"/>
+                          <a14:foregroundMark x1="26172" y1="47326" x2="26172" y2="47326"/>
+                          <a14:foregroundMark x1="25065" y1="48278" x2="25065" y2="48278"/>
+                          <a14:foregroundMark x1="31185" y1="48278" x2="31185" y2="48278"/>
+                          <a14:foregroundMark x1="36654" y1="47436" x2="36654" y2="47436"/>
+                          <a14:foregroundMark x1="46224" y1="45128" x2="46224" y2="45128"/>
+                          <a14:foregroundMark x1="48893" y1="47582" x2="48893" y2="47582"/>
+                          <a14:foregroundMark x1="46875" y1="43114" x2="46875" y2="43114"/>
+                          <a14:foregroundMark x1="41536" y1="41245" x2="41536" y2="41245"/>
+                          <a14:foregroundMark x1="54362" y1="41685" x2="54362" y2="41685"/>
+                          <a14:foregroundMark x1="52539" y1="44432" x2="52539" y2="44432"/>
+                          <a14:foregroundMark x1="53125" y1="47326" x2="53125" y2="47582"/>
+                          <a14:foregroundMark x1="56706" y1="43700" x2="56706" y2="43700"/>
+                          <a14:foregroundMark x1="71615" y1="46557" x2="71615" y2="46557"/>
+                          <a14:foregroundMark x1="78516" y1="44066" x2="78516" y2="44066"/>
+                          <a14:foregroundMark x1="79753" y1="47070" x2="79753" y2="47070"/>
+                          <a14:foregroundMark x1="82747" y1="48571" x2="82747" y2="48571"/>
+                          <a14:foregroundMark x1="81771" y1="41429" x2="81771" y2="41429"/>
+                          <a14:foregroundMark x1="58138" y1="41502" x2="58138" y2="41502"/>
+                          <a14:backgroundMark x1="39193" y1="44505" x2="39193" y2="44505"/>
+                          <a14:backgroundMark x1="42448" y1="45201" x2="42448" y2="45201"/>
+                        </a14:backgroundRemoval>
+                      </a14:imgEffect>
+                    </a14:imgLayer>
+                  </a14:imgProps>
+                </a:ext>
+                <a:ext uri="{28A0092B-C50C-407E-A947-70E740481C1C}">
+                  <a14:useLocalDpi xmlns:a14="http://schemas.microsoft.com/office/drawing/2010/main" val="0"/>
+                </a:ext>
+              </a:extLst>
+            </a:blip>
+            <a:srcRect l="12922" t="39546" r="66066" b="49297"/>
+            <a:stretch>
+              <a:fillRect/>
+            </a:stretch>
+          </p:blipFill>
+          <p:spPr>
+            <a:xfrm>
+              <a:off x="2595768" y="4884155"/>
+              <a:ext cx="1172801" cy="1106769"/>
+            </a:xfrm>
+            <a:prstGeom prst="rect">
+              <a:avLst/>
+            </a:prstGeom>
+          </p:spPr>
+        </p:pic>
+        <p:pic>
+          <p:nvPicPr>
+            <p:cNvPr id="18" name="图片 17" descr="在沙滩上&#10;&#10;AI 生成的内容可能不正确。">
+              <a:extLst>
+                <a:ext uri="{FF2B5EF4-FFF2-40B4-BE49-F238E27FC236}">
+                  <a16:creationId xmlns:a16="http://schemas.microsoft.com/office/drawing/2014/main" id="{3A176C04-FC28-1530-7022-453A02ACF60F}"/>
+                </a:ext>
+              </a:extLst>
+            </p:cNvPr>
+            <p:cNvPicPr>
+              <a:picLocks noChangeAspect="1"/>
+            </p:cNvPicPr>
+            <p:nvPr/>
+          </p:nvPicPr>
+          <p:blipFill>
+            <a:blip r:embed="rId7">
+              <a:extLst>
+                <a:ext uri="{BEBA8EAE-BF5A-486C-A8C5-ECC9F3942E4B}">
+                  <a14:imgProps xmlns:a14="http://schemas.microsoft.com/office/drawing/2010/main">
+                    <a14:imgLayer r:embed="rId8">
+                      <a14:imgEffect>
+                        <a14:backgroundRemoval t="40440" b="49524" l="16862" r="82747">
+                          <a14:foregroundMark x1="19596" y1="44945" x2="19596" y2="44945"/>
+                          <a14:foregroundMark x1="16992" y1="44872" x2="16992" y2="44872"/>
+                          <a14:foregroundMark x1="21029" y1="41868" x2="21029" y2="41868"/>
+                          <a14:foregroundMark x1="26172" y1="40476" x2="26172" y2="40476"/>
+                          <a14:foregroundMark x1="27148" y1="45201" x2="27148" y2="45201"/>
+                          <a14:foregroundMark x1="26172" y1="47326" x2="26172" y2="47326"/>
+                          <a14:foregroundMark x1="25065" y1="48278" x2="25065" y2="48278"/>
+                          <a14:foregroundMark x1="31185" y1="48278" x2="31185" y2="48278"/>
+                          <a14:foregroundMark x1="36654" y1="47436" x2="36654" y2="47436"/>
+                          <a14:foregroundMark x1="46224" y1="45128" x2="46224" y2="45128"/>
+                          <a14:foregroundMark x1="48893" y1="47582" x2="48893" y2="47582"/>
+                          <a14:foregroundMark x1="46875" y1="43114" x2="46875" y2="43114"/>
+                          <a14:foregroundMark x1="41536" y1="41245" x2="41536" y2="41245"/>
+                          <a14:foregroundMark x1="54362" y1="41685" x2="54362" y2="41685"/>
+                          <a14:foregroundMark x1="52539" y1="44432" x2="52539" y2="44432"/>
+                          <a14:foregroundMark x1="53125" y1="47326" x2="53125" y2="47582"/>
+                          <a14:foregroundMark x1="56706" y1="43700" x2="56706" y2="43700"/>
+                          <a14:foregroundMark x1="71615" y1="46557" x2="71615" y2="46557"/>
+                          <a14:foregroundMark x1="78516" y1="44066" x2="78516" y2="44066"/>
+                          <a14:foregroundMark x1="79753" y1="47070" x2="79753" y2="47070"/>
+                          <a14:foregroundMark x1="82747" y1="48571" x2="82747" y2="48571"/>
+                          <a14:foregroundMark x1="81771" y1="41429" x2="81771" y2="41429"/>
+                          <a14:foregroundMark x1="58138" y1="41502" x2="58138" y2="41502"/>
+                          <a14:backgroundMark x1="39193" y1="44505" x2="39193" y2="44505"/>
+                          <a14:backgroundMark x1="42448" y1="45201" x2="42448" y2="45201"/>
+                        </a14:backgroundRemoval>
+                      </a14:imgEffect>
+                    </a14:imgLayer>
+                  </a14:imgProps>
+                </a:ext>
+                <a:ext uri="{28A0092B-C50C-407E-A947-70E740481C1C}">
+                  <a14:useLocalDpi xmlns:a14="http://schemas.microsoft.com/office/drawing/2010/main" val="0"/>
+                </a:ext>
+              </a:extLst>
+            </a:blip>
+            <a:srcRect l="34301" t="39546" r="49274" b="49297"/>
+            <a:stretch>
+              <a:fillRect/>
+            </a:stretch>
+          </p:blipFill>
+          <p:spPr>
+            <a:xfrm>
+              <a:off x="4694859" y="4884155"/>
+              <a:ext cx="916769" cy="1106769"/>
+            </a:xfrm>
+            <a:prstGeom prst="rect">
+              <a:avLst/>
+            </a:prstGeom>
+          </p:spPr>
+        </p:pic>
+        <p:pic>
+          <p:nvPicPr>
+            <p:cNvPr id="19" name="图片 18" descr="在沙滩上&#10;&#10;AI 生成的内容可能不正确。">
+              <a:extLst>
+                <a:ext uri="{FF2B5EF4-FFF2-40B4-BE49-F238E27FC236}">
+                  <a16:creationId xmlns:a16="http://schemas.microsoft.com/office/drawing/2014/main" id="{71AA31FE-695A-7439-B8A6-6FC734CBB441}"/>
+                </a:ext>
+              </a:extLst>
+            </p:cNvPr>
+            <p:cNvPicPr>
+              <a:picLocks noChangeAspect="1"/>
+            </p:cNvPicPr>
+            <p:nvPr/>
+          </p:nvPicPr>
+          <p:blipFill>
+            <a:blip r:embed="rId7">
+              <a:extLst>
+                <a:ext uri="{BEBA8EAE-BF5A-486C-A8C5-ECC9F3942E4B}">
+                  <a14:imgProps xmlns:a14="http://schemas.microsoft.com/office/drawing/2010/main">
+                    <a14:imgLayer r:embed="rId8">
+                      <a14:imgEffect>
+                        <a14:backgroundRemoval t="40440" b="49524" l="16862" r="82747">
+                          <a14:foregroundMark x1="19596" y1="44945" x2="19596" y2="44945"/>
+                          <a14:foregroundMark x1="16992" y1="44872" x2="16992" y2="44872"/>
+                          <a14:foregroundMark x1="21029" y1="41868" x2="21029" y2="41868"/>
+                          <a14:foregroundMark x1="26172" y1="40476" x2="26172" y2="40476"/>
+                          <a14:foregroundMark x1="27148" y1="45201" x2="27148" y2="45201"/>
+                          <a14:foregroundMark x1="26172" y1="47326" x2="26172" y2="47326"/>
+                          <a14:foregroundMark x1="25065" y1="48278" x2="25065" y2="48278"/>
+                          <a14:foregroundMark x1="31185" y1="48278" x2="31185" y2="48278"/>
+                          <a14:foregroundMark x1="36654" y1="47436" x2="36654" y2="47436"/>
+                          <a14:foregroundMark x1="46224" y1="45128" x2="46224" y2="45128"/>
+                          <a14:foregroundMark x1="48893" y1="47582" x2="48893" y2="47582"/>
+                          <a14:foregroundMark x1="46875" y1="43114" x2="46875" y2="43114"/>
+                          <a14:foregroundMark x1="41536" y1="41245" x2="41536" y2="41245"/>
+                          <a14:foregroundMark x1="54362" y1="41685" x2="54362" y2="41685"/>
+                          <a14:foregroundMark x1="52539" y1="44432" x2="52539" y2="44432"/>
+                          <a14:foregroundMark x1="53125" y1="47326" x2="53125" y2="47582"/>
+                          <a14:foregroundMark x1="56706" y1="43700" x2="56706" y2="43700"/>
+                          <a14:foregroundMark x1="71615" y1="46557" x2="71615" y2="46557"/>
+                          <a14:foregroundMark x1="78516" y1="44066" x2="78516" y2="44066"/>
+                          <a14:foregroundMark x1="79753" y1="47070" x2="79753" y2="47070"/>
+                          <a14:foregroundMark x1="82747" y1="48571" x2="82747" y2="48571"/>
+                          <a14:foregroundMark x1="81771" y1="41429" x2="81771" y2="41429"/>
+                          <a14:foregroundMark x1="58138" y1="41502" x2="58138" y2="41502"/>
+                          <a14:backgroundMark x1="39193" y1="44505" x2="39193" y2="44505"/>
+                          <a14:backgroundMark x1="42448" y1="45201" x2="42448" y2="45201"/>
+                        </a14:backgroundRemoval>
+                      </a14:imgEffect>
+                    </a14:imgLayer>
+                  </a14:imgProps>
+                </a:ext>
+                <a:ext uri="{28A0092B-C50C-407E-A947-70E740481C1C}">
+                  <a14:useLocalDpi xmlns:a14="http://schemas.microsoft.com/office/drawing/2010/main" val="0"/>
+                </a:ext>
+              </a:extLst>
+            </a:blip>
+            <a:srcRect l="50726" t="39546" r="32849" b="49297"/>
+            <a:stretch>
+              <a:fillRect/>
+            </a:stretch>
+          </p:blipFill>
+          <p:spPr>
+            <a:xfrm>
+              <a:off x="6550358" y="4877714"/>
+              <a:ext cx="916769" cy="1106769"/>
+            </a:xfrm>
+            <a:prstGeom prst="rect">
+              <a:avLst/>
+            </a:prstGeom>
+          </p:spPr>
+        </p:pic>
+        <p:pic>
+          <p:nvPicPr>
+            <p:cNvPr id="20" name="图片 19" descr="在沙滩上&#10;&#10;AI 生成的内容可能不正确。">
+              <a:extLst>
+                <a:ext uri="{FF2B5EF4-FFF2-40B4-BE49-F238E27FC236}">
+                  <a16:creationId xmlns:a16="http://schemas.microsoft.com/office/drawing/2014/main" id="{0E0DE69E-B5B8-6B7F-0A22-67E9E0D4812D}"/>
+                </a:ext>
+              </a:extLst>
+            </p:cNvPr>
+            <p:cNvPicPr>
+              <a:picLocks noChangeAspect="1"/>
+            </p:cNvPicPr>
+            <p:nvPr/>
+          </p:nvPicPr>
+          <p:blipFill>
+            <a:blip r:embed="rId7">
+              <a:extLst>
+                <a:ext uri="{BEBA8EAE-BF5A-486C-A8C5-ECC9F3942E4B}">
+                  <a14:imgProps xmlns:a14="http://schemas.microsoft.com/office/drawing/2010/main">
+                    <a14:imgLayer r:embed="rId8">
+                      <a14:imgEffect>
+                        <a14:backgroundRemoval t="40440" b="49524" l="16862" r="82747">
+                          <a14:foregroundMark x1="19596" y1="44945" x2="19596" y2="44945"/>
+                          <a14:foregroundMark x1="16992" y1="44872" x2="16992" y2="44872"/>
+                          <a14:foregroundMark x1="21029" y1="41868" x2="21029" y2="41868"/>
+                          <a14:foregroundMark x1="26172" y1="40476" x2="26172" y2="40476"/>
+                          <a14:foregroundMark x1="27148" y1="45201" x2="27148" y2="45201"/>
+                          <a14:foregroundMark x1="26172" y1="47326" x2="26172" y2="47326"/>
+                          <a14:foregroundMark x1="25065" y1="48278" x2="25065" y2="48278"/>
+                          <a14:foregroundMark x1="31185" y1="48278" x2="31185" y2="48278"/>
+                          <a14:foregroundMark x1="36654" y1="47436" x2="36654" y2="47436"/>
+                          <a14:foregroundMark x1="46224" y1="45128" x2="46224" y2="45128"/>
+                          <a14:foregroundMark x1="48893" y1="47582" x2="48893" y2="47582"/>
+                          <a14:foregroundMark x1="46875" y1="43114" x2="46875" y2="43114"/>
+                          <a14:foregroundMark x1="41536" y1="41245" x2="41536" y2="41245"/>
+                          <a14:foregroundMark x1="54362" y1="41685" x2="54362" y2="41685"/>
+                          <a14:foregroundMark x1="52539" y1="44432" x2="52539" y2="44432"/>
+                          <a14:foregroundMark x1="53125" y1="47326" x2="53125" y2="47582"/>
+                          <a14:foregroundMark x1="56706" y1="43700" x2="56706" y2="43700"/>
+                          <a14:foregroundMark x1="71615" y1="46557" x2="71615" y2="46557"/>
+                          <a14:foregroundMark x1="78516" y1="44066" x2="78516" y2="44066"/>
+                          <a14:foregroundMark x1="79753" y1="47070" x2="79753" y2="47070"/>
+                          <a14:foregroundMark x1="82747" y1="48571" x2="82747" y2="48571"/>
+                          <a14:foregroundMark x1="81771" y1="41429" x2="81771" y2="41429"/>
+                          <a14:foregroundMark x1="58138" y1="41502" x2="58138" y2="41502"/>
+                          <a14:backgroundMark x1="39193" y1="44505" x2="39193" y2="44505"/>
+                          <a14:backgroundMark x1="42448" y1="45201" x2="42448" y2="45201"/>
+                        </a14:backgroundRemoval>
+                      </a14:imgEffect>
+                    </a14:imgLayer>
+                  </a14:imgProps>
+                </a:ext>
+                <a:ext uri="{28A0092B-C50C-407E-A947-70E740481C1C}">
+                  <a14:useLocalDpi xmlns:a14="http://schemas.microsoft.com/office/drawing/2010/main" val="0"/>
+                </a:ext>
+              </a:extLst>
+            </a:blip>
+            <a:srcRect l="67518" t="39546" r="11470" b="49297"/>
+            <a:stretch>
+              <a:fillRect/>
+            </a:stretch>
+          </p:blipFill>
+          <p:spPr>
+            <a:xfrm>
+              <a:off x="8412077" y="4884838"/>
+              <a:ext cx="1172801" cy="1106769"/>
+            </a:xfrm>
+            <a:prstGeom prst="rect">
+              <a:avLst/>
+            </a:prstGeom>
+          </p:spPr>
+        </p:pic>
+      </p:grpSp>
+    </p:spTree>
+    <p:extLst>
+      <p:ext uri="{BB962C8B-B14F-4D97-AF65-F5344CB8AC3E}">
+        <p14:creationId xmlns:p14="http://schemas.microsoft.com/office/powerpoint/2010/main" val="940368375"/>
       </p:ext>
     </p:extLst>
   </p:cSld>
